--- a/Paper-and-Pitch/Pitch.pptx
+++ b/Paper-and-Pitch/Pitch.pptx
@@ -5,6 +5,7 @@
     <p:sldMasterId xmlns:r="http://schemas.openxmlformats.org/officeDocument/2006/relationships" id="2147483648" r:id="Rb2b777ad7bb04d04"/>
   </p:sldMasterIdLst>
   <p:sldIdLst>
+    <p:sldId xmlns:ns0="http://schemas.openxmlformats.org/officeDocument/2006/relationships" id="267" ns0:id="rId16"/>
     <p:sldId xmlns:r="http://schemas.openxmlformats.org/officeDocument/2006/relationships" id="256" r:id="Red3ed0dd0cf04a76"/>
     <p:sldId xmlns:r="http://schemas.openxmlformats.org/officeDocument/2006/relationships" id="257" r:id="Reb73d3d5554e4a10"/>
     <p:sldId xmlns:r="http://schemas.openxmlformats.org/officeDocument/2006/relationships" id="258" r:id="R06cdf80096134266"/>
@@ -7290,6 +7291,78 @@
 </p:sld>
 </file>
 
+<file path=ppt/slides/slide12.xml><?xml version="1.0" encoding="utf-8"?>
+<p:sld xmlns:a="http://schemas.openxmlformats.org/drawingml/2006/main" xmlns:p="http://schemas.openxmlformats.org/presentationml/2006/main" xmlns:r="http://schemas.openxmlformats.org/officeDocument/2006/relationships">
+  <p:cSld>
+    <p:spTree>
+      <p:nvGrpSpPr>
+        <p:cNvPr id="1" name=""/>
+        <p:cNvGrpSpPr/>
+        <p:nvPr/>
+      </p:nvGrpSpPr>
+      <p:grpSpPr/>
+      <p:sp>
+        <p:nvSpPr>
+          <p:cNvPr id="2" name="TextBox 1"/>
+          <p:cNvSpPr txBox="1"/>
+          <p:nvPr/>
+        </p:nvSpPr>
+        <p:spPr>
+          <a:xfrm>
+            <a:off x="914400" y="914400"/>
+            <a:ext cx="7315200" cy="5029200"/>
+          </a:xfrm>
+          <a:prstGeom prst="rect">
+            <a:avLst/>
+          </a:prstGeom>
+          <a:noFill/>
+        </p:spPr>
+        <p:txBody>
+          <a:bodyPr wrap="square">
+            <a:spAutoFit/>
+          </a:bodyPr>
+          <a:lstStyle/>
+          <a:p/>
+          <a:p>
+            <a:pPr>
+              <a:defRPr b="1" sz="3200">
+                <a:solidFill>
+                  <a:srgbClr val="FF0000"/>
+                </a:solidFill>
+              </a:defRPr>
+            </a:pPr>
+            <a:r>
+              <a:t>DISCLAIMER: AI-ASSISTED LEARNING PROJECT</a:t>
+            </a:r>
+          </a:p>
+          <a:p>
+            <a:br/>
+            <a:pPr>
+              <a:defRPr sz="2400"/>
+            </a:pPr>
+            <a:r>
+              <a:t>This presentation and the accompanying repository are educational projects created for learning and experience.</a:t>
+            </a:r>
+          </a:p>
+          <a:p>
+            <a:br/>
+            <a:pPr>
+              <a:defRPr sz="2400"/>
+            </a:pPr>
+            <a:r>
+              <a:t>Large Language Models (AI) were used extensively to aid in completing, writing, and architecting this analysis pipeline and its documentation.</a:t>
+            </a:r>
+          </a:p>
+        </p:txBody>
+      </p:sp>
+    </p:spTree>
+  </p:cSld>
+  <p:clrMapOvr>
+    <a:masterClrMapping/>
+  </p:clrMapOvr>
+</p:sld>
+</file>
+
 <file path=ppt/slides/slide2.xml><?xml version="1.0" encoding="utf-8"?>
 <p:sld xmlns:p="http://schemas.openxmlformats.org/presentationml/2006/main">
   <p:cSld>

--- a/Paper-and-Pitch/Pitch.pptx
+++ b/Paper-and-Pitch/Pitch.pptx
@@ -7002,7 +7002,7 @@
                 <a:ea typeface="Calibri"/>
                 <a:cs typeface="Calibri"/>
               </a:rPr>
-              <a:t>Treat this as a surface-proxy spatial study—not a temporal dynamo test.</a:t>
+              <a:t>A null here is failure-to-detect, not disproof: a surface-map co-location study, not a temporal dynamo test.</a:t>
             </a:r>
           </a:p>
         </p:txBody>
@@ -25732,7 +25732,7 @@
                 <a:ea typeface="Cambria"/>
                 <a:cs typeface="Cambria"/>
               </a:rPr>
-              <a:t>Mapped mare-proxy TiO₂ is suggestive but unstable</a:t>
+              <a:t>Mapped mare-proxy TiO₂ is positive but not significant</a:t>
             </a:r>
           </a:p>
         </p:txBody>

--- a/Paper-and-Pitch/Pitch.pptx
+++ b/Paper-and-Pitch/Pitch.pptx
@@ -13517,7 +13517,7 @@
                 <a:ea typeface="Calibri"/>
                 <a:cs typeface="Calibri"/>
               </a:rPr>
-              <a:t>Criteria were committed in repository history, but there is no independent external timestamp.</a:t>
+              <a:t>Success and failure criteria are fixed in the plan and code the pipeline runs.</a:t>
             </a:r>
           </a:p>
         </p:txBody>
@@ -21386,7 +21386,7 @@
                 <a:ea typeface="Calibri"/>
                 <a:cs typeface="Calibri"/>
               </a:rPr>
-              <a:t>Repository self-attestation</a:t>
+              <a:t>Analysis plan and code</a:t>
             </a:r>
           </a:p>
         </p:txBody>
@@ -21445,7 +21445,7 @@
                 <a:ea typeface="Calibri"/>
                 <a:cs typeface="Calibri"/>
               </a:rPr>
-              <a:t>The plan predates the run in git history, but lacks an independent external timestamp.</a:t>
+              <a:t>The plan and parameter file are version-controlled separately from the generated results.</a:t>
             </a:r>
           </a:p>
         </p:txBody>

--- a/Paper-and-Pitch/Pitch.pptx
+++ b/Paper-and-Pitch/Pitch.pptx
@@ -5,6 +5,7 @@
     <p:sldMasterId xmlns:r="http://schemas.openxmlformats.org/officeDocument/2006/relationships" id="2147483648" r:id="Rb2b777ad7bb04d04"/>
   </p:sldMasterIdLst>
   <p:sldIdLst>
+    <p:sldId xmlns:ns0="http://schemas.openxmlformats.org/officeDocument/2006/relationships" id="268" ns0:id="rId17"/>
     <p:sldId xmlns:ns0="http://schemas.openxmlformats.org/officeDocument/2006/relationships" id="267" ns0:id="rId16"/>
     <p:sldId xmlns:r="http://schemas.openxmlformats.org/officeDocument/2006/relationships" id="256" r:id="Red3ed0dd0cf04a76"/>
     <p:sldId xmlns:r="http://schemas.openxmlformats.org/officeDocument/2006/relationships" id="257" r:id="Reb73d3d5554e4a10"/>
@@ -1103,7 +1104,7 @@
               </a:defRPr>
             </a:pPr>
             <a:r>
-              <a:t>EDUCATIONAL &amp; AI-ASSISTED PROJECT</a:t>
+              <a:t>DISCLAIMER: AI-ASSISTED LEARNING PROJECT</a:t>
             </a:r>
           </a:p>
           <a:p>
@@ -1112,7 +1113,7 @@
               <a:defRPr sz="2400"/>
             </a:pPr>
             <a:r>
-              <a:t>This presentation and the accompanying repository are a personal project created for learning and hands-on experience.</a:t>
+              <a:t>This presentation and the accompanying repository are educational projects created for learning and experience.</a:t>
             </a:r>
           </a:p>
           <a:p>
@@ -1121,7 +1122,7 @@
               <a:defRPr sz="2400"/>
             </a:pPr>
             <a:r>
-              <a:t>Artificial Intelligence (Large Language Models) was used extensively throughout its development to help write the code, understand the geophysical concepts, and rigorously catch statistical and logical errors.</a:t>
+              <a:t>Large Language Models (AI) were used extensively to aid in completing, writing, and architecting this analysis pipeline and its documentation.</a:t>
             </a:r>
           </a:p>
         </p:txBody>
@@ -5280,7 +5281,7 @@
                 <a:ea typeface="Calibri"/>
                 <a:cs typeface="Calibri"/>
               </a:rPr>
-              <a:t>H2 recovery: 3/30 at β=0 rising to 30/30 by β=3 (point MDE β=1). H1 arm: ≤1/30 at β≤0.3, 12/30 at β=1 — inadequate at every tested strength.</a:t>
+              <a:t>H2 recovery at β=0/.5/1/1.5/2/3–4: 3/30, 18/30, 27/30, 28/30, 29/30, 30/30. Point MDE β=1; Wilson-lower MDE β=2.</a:t>
             </a:r>
           </a:p>
         </p:txBody>
@@ -7579,6 +7580,78 @@
       </p:ext>
     </p:extLst>
   </p:cSld>
+</p:sld>
+</file>
+
+<file path=ppt/slides/slide13.xml><?xml version="1.0" encoding="utf-8"?>
+<p:sld xmlns:a="http://schemas.openxmlformats.org/drawingml/2006/main" xmlns:p="http://schemas.openxmlformats.org/presentationml/2006/main" xmlns:r="http://schemas.openxmlformats.org/officeDocument/2006/relationships">
+  <p:cSld>
+    <p:spTree>
+      <p:nvGrpSpPr>
+        <p:cNvPr id="1" name=""/>
+        <p:cNvGrpSpPr/>
+        <p:nvPr/>
+      </p:nvGrpSpPr>
+      <p:grpSpPr/>
+      <p:sp>
+        <p:nvSpPr>
+          <p:cNvPr id="2" name="TextBox 1"/>
+          <p:cNvSpPr txBox="1"/>
+          <p:nvPr/>
+        </p:nvSpPr>
+        <p:spPr>
+          <a:xfrm>
+            <a:off x="914400" y="914400"/>
+            <a:ext cx="7315200" cy="5029200"/>
+          </a:xfrm>
+          <a:prstGeom prst="rect">
+            <a:avLst/>
+          </a:prstGeom>
+          <a:noFill/>
+        </p:spPr>
+        <p:txBody>
+          <a:bodyPr wrap="square">
+            <a:spAutoFit/>
+          </a:bodyPr>
+          <a:lstStyle/>
+          <a:p/>
+          <a:p>
+            <a:pPr>
+              <a:defRPr b="1" sz="3200">
+                <a:solidFill>
+                  <a:srgbClr val="FF0000"/>
+                </a:solidFill>
+              </a:defRPr>
+            </a:pPr>
+            <a:r>
+              <a:t>EDUCATIONAL &amp; AI-ASSISTED PROJECT</a:t>
+            </a:r>
+          </a:p>
+          <a:p>
+            <a:br/>
+            <a:pPr>
+              <a:defRPr sz="2400"/>
+            </a:pPr>
+            <a:r>
+              <a:t>This presentation and the accompanying repository are a personal project created for learning and hands-on experience.</a:t>
+            </a:r>
+          </a:p>
+          <a:p>
+            <a:br/>
+            <a:pPr>
+              <a:defRPr sz="2400"/>
+            </a:pPr>
+            <a:r>
+              <a:t>Artificial Intelligence (Large Language Models) was used extensively throughout its development to help write the code, understand the geophysical concepts, and rigorously catch statistical and logical errors.</a:t>
+            </a:r>
+          </a:p>
+        </p:txBody>
+      </p:sp>
+    </p:spTree>
+  </p:cSld>
+  <p:clrMapOvr>
+    <a:masterClrMapping/>
+  </p:clrMapOvr>
 </p:sld>
 </file>
 
@@ -15626,7 +15699,7 @@
                 <a:ea typeface="Calibri"/>
                 <a:cs typeface="Calibri"/>
               </a:rPr>
-              <a:t>Success and failure criteria are fixed in the plan and code the pipeline runs.</a:t>
+              <a:t>Criteria were committed in repository history, but there is no independent external timestamp.</a:t>
             </a:r>
           </a:p>
         </p:txBody>
@@ -23495,7 +23568,7 @@
                 <a:ea typeface="Calibri"/>
                 <a:cs typeface="Calibri"/>
               </a:rPr>
-              <a:t>Analysis plan and code</a:t>
+              <a:t>Repository self-attestation</a:t>
             </a:r>
           </a:p>
         </p:txBody>
@@ -23554,7 +23627,7 @@
                 <a:ea typeface="Calibri"/>
                 <a:cs typeface="Calibri"/>
               </a:rPr>
-              <a:t>The plan and parameter file are version-controlled separately from the generated results.</a:t>
+              <a:t>The plan predates the run in git history, but lacks an independent external timestamp.</a:t>
             </a:r>
           </a:p>
         </p:txBody>

--- a/Paper-and-Pitch/Pitch.pptx
+++ b/Paper-and-Pitch/Pitch.pptx
@@ -7303,95 +7303,32 @@
       <p:grpSpPr/>
       <p:sp>
         <p:nvSpPr>
-          <p:cNvPr id="2" name="Rectangle 1"/>
-          <p:cNvSpPr/>
+          <p:cNvPr id="2" name="TextBox 1"/>
+          <p:cNvSpPr txBox="1"/>
           <p:nvPr/>
         </p:nvSpPr>
         <p:spPr>
           <a:xfrm>
-            <a:off x="0" y="0"/>
-            <a:ext cx="12192000" cy="6858000"/>
+            <a:off x="914400" y="914400"/>
+            <a:ext cx="10363200" cy="914400"/>
           </a:xfrm>
           <a:prstGeom prst="rect">
             <a:avLst/>
           </a:prstGeom>
-          <a:solidFill>
-            <a:srgbClr val="F0F4F8"/>
-          </a:solidFill>
-          <a:ln>
-            <a:solidFill>
-              <a:srgbClr val="F0F4F8"/>
-            </a:solidFill>
-          </a:ln>
-        </p:spPr>
-        <p:style>
-          <a:lnRef idx="1">
-            <a:schemeClr val="accent1"/>
-          </a:lnRef>
-          <a:fillRef idx="3">
-            <a:schemeClr val="accent1"/>
-          </a:fillRef>
-          <a:effectRef idx="2">
-            <a:schemeClr val="accent1"/>
-          </a:effectRef>
-          <a:fontRef idx="minor">
-            <a:schemeClr val="lt1"/>
-          </a:fontRef>
-        </p:style>
-        <p:txBody>
-          <a:bodyPr rtlCol="0" anchor="ctr"/>
+          <a:noFill/>
+        </p:spPr>
+        <p:txBody>
+          <a:bodyPr wrap="none">
+            <a:spAutoFit/>
+          </a:bodyPr>
           <a:lstStyle/>
           <a:p>
-            <a:pPr algn="ctr"/>
-          </a:p>
-        </p:txBody>
-      </p:sp>
-      <p:sp>
-        <p:nvSpPr>
-          <p:cNvPr id="3" name="Rectangle 2"/>
-          <p:cNvSpPr/>
-          <p:nvPr/>
-        </p:nvSpPr>
-        <p:spPr>
-          <a:xfrm>
-            <a:off x="0" y="0"/>
-            <a:ext cx="12192000" cy="1371600"/>
-          </a:xfrm>
-          <a:prstGeom prst="rect">
-            <a:avLst/>
-          </a:prstGeom>
-          <a:solidFill>
-            <a:srgbClr val="E74C3C"/>
-          </a:solidFill>
-          <a:ln>
-            <a:solidFill>
-              <a:srgbClr val="E74C3C"/>
-            </a:solidFill>
-          </a:ln>
-        </p:spPr>
-        <p:style>
-          <a:lnRef idx="1">
-            <a:schemeClr val="accent1"/>
-          </a:lnRef>
-          <a:fillRef idx="3">
-            <a:schemeClr val="accent1"/>
-          </a:fillRef>
-          <a:effectRef idx="2">
-            <a:schemeClr val="accent1"/>
-          </a:effectRef>
-          <a:fontRef idx="minor">
-            <a:schemeClr val="lt1"/>
-          </a:fontRef>
-        </p:style>
-        <p:txBody>
-          <a:bodyPr rtlCol="0" anchor="ctr"/>
-          <a:lstStyle/>
-          <a:p>
-            <a:pPr algn="ctr">
-              <a:defRPr b="1" sz="3600">
+            <a:pPr>
+              <a:defRPr b="1" sz="3200">
                 <a:solidFill>
-                  <a:srgbClr val="FFFFFF"/>
+                  <a:srgbClr val="F2A93B"/>
                 </a:solidFill>
+                <a:latin typeface="Cambria"/>
               </a:defRPr>
             </a:pPr>
             <a:r>
@@ -7402,8 +7339,8 @@
       </p:sp>
       <p:sp>
         <p:nvSpPr>
-          <p:cNvPr id="4" name="Rounded Rectangle 3"/>
-          <p:cNvSpPr/>
+          <p:cNvPr id="3" name="TextBox 2"/>
+          <p:cNvSpPr txBox="1"/>
           <p:nvPr/>
         </p:nvSpPr>
         <p:spPr>
@@ -7411,44 +7348,26 @@
             <a:off x="914400" y="2286000"/>
             <a:ext cx="10363200" cy="3657600"/>
           </a:xfrm>
-          <a:prstGeom prst="roundRect">
-            <a:avLst/>
-          </a:prstGeom>
-          <a:solidFill>
-            <a:srgbClr val="FFFFFF"/>
-          </a:solidFill>
-          <a:ln w="12700">
-            <a:solidFill>
-              <a:srgbClr val="C8C8C8"/>
-            </a:solidFill>
-          </a:ln>
-        </p:spPr>
-        <p:style>
-          <a:lnRef idx="1">
-            <a:schemeClr val="accent1"/>
-          </a:lnRef>
-          <a:fillRef idx="3">
-            <a:schemeClr val="accent1"/>
-          </a:fillRef>
-          <a:effectRef idx="2">
-            <a:schemeClr val="accent1"/>
-          </a:effectRef>
-          <a:fontRef idx="minor">
-            <a:schemeClr val="lt1"/>
-          </a:fontRef>
-        </p:style>
-        <p:txBody>
-          <a:bodyPr rtlCol="0" anchor="ctr" wrap="square"/>
+          <a:prstGeom prst="rect">
+            <a:avLst/>
+          </a:prstGeom>
+          <a:noFill/>
+        </p:spPr>
+        <p:txBody>
+          <a:bodyPr wrap="square">
+            <a:spAutoFit/>
+          </a:bodyPr>
           <a:lstStyle/>
           <a:p>
-            <a:pPr algn="ctr">
+            <a:pPr>
               <a:spcAft>
-                <a:spcPts val="2000"/>
+                <a:spcPts val="2400"/>
               </a:spcAft>
-              <a:defRPr sz="2800">
+              <a:defRPr sz="2400">
                 <a:solidFill>
-                  <a:srgbClr val="323232"/>
+                  <a:srgbClr val="EAF0FF"/>
                 </a:solidFill>
+                <a:latin typeface="Calibri"/>
               </a:defRPr>
             </a:pPr>
             <a:r>
@@ -7459,8 +7378,9 @@
             <a:pPr>
               <a:defRPr sz="2400">
                 <a:solidFill>
-                  <a:srgbClr val="505050"/>
+                  <a:srgbClr val="9AA7C7"/>
                 </a:solidFill>
+                <a:latin typeface="Calibri"/>
               </a:defRPr>
             </a:pPr>
             <a:r>

--- a/Paper-and-Pitch/Pitch.pptx
+++ b/Paper-and-Pitch/Pitch.pptx
@@ -5,8 +5,8 @@
     <p:sldMasterId xmlns:r="http://schemas.openxmlformats.org/officeDocument/2006/relationships" id="2147483648" r:id="Rb2b777ad7bb04d04"/>
   </p:sldMasterIdLst>
   <p:sldIdLst>
+    <p:sldId xmlns:r="http://schemas.openxmlformats.org/officeDocument/2006/relationships" id="256" r:id="Red3ed0dd0cf04a76"/>
     <p:sldId xmlns:ns0="http://schemas.openxmlformats.org/officeDocument/2006/relationships" id="267" ns0:id="rId16"/>
-    <p:sldId xmlns:r="http://schemas.openxmlformats.org/officeDocument/2006/relationships" id="256" r:id="Red3ed0dd0cf04a76"/>
     <p:sldId xmlns:r="http://schemas.openxmlformats.org/officeDocument/2006/relationships" id="257" r:id="Reb73d3d5554e4a10"/>
     <p:sldId xmlns:r="http://schemas.openxmlformats.org/officeDocument/2006/relationships" id="258" r:id="R06cdf80096134266"/>
     <p:sldId xmlns:r="http://schemas.openxmlformats.org/officeDocument/2006/relationships" id="259" r:id="R98ce4bc5d6a149ed"/>
@@ -7294,6 +7294,14 @@
 <file path=ppt/slides/slide12.xml><?xml version="1.0" encoding="utf-8"?>
 <p:sld xmlns:a="http://schemas.openxmlformats.org/drawingml/2006/main" xmlns:p="http://schemas.openxmlformats.org/presentationml/2006/main" xmlns:r="http://schemas.openxmlformats.org/officeDocument/2006/relationships">
   <p:cSld>
+    <p:bg>
+      <p:bgPr>
+        <a:solidFill>
+          <a:srgbClr val="0B1026"/>
+        </a:solidFill>
+        <a:effectLst/>
+      </p:bgPr>
+    </p:bg>
     <p:spTree>
       <p:nvGrpSpPr>
         <p:cNvPr id="1" name=""/>
@@ -7303,14 +7311,1587 @@
       <p:grpSpPr/>
       <p:sp>
         <p:nvSpPr>
-          <p:cNvPr id="2" name="TextBox 1"/>
+          <p:cNvPr id="10" name="Shape 0">
+            <a:extLst>
+              <a:ext uri="{FF2B5EF4-FFF2-40B4-BE49-F238E27FC236}">
+                <a16:creationId xmlns:a16="http://schemas.microsoft.com/office/drawing/2014/main" id="{56E2E0D4-FA49-4845-A128-9BF342E48DEF}"/>
+              </a:ext>
+            </a:extLst>
+          </p:cNvPr>
+          <p:cNvSpPr>
+            <a:spLocks noGrp="1"/>
+          </p:cNvSpPr>
+          <p:nvPr/>
+        </p:nvSpPr>
+        <p:spPr>
+          <a:xfrm>
+            <a:off x="548640" y="640080"/>
+            <a:ext cx="45000" cy="45000"/>
+          </a:xfrm>
+          <a:prstGeom prst="ellipse">
+            <a:avLst/>
+          </a:prstGeom>
+          <a:solidFill>
+            <a:srgbClr val="FFFFFF">
+              <a:alpha val="55000"/>
+            </a:srgbClr>
+          </a:solidFill>
+          <a:ln w="0">
+            <a:noFill/>
+          </a:ln>
+        </p:spPr>
+        <p:style>
+          <a:lnRef idx="0"/>
+          <a:fillRef idx="0"/>
+          <a:effectRef idx="0"/>
+          <a:fontRef idx="minor"/>
+        </p:style>
+        <p:txBody>
+          <a:bodyPr lIns="22680" tIns="-12600" rIns="22680" bIns="-12600" anchor="t">
+            <a:noAutofit/>
+          </a:bodyPr>
+          <a:lstStyle/>
+          <a:p/>
+        </p:txBody>
+      </p:sp>
+      <p:sp>
+        <p:nvSpPr>
+          <p:cNvPr id="11" name="Shape 1">
+            <a:extLst>
+              <a:ext uri="{FF2B5EF4-FFF2-40B4-BE49-F238E27FC236}">
+                <a16:creationId xmlns:a16="http://schemas.microsoft.com/office/drawing/2014/main" id="{DB04A7FD-0D26-4675-AA5F-52191A7C71D1}"/>
+              </a:ext>
+            </a:extLst>
+          </p:cNvPr>
+          <p:cNvSpPr>
+            <a:spLocks noGrp="1"/>
+          </p:cNvSpPr>
+          <p:nvPr/>
+        </p:nvSpPr>
+        <p:spPr>
+          <a:xfrm>
+            <a:off x="1280160" y="1188720"/>
+            <a:ext cx="26640" cy="26640"/>
+          </a:xfrm>
+          <a:prstGeom prst="ellipse">
+            <a:avLst/>
+          </a:prstGeom>
+          <a:solidFill>
+            <a:srgbClr val="FFFFFF">
+              <a:alpha val="35000"/>
+            </a:srgbClr>
+          </a:solidFill>
+          <a:ln w="0">
+            <a:noFill/>
+          </a:ln>
+        </p:spPr>
+        <p:style>
+          <a:lnRef idx="0"/>
+          <a:fillRef idx="0"/>
+          <a:effectRef idx="0"/>
+          <a:fontRef idx="minor"/>
+        </p:style>
+        <p:txBody>
+          <a:bodyPr lIns="13320" tIns="-25920" rIns="13320" bIns="-25920" anchor="t">
+            <a:noAutofit/>
+          </a:bodyPr>
+          <a:lstStyle/>
+          <a:p/>
+        </p:txBody>
+      </p:sp>
+      <p:sp>
+        <p:nvSpPr>
+          <p:cNvPr id="12" name="Shape 2">
+            <a:extLst>
+              <a:ext uri="{FF2B5EF4-FFF2-40B4-BE49-F238E27FC236}">
+                <a16:creationId xmlns:a16="http://schemas.microsoft.com/office/drawing/2014/main" id="{FCC136C9-B823-4FC9-8449-62B46EC2422E}"/>
+              </a:ext>
+            </a:extLst>
+          </p:cNvPr>
+          <p:cNvSpPr>
+            <a:spLocks noGrp="1"/>
+          </p:cNvSpPr>
+          <p:nvPr/>
+        </p:nvSpPr>
+        <p:spPr>
+          <a:xfrm>
+            <a:off x="1920240" y="457200"/>
+            <a:ext cx="26640" cy="26640"/>
+          </a:xfrm>
+          <a:prstGeom prst="ellipse">
+            <a:avLst/>
+          </a:prstGeom>
+          <a:solidFill>
+            <a:srgbClr val="FFFFFF">
+              <a:alpha val="55000"/>
+            </a:srgbClr>
+          </a:solidFill>
+          <a:ln w="0">
+            <a:noFill/>
+          </a:ln>
+        </p:spPr>
+        <p:style>
+          <a:lnRef idx="0"/>
+          <a:fillRef idx="0"/>
+          <a:effectRef idx="0"/>
+          <a:fontRef idx="minor"/>
+        </p:style>
+        <p:txBody>
+          <a:bodyPr lIns="13320" tIns="-25920" rIns="13320" bIns="-25920" anchor="t">
+            <a:noAutofit/>
+          </a:bodyPr>
+          <a:lstStyle/>
+          <a:p/>
+        </p:txBody>
+      </p:sp>
+      <p:sp>
+        <p:nvSpPr>
+          <p:cNvPr id="13" name="Shape 3">
+            <a:extLst>
+              <a:ext uri="{FF2B5EF4-FFF2-40B4-BE49-F238E27FC236}">
+                <a16:creationId xmlns:a16="http://schemas.microsoft.com/office/drawing/2014/main" id="{885B137E-7ECC-401D-AAF6-89740E691491}"/>
+              </a:ext>
+            </a:extLst>
+          </p:cNvPr>
+          <p:cNvSpPr>
+            <a:spLocks noGrp="1"/>
+          </p:cNvSpPr>
+          <p:nvPr/>
+        </p:nvSpPr>
+        <p:spPr>
+          <a:xfrm>
+            <a:off x="2926080" y="914400"/>
+            <a:ext cx="45000" cy="45000"/>
+          </a:xfrm>
+          <a:prstGeom prst="ellipse">
+            <a:avLst/>
+          </a:prstGeom>
+          <a:solidFill>
+            <a:srgbClr val="FFFFFF">
+              <a:alpha val="35000"/>
+            </a:srgbClr>
+          </a:solidFill>
+          <a:ln w="0">
+            <a:noFill/>
+          </a:ln>
+        </p:spPr>
+        <p:style>
+          <a:lnRef idx="0"/>
+          <a:fillRef idx="0"/>
+          <a:effectRef idx="0"/>
+          <a:fontRef idx="minor"/>
+        </p:style>
+        <p:txBody>
+          <a:bodyPr lIns="22680" tIns="-12600" rIns="22680" bIns="-12600" anchor="t">
+            <a:noAutofit/>
+          </a:bodyPr>
+          <a:lstStyle/>
+          <a:p/>
+        </p:txBody>
+      </p:sp>
+      <p:sp>
+        <p:nvSpPr>
+          <p:cNvPr id="14" name="Shape 4">
+            <a:extLst>
+              <a:ext uri="{FF2B5EF4-FFF2-40B4-BE49-F238E27FC236}">
+                <a16:creationId xmlns:a16="http://schemas.microsoft.com/office/drawing/2014/main" id="{E4E2D7BC-3066-4555-B80C-0FDBD68E522E}"/>
+              </a:ext>
+            </a:extLst>
+          </p:cNvPr>
+          <p:cNvSpPr>
+            <a:spLocks noGrp="1"/>
+          </p:cNvSpPr>
+          <p:nvPr/>
+        </p:nvSpPr>
+        <p:spPr>
+          <a:xfrm>
+            <a:off x="822960" y="2194560"/>
+            <a:ext cx="26640" cy="26640"/>
+          </a:xfrm>
+          <a:prstGeom prst="ellipse">
+            <a:avLst/>
+          </a:prstGeom>
+          <a:solidFill>
+            <a:srgbClr val="FFFFFF">
+              <a:alpha val="55000"/>
+            </a:srgbClr>
+          </a:solidFill>
+          <a:ln w="0">
+            <a:noFill/>
+          </a:ln>
+        </p:spPr>
+        <p:style>
+          <a:lnRef idx="0"/>
+          <a:fillRef idx="0"/>
+          <a:effectRef idx="0"/>
+          <a:fontRef idx="minor"/>
+        </p:style>
+        <p:txBody>
+          <a:bodyPr lIns="13320" tIns="-25920" rIns="13320" bIns="-25920" anchor="t">
+            <a:noAutofit/>
+          </a:bodyPr>
+          <a:lstStyle/>
+          <a:p/>
+        </p:txBody>
+      </p:sp>
+      <p:sp>
+        <p:nvSpPr>
+          <p:cNvPr id="15" name="Shape 5">
+            <a:extLst>
+              <a:ext uri="{FF2B5EF4-FFF2-40B4-BE49-F238E27FC236}">
+                <a16:creationId xmlns:a16="http://schemas.microsoft.com/office/drawing/2014/main" id="{5B5D1B59-33D2-4D2E-A248-3B5A179B7ED3}"/>
+              </a:ext>
+            </a:extLst>
+          </p:cNvPr>
+          <p:cNvSpPr>
+            <a:spLocks noGrp="1"/>
+          </p:cNvSpPr>
+          <p:nvPr/>
+        </p:nvSpPr>
+        <p:spPr>
+          <a:xfrm>
+            <a:off x="1645920" y="3017520"/>
+            <a:ext cx="26640" cy="26640"/>
+          </a:xfrm>
+          <a:prstGeom prst="ellipse">
+            <a:avLst/>
+          </a:prstGeom>
+          <a:solidFill>
+            <a:srgbClr val="FFFFFF">
+              <a:alpha val="35000"/>
+            </a:srgbClr>
+          </a:solidFill>
+          <a:ln w="0">
+            <a:noFill/>
+          </a:ln>
+        </p:spPr>
+        <p:style>
+          <a:lnRef idx="0"/>
+          <a:fillRef idx="0"/>
+          <a:effectRef idx="0"/>
+          <a:fontRef idx="minor"/>
+        </p:style>
+        <p:txBody>
+          <a:bodyPr lIns="13320" tIns="-25920" rIns="13320" bIns="-25920" anchor="t">
+            <a:noAutofit/>
+          </a:bodyPr>
+          <a:lstStyle/>
+          <a:p/>
+        </p:txBody>
+      </p:sp>
+      <p:sp>
+        <p:nvSpPr>
+          <p:cNvPr id="16" name="Shape 6">
+            <a:extLst>
+              <a:ext uri="{FF2B5EF4-FFF2-40B4-BE49-F238E27FC236}">
+                <a16:creationId xmlns:a16="http://schemas.microsoft.com/office/drawing/2014/main" id="{329DC4A8-728E-43D0-9E7E-07F174B6CD43}"/>
+              </a:ext>
+            </a:extLst>
+          </p:cNvPr>
+          <p:cNvSpPr>
+            <a:spLocks noGrp="1"/>
+          </p:cNvSpPr>
+          <p:nvPr/>
+        </p:nvSpPr>
+        <p:spPr>
+          <a:xfrm>
+            <a:off x="457200" y="3840480"/>
+            <a:ext cx="45000" cy="45000"/>
+          </a:xfrm>
+          <a:prstGeom prst="ellipse">
+            <a:avLst/>
+          </a:prstGeom>
+          <a:solidFill>
+            <a:srgbClr val="FFFFFF">
+              <a:alpha val="55000"/>
+            </a:srgbClr>
+          </a:solidFill>
+          <a:ln w="0">
+            <a:noFill/>
+          </a:ln>
+        </p:spPr>
+        <p:style>
+          <a:lnRef idx="0"/>
+          <a:fillRef idx="0"/>
+          <a:effectRef idx="0"/>
+          <a:fontRef idx="minor"/>
+        </p:style>
+        <p:txBody>
+          <a:bodyPr lIns="22680" tIns="-12600" rIns="22680" bIns="-12600" anchor="t">
+            <a:noAutofit/>
+          </a:bodyPr>
+          <a:lstStyle/>
+          <a:p/>
+        </p:txBody>
+      </p:sp>
+      <p:sp>
+        <p:nvSpPr>
+          <p:cNvPr id="17" name="Shape 7">
+            <a:extLst>
+              <a:ext uri="{FF2B5EF4-FFF2-40B4-BE49-F238E27FC236}">
+                <a16:creationId xmlns:a16="http://schemas.microsoft.com/office/drawing/2014/main" id="{CCFFBFEA-028B-4C17-BB5A-A6ADFF9D67E3}"/>
+              </a:ext>
+            </a:extLst>
+          </p:cNvPr>
+          <p:cNvSpPr>
+            <a:spLocks noGrp="1"/>
+          </p:cNvSpPr>
+          <p:nvPr/>
+        </p:nvSpPr>
+        <p:spPr>
+          <a:xfrm>
+            <a:off x="1097280" y="4663440"/>
+            <a:ext cx="26640" cy="26640"/>
+          </a:xfrm>
+          <a:prstGeom prst="ellipse">
+            <a:avLst/>
+          </a:prstGeom>
+          <a:solidFill>
+            <a:srgbClr val="FFFFFF">
+              <a:alpha val="35000"/>
+            </a:srgbClr>
+          </a:solidFill>
+          <a:ln w="0">
+            <a:noFill/>
+          </a:ln>
+        </p:spPr>
+        <p:style>
+          <a:lnRef idx="0"/>
+          <a:fillRef idx="0"/>
+          <a:effectRef idx="0"/>
+          <a:fontRef idx="minor"/>
+        </p:style>
+        <p:txBody>
+          <a:bodyPr lIns="13320" tIns="-25920" rIns="13320" bIns="-25920" anchor="t">
+            <a:noAutofit/>
+          </a:bodyPr>
+          <a:lstStyle/>
+          <a:p/>
+        </p:txBody>
+      </p:sp>
+      <p:sp>
+        <p:nvSpPr>
+          <p:cNvPr id="18" name="Shape 8">
+            <a:extLst>
+              <a:ext uri="{FF2B5EF4-FFF2-40B4-BE49-F238E27FC236}">
+                <a16:creationId xmlns:a16="http://schemas.microsoft.com/office/drawing/2014/main" id="{858AEEEC-0405-4643-9AD9-80BAD42A9DDD}"/>
+              </a:ext>
+            </a:extLst>
+          </p:cNvPr>
+          <p:cNvSpPr>
+            <a:spLocks noGrp="1"/>
+          </p:cNvSpPr>
+          <p:nvPr/>
+        </p:nvSpPr>
+        <p:spPr>
+          <a:xfrm>
+            <a:off x="731520" y="5669280"/>
+            <a:ext cx="26640" cy="26640"/>
+          </a:xfrm>
+          <a:prstGeom prst="ellipse">
+            <a:avLst/>
+          </a:prstGeom>
+          <a:solidFill>
+            <a:srgbClr val="FFFFFF">
+              <a:alpha val="55000"/>
+            </a:srgbClr>
+          </a:solidFill>
+          <a:ln w="0">
+            <a:noFill/>
+          </a:ln>
+        </p:spPr>
+        <p:style>
+          <a:lnRef idx="0"/>
+          <a:fillRef idx="0"/>
+          <a:effectRef idx="0"/>
+          <a:fontRef idx="minor"/>
+        </p:style>
+        <p:txBody>
+          <a:bodyPr lIns="13320" tIns="-25920" rIns="13320" bIns="-25920" anchor="t">
+            <a:noAutofit/>
+          </a:bodyPr>
+          <a:lstStyle/>
+          <a:p/>
+        </p:txBody>
+      </p:sp>
+      <p:sp>
+        <p:nvSpPr>
+          <p:cNvPr id="19" name="Shape 9">
+            <a:extLst>
+              <a:ext uri="{FF2B5EF4-FFF2-40B4-BE49-F238E27FC236}">
+                <a16:creationId xmlns:a16="http://schemas.microsoft.com/office/drawing/2014/main" id="{04F08F6F-FB58-4D55-8FD1-5024F644843D}"/>
+              </a:ext>
+            </a:extLst>
+          </p:cNvPr>
+          <p:cNvSpPr>
+            <a:spLocks noGrp="1"/>
+          </p:cNvSpPr>
+          <p:nvPr/>
+        </p:nvSpPr>
+        <p:spPr>
+          <a:xfrm>
+            <a:off x="2194560" y="6035040"/>
+            <a:ext cx="45000" cy="45000"/>
+          </a:xfrm>
+          <a:prstGeom prst="ellipse">
+            <a:avLst/>
+          </a:prstGeom>
+          <a:solidFill>
+            <a:srgbClr val="FFFFFF">
+              <a:alpha val="35000"/>
+            </a:srgbClr>
+          </a:solidFill>
+          <a:ln w="0">
+            <a:noFill/>
+          </a:ln>
+        </p:spPr>
+        <p:style>
+          <a:lnRef idx="0"/>
+          <a:fillRef idx="0"/>
+          <a:effectRef idx="0"/>
+          <a:fontRef idx="minor"/>
+        </p:style>
+        <p:txBody>
+          <a:bodyPr lIns="22680" tIns="-12600" rIns="22680" bIns="-12600" anchor="t">
+            <a:noAutofit/>
+          </a:bodyPr>
+          <a:lstStyle/>
+          <a:p/>
+        </p:txBody>
+      </p:sp>
+      <p:sp>
+        <p:nvSpPr>
+          <p:cNvPr id="20" name="Shape 10">
+            <a:extLst>
+              <a:ext uri="{FF2B5EF4-FFF2-40B4-BE49-F238E27FC236}">
+                <a16:creationId xmlns:a16="http://schemas.microsoft.com/office/drawing/2014/main" id="{7C661DE3-7DDA-4566-836B-05B90FB30356}"/>
+              </a:ext>
+            </a:extLst>
+          </p:cNvPr>
+          <p:cNvSpPr>
+            <a:spLocks noGrp="1"/>
+          </p:cNvSpPr>
+          <p:nvPr/>
+        </p:nvSpPr>
+        <p:spPr>
+          <a:xfrm>
+            <a:off x="11612880" y="548640"/>
+            <a:ext cx="26640" cy="26640"/>
+          </a:xfrm>
+          <a:prstGeom prst="ellipse">
+            <a:avLst/>
+          </a:prstGeom>
+          <a:solidFill>
+            <a:srgbClr val="FFFFFF">
+              <a:alpha val="55000"/>
+            </a:srgbClr>
+          </a:solidFill>
+          <a:ln w="0">
+            <a:noFill/>
+          </a:ln>
+        </p:spPr>
+        <p:style>
+          <a:lnRef idx="0"/>
+          <a:fillRef idx="0"/>
+          <a:effectRef idx="0"/>
+          <a:fontRef idx="minor"/>
+        </p:style>
+        <p:txBody>
+          <a:bodyPr lIns="13320" tIns="-25920" rIns="13320" bIns="-25920" anchor="t">
+            <a:noAutofit/>
+          </a:bodyPr>
+          <a:lstStyle/>
+          <a:p/>
+        </p:txBody>
+      </p:sp>
+      <p:sp>
+        <p:nvSpPr>
+          <p:cNvPr id="21" name="Shape 11">
+            <a:extLst>
+              <a:ext uri="{FF2B5EF4-FFF2-40B4-BE49-F238E27FC236}">
+                <a16:creationId xmlns:a16="http://schemas.microsoft.com/office/drawing/2014/main" id="{5E175C80-3525-4D63-B988-BA4DBB51CA58}"/>
+              </a:ext>
+            </a:extLst>
+          </p:cNvPr>
+          <p:cNvSpPr>
+            <a:spLocks noGrp="1"/>
+          </p:cNvSpPr>
+          <p:nvPr/>
+        </p:nvSpPr>
+        <p:spPr>
+          <a:xfrm>
+            <a:off x="10881360" y="1280160"/>
+            <a:ext cx="26640" cy="26640"/>
+          </a:xfrm>
+          <a:prstGeom prst="ellipse">
+            <a:avLst/>
+          </a:prstGeom>
+          <a:solidFill>
+            <a:srgbClr val="FFFFFF">
+              <a:alpha val="35000"/>
+            </a:srgbClr>
+          </a:solidFill>
+          <a:ln w="0">
+            <a:noFill/>
+          </a:ln>
+        </p:spPr>
+        <p:style>
+          <a:lnRef idx="0"/>
+          <a:fillRef idx="0"/>
+          <a:effectRef idx="0"/>
+          <a:fontRef idx="minor"/>
+        </p:style>
+        <p:txBody>
+          <a:bodyPr lIns="13320" tIns="-25920" rIns="13320" bIns="-25920" anchor="t">
+            <a:noAutofit/>
+          </a:bodyPr>
+          <a:lstStyle/>
+          <a:p/>
+        </p:txBody>
+      </p:sp>
+      <p:sp>
+        <p:nvSpPr>
+          <p:cNvPr id="22" name="Shape 12">
+            <a:extLst>
+              <a:ext uri="{FF2B5EF4-FFF2-40B4-BE49-F238E27FC236}">
+                <a16:creationId xmlns:a16="http://schemas.microsoft.com/office/drawing/2014/main" id="{3F3BC39F-AD5A-45B0-907B-94DDDCA6211B}"/>
+              </a:ext>
+            </a:extLst>
+          </p:cNvPr>
+          <p:cNvSpPr>
+            <a:spLocks noGrp="1"/>
+          </p:cNvSpPr>
+          <p:nvPr/>
+        </p:nvSpPr>
+        <p:spPr>
+          <a:xfrm>
+            <a:off x="11795760" y="2103120"/>
+            <a:ext cx="45000" cy="45000"/>
+          </a:xfrm>
+          <a:prstGeom prst="ellipse">
+            <a:avLst/>
+          </a:prstGeom>
+          <a:solidFill>
+            <a:srgbClr val="FFFFFF">
+              <a:alpha val="55000"/>
+            </a:srgbClr>
+          </a:solidFill>
+          <a:ln w="0">
+            <a:noFill/>
+          </a:ln>
+        </p:spPr>
+        <p:style>
+          <a:lnRef idx="0"/>
+          <a:fillRef idx="0"/>
+          <a:effectRef idx="0"/>
+          <a:fontRef idx="minor"/>
+        </p:style>
+        <p:txBody>
+          <a:bodyPr lIns="22680" tIns="-12600" rIns="22680" bIns="-12600" anchor="t">
+            <a:noAutofit/>
+          </a:bodyPr>
+          <a:lstStyle/>
+          <a:p/>
+        </p:txBody>
+      </p:sp>
+      <p:sp>
+        <p:nvSpPr>
+          <p:cNvPr id="23" name="Shape 13">
+            <a:extLst>
+              <a:ext uri="{FF2B5EF4-FFF2-40B4-BE49-F238E27FC236}">
+                <a16:creationId xmlns:a16="http://schemas.microsoft.com/office/drawing/2014/main" id="{45C179EA-C09F-418E-A4BB-DA47D65E4F9D}"/>
+              </a:ext>
+            </a:extLst>
+          </p:cNvPr>
+          <p:cNvSpPr>
+            <a:spLocks noGrp="1"/>
+          </p:cNvSpPr>
+          <p:nvPr/>
+        </p:nvSpPr>
+        <p:spPr>
+          <a:xfrm>
+            <a:off x="11247120" y="2926080"/>
+            <a:ext cx="26640" cy="26640"/>
+          </a:xfrm>
+          <a:prstGeom prst="ellipse">
+            <a:avLst/>
+          </a:prstGeom>
+          <a:solidFill>
+            <a:srgbClr val="FFFFFF">
+              <a:alpha val="35000"/>
+            </a:srgbClr>
+          </a:solidFill>
+          <a:ln w="0">
+            <a:noFill/>
+          </a:ln>
+        </p:spPr>
+        <p:style>
+          <a:lnRef idx="0"/>
+          <a:fillRef idx="0"/>
+          <a:effectRef idx="0"/>
+          <a:fontRef idx="minor"/>
+        </p:style>
+        <p:txBody>
+          <a:bodyPr lIns="13320" tIns="-25920" rIns="13320" bIns="-25920" anchor="t">
+            <a:noAutofit/>
+          </a:bodyPr>
+          <a:lstStyle/>
+          <a:p/>
+        </p:txBody>
+      </p:sp>
+      <p:sp>
+        <p:nvSpPr>
+          <p:cNvPr id="24" name="Shape 14">
+            <a:extLst>
+              <a:ext uri="{FF2B5EF4-FFF2-40B4-BE49-F238E27FC236}">
+                <a16:creationId xmlns:a16="http://schemas.microsoft.com/office/drawing/2014/main" id="{9EF58247-CCA0-4E60-92C3-FFBA61793EE2}"/>
+              </a:ext>
+            </a:extLst>
+          </p:cNvPr>
+          <p:cNvSpPr>
+            <a:spLocks noGrp="1"/>
+          </p:cNvSpPr>
+          <p:nvPr/>
+        </p:nvSpPr>
+        <p:spPr>
+          <a:xfrm>
+            <a:off x="11704320" y="3749040"/>
+            <a:ext cx="26640" cy="26640"/>
+          </a:xfrm>
+          <a:prstGeom prst="ellipse">
+            <a:avLst/>
+          </a:prstGeom>
+          <a:solidFill>
+            <a:srgbClr val="FFFFFF">
+              <a:alpha val="55000"/>
+            </a:srgbClr>
+          </a:solidFill>
+          <a:ln w="0">
+            <a:noFill/>
+          </a:ln>
+        </p:spPr>
+        <p:style>
+          <a:lnRef idx="0"/>
+          <a:fillRef idx="0"/>
+          <a:effectRef idx="0"/>
+          <a:fontRef idx="minor"/>
+        </p:style>
+        <p:txBody>
+          <a:bodyPr lIns="13320" tIns="-25920" rIns="13320" bIns="-25920" anchor="t">
+            <a:noAutofit/>
+          </a:bodyPr>
+          <a:lstStyle/>
+          <a:p/>
+        </p:txBody>
+      </p:sp>
+      <p:sp>
+        <p:nvSpPr>
+          <p:cNvPr id="25" name="Shape 15">
+            <a:extLst>
+              <a:ext uri="{FF2B5EF4-FFF2-40B4-BE49-F238E27FC236}">
+                <a16:creationId xmlns:a16="http://schemas.microsoft.com/office/drawing/2014/main" id="{A905CF19-9EC9-480A-A897-9FE4C44065B5}"/>
+              </a:ext>
+            </a:extLst>
+          </p:cNvPr>
+          <p:cNvSpPr>
+            <a:spLocks noGrp="1"/>
+          </p:cNvSpPr>
+          <p:nvPr/>
+        </p:nvSpPr>
+        <p:spPr>
+          <a:xfrm>
+            <a:off x="11064240" y="4572000"/>
+            <a:ext cx="45000" cy="45000"/>
+          </a:xfrm>
+          <a:prstGeom prst="ellipse">
+            <a:avLst/>
+          </a:prstGeom>
+          <a:solidFill>
+            <a:srgbClr val="FFFFFF">
+              <a:alpha val="35000"/>
+            </a:srgbClr>
+          </a:solidFill>
+          <a:ln w="0">
+            <a:noFill/>
+          </a:ln>
+        </p:spPr>
+        <p:style>
+          <a:lnRef idx="0"/>
+          <a:fillRef idx="0"/>
+          <a:effectRef idx="0"/>
+          <a:fontRef idx="minor"/>
+        </p:style>
+        <p:txBody>
+          <a:bodyPr lIns="22680" tIns="-12600" rIns="22680" bIns="-12600" anchor="t">
+            <a:noAutofit/>
+          </a:bodyPr>
+          <a:lstStyle/>
+          <a:p/>
+        </p:txBody>
+      </p:sp>
+      <p:sp>
+        <p:nvSpPr>
+          <p:cNvPr id="26" name="Shape 16">
+            <a:extLst>
+              <a:ext uri="{FF2B5EF4-FFF2-40B4-BE49-F238E27FC236}">
+                <a16:creationId xmlns:a16="http://schemas.microsoft.com/office/drawing/2014/main" id="{D1579FBF-B5C2-4882-8FAF-87E7FC40FB97}"/>
+              </a:ext>
+            </a:extLst>
+          </p:cNvPr>
+          <p:cNvSpPr>
+            <a:spLocks noGrp="1"/>
+          </p:cNvSpPr>
+          <p:nvPr/>
+        </p:nvSpPr>
+        <p:spPr>
+          <a:xfrm>
+            <a:off x="11521440" y="5394960"/>
+            <a:ext cx="26640" cy="26640"/>
+          </a:xfrm>
+          <a:prstGeom prst="ellipse">
+            <a:avLst/>
+          </a:prstGeom>
+          <a:solidFill>
+            <a:srgbClr val="FFFFFF">
+              <a:alpha val="55000"/>
+            </a:srgbClr>
+          </a:solidFill>
+          <a:ln w="0">
+            <a:noFill/>
+          </a:ln>
+        </p:spPr>
+        <p:style>
+          <a:lnRef idx="0"/>
+          <a:fillRef idx="0"/>
+          <a:effectRef idx="0"/>
+          <a:fontRef idx="minor"/>
+        </p:style>
+        <p:txBody>
+          <a:bodyPr lIns="13320" tIns="-25920" rIns="13320" bIns="-25920" anchor="t">
+            <a:noAutofit/>
+          </a:bodyPr>
+          <a:lstStyle/>
+          <a:p/>
+        </p:txBody>
+      </p:sp>
+      <p:sp>
+        <p:nvSpPr>
+          <p:cNvPr id="27" name="Shape 17">
+            <a:extLst>
+              <a:ext uri="{FF2B5EF4-FFF2-40B4-BE49-F238E27FC236}">
+                <a16:creationId xmlns:a16="http://schemas.microsoft.com/office/drawing/2014/main" id="{4C21B87D-9F6E-48E7-824E-CB25192912FC}"/>
+              </a:ext>
+            </a:extLst>
+          </p:cNvPr>
+          <p:cNvSpPr>
+            <a:spLocks noGrp="1"/>
+          </p:cNvSpPr>
+          <p:nvPr/>
+        </p:nvSpPr>
+        <p:spPr>
+          <a:xfrm>
+            <a:off x="10607040" y="5943600"/>
+            <a:ext cx="26640" cy="26640"/>
+          </a:xfrm>
+          <a:prstGeom prst="ellipse">
+            <a:avLst/>
+          </a:prstGeom>
+          <a:solidFill>
+            <a:srgbClr val="FFFFFF">
+              <a:alpha val="35000"/>
+            </a:srgbClr>
+          </a:solidFill>
+          <a:ln w="0">
+            <a:noFill/>
+          </a:ln>
+        </p:spPr>
+        <p:style>
+          <a:lnRef idx="0"/>
+          <a:fillRef idx="0"/>
+          <a:effectRef idx="0"/>
+          <a:fontRef idx="minor"/>
+        </p:style>
+        <p:txBody>
+          <a:bodyPr lIns="13320" tIns="-25920" rIns="13320" bIns="-25920" anchor="t">
+            <a:noAutofit/>
+          </a:bodyPr>
+          <a:lstStyle/>
+          <a:p/>
+        </p:txBody>
+      </p:sp>
+      <p:sp>
+        <p:nvSpPr>
+          <p:cNvPr id="28" name="Shape 18">
+            <a:extLst>
+              <a:ext uri="{FF2B5EF4-FFF2-40B4-BE49-F238E27FC236}">
+                <a16:creationId xmlns:a16="http://schemas.microsoft.com/office/drawing/2014/main" id="{0C16BF64-1CC6-4004-8460-17EB8AE0F0D1}"/>
+              </a:ext>
+            </a:extLst>
+          </p:cNvPr>
+          <p:cNvSpPr>
+            <a:spLocks noGrp="1"/>
+          </p:cNvSpPr>
+          <p:nvPr/>
+        </p:nvSpPr>
+        <p:spPr>
+          <a:xfrm>
+            <a:off x="9875520" y="457200"/>
+            <a:ext cx="45000" cy="45000"/>
+          </a:xfrm>
+          <a:prstGeom prst="ellipse">
+            <a:avLst/>
+          </a:prstGeom>
+          <a:solidFill>
+            <a:srgbClr val="FFFFFF">
+              <a:alpha val="55000"/>
+            </a:srgbClr>
+          </a:solidFill>
+          <a:ln w="0">
+            <a:noFill/>
+          </a:ln>
+        </p:spPr>
+        <p:style>
+          <a:lnRef idx="0"/>
+          <a:fillRef idx="0"/>
+          <a:effectRef idx="0"/>
+          <a:fontRef idx="minor"/>
+        </p:style>
+        <p:txBody>
+          <a:bodyPr lIns="22680" tIns="-12600" rIns="22680" bIns="-12600" anchor="t">
+            <a:noAutofit/>
+          </a:bodyPr>
+          <a:lstStyle/>
+          <a:p/>
+        </p:txBody>
+      </p:sp>
+      <p:sp>
+        <p:nvSpPr>
+          <p:cNvPr id="29" name="Shape 19">
+            <a:extLst>
+              <a:ext uri="{FF2B5EF4-FFF2-40B4-BE49-F238E27FC236}">
+                <a16:creationId xmlns:a16="http://schemas.microsoft.com/office/drawing/2014/main" id="{90A084BA-4261-45E3-8EB5-F94F14EA521D}"/>
+              </a:ext>
+            </a:extLst>
+          </p:cNvPr>
+          <p:cNvSpPr>
+            <a:spLocks noGrp="1"/>
+          </p:cNvSpPr>
+          <p:nvPr/>
+        </p:nvSpPr>
+        <p:spPr>
+          <a:xfrm>
+            <a:off x="9052560" y="731520"/>
+            <a:ext cx="26640" cy="26640"/>
+          </a:xfrm>
+          <a:prstGeom prst="ellipse">
+            <a:avLst/>
+          </a:prstGeom>
+          <a:solidFill>
+            <a:srgbClr val="FFFFFF">
+              <a:alpha val="35000"/>
+            </a:srgbClr>
+          </a:solidFill>
+          <a:ln w="0">
+            <a:noFill/>
+          </a:ln>
+        </p:spPr>
+        <p:style>
+          <a:lnRef idx="0"/>
+          <a:fillRef idx="0"/>
+          <a:effectRef idx="0"/>
+          <a:fontRef idx="minor"/>
+        </p:style>
+        <p:txBody>
+          <a:bodyPr lIns="13320" tIns="-25920" rIns="13320" bIns="-25920" anchor="t">
+            <a:noAutofit/>
+          </a:bodyPr>
+          <a:lstStyle/>
+          <a:p/>
+        </p:txBody>
+      </p:sp>
+      <p:sp>
+        <p:nvSpPr>
+          <p:cNvPr id="30" name="Shape 20">
+            <a:extLst>
+              <a:ext uri="{FF2B5EF4-FFF2-40B4-BE49-F238E27FC236}">
+                <a16:creationId xmlns:a16="http://schemas.microsoft.com/office/drawing/2014/main" id="{29D0EFA1-F31B-4913-AA66-250763F67310}"/>
+              </a:ext>
+            </a:extLst>
+          </p:cNvPr>
+          <p:cNvSpPr>
+            <a:spLocks noGrp="1"/>
+          </p:cNvSpPr>
+          <p:nvPr/>
+        </p:nvSpPr>
+        <p:spPr>
+          <a:xfrm>
+            <a:off x="6126480" y="365760"/>
+            <a:ext cx="26640" cy="26640"/>
+          </a:xfrm>
+          <a:prstGeom prst="ellipse">
+            <a:avLst/>
+          </a:prstGeom>
+          <a:solidFill>
+            <a:srgbClr val="FFFFFF">
+              <a:alpha val="55000"/>
+            </a:srgbClr>
+          </a:solidFill>
+          <a:ln w="0">
+            <a:noFill/>
+          </a:ln>
+        </p:spPr>
+        <p:style>
+          <a:lnRef idx="0"/>
+          <a:fillRef idx="0"/>
+          <a:effectRef idx="0"/>
+          <a:fontRef idx="minor"/>
+        </p:style>
+        <p:txBody>
+          <a:bodyPr lIns="13320" tIns="-25920" rIns="13320" bIns="-25920" anchor="t">
+            <a:noAutofit/>
+          </a:bodyPr>
+          <a:lstStyle/>
+          <a:p/>
+        </p:txBody>
+      </p:sp>
+      <p:sp>
+        <p:nvSpPr>
+          <p:cNvPr id="31" name="Shape 21">
+            <a:extLst>
+              <a:ext uri="{FF2B5EF4-FFF2-40B4-BE49-F238E27FC236}">
+                <a16:creationId xmlns:a16="http://schemas.microsoft.com/office/drawing/2014/main" id="{F0E4DEF7-EBF0-4F65-A45E-C4948D11BC40}"/>
+              </a:ext>
+            </a:extLst>
+          </p:cNvPr>
+          <p:cNvSpPr>
+            <a:spLocks noGrp="1"/>
+          </p:cNvSpPr>
+          <p:nvPr/>
+        </p:nvSpPr>
+        <p:spPr>
+          <a:xfrm>
+            <a:off x="4206240" y="548640"/>
+            <a:ext cx="45000" cy="45000"/>
+          </a:xfrm>
+          <a:prstGeom prst="ellipse">
+            <a:avLst/>
+          </a:prstGeom>
+          <a:solidFill>
+            <a:srgbClr val="FFFFFF">
+              <a:alpha val="35000"/>
+            </a:srgbClr>
+          </a:solidFill>
+          <a:ln w="0">
+            <a:noFill/>
+          </a:ln>
+        </p:spPr>
+        <p:style>
+          <a:lnRef idx="0"/>
+          <a:fillRef idx="0"/>
+          <a:effectRef idx="0"/>
+          <a:fontRef idx="minor"/>
+        </p:style>
+        <p:txBody>
+          <a:bodyPr lIns="22680" tIns="-12600" rIns="22680" bIns="-12600" anchor="t">
+            <a:noAutofit/>
+          </a:bodyPr>
+          <a:lstStyle/>
+          <a:p/>
+        </p:txBody>
+      </p:sp>
+      <p:sp>
+        <p:nvSpPr>
+          <p:cNvPr id="32" name="Shape 22">
+            <a:extLst>
+              <a:ext uri="{FF2B5EF4-FFF2-40B4-BE49-F238E27FC236}">
+                <a16:creationId xmlns:a16="http://schemas.microsoft.com/office/drawing/2014/main" id="{5B3C9CAC-C74C-4633-86BB-8AC2D023401E}"/>
+              </a:ext>
+            </a:extLst>
+          </p:cNvPr>
+          <p:cNvSpPr>
+            <a:spLocks noGrp="1"/>
+          </p:cNvSpPr>
+          <p:nvPr/>
+        </p:nvSpPr>
+        <p:spPr>
+          <a:xfrm>
+            <a:off x="7406640" y="640080"/>
+            <a:ext cx="26640" cy="26640"/>
+          </a:xfrm>
+          <a:prstGeom prst="ellipse">
+            <a:avLst/>
+          </a:prstGeom>
+          <a:solidFill>
+            <a:srgbClr val="FFFFFF">
+              <a:alpha val="55000"/>
+            </a:srgbClr>
+          </a:solidFill>
+          <a:ln w="0">
+            <a:noFill/>
+          </a:ln>
+        </p:spPr>
+        <p:style>
+          <a:lnRef idx="0"/>
+          <a:fillRef idx="0"/>
+          <a:effectRef idx="0"/>
+          <a:fontRef idx="minor"/>
+        </p:style>
+        <p:txBody>
+          <a:bodyPr lIns="13320" tIns="-25920" rIns="13320" bIns="-25920" anchor="t">
+            <a:noAutofit/>
+          </a:bodyPr>
+          <a:lstStyle/>
+          <a:p/>
+        </p:txBody>
+      </p:sp>
+      <p:sp>
+        <p:nvSpPr>
+          <p:cNvPr id="33" name="Shape 23">
+            <a:extLst>
+              <a:ext uri="{FF2B5EF4-FFF2-40B4-BE49-F238E27FC236}">
+                <a16:creationId xmlns:a16="http://schemas.microsoft.com/office/drawing/2014/main" id="{EDF7D45C-A4C7-4251-B021-6DBB2CCAC5D2}"/>
+              </a:ext>
+            </a:extLst>
+          </p:cNvPr>
+          <p:cNvSpPr>
+            <a:spLocks noGrp="1"/>
+          </p:cNvSpPr>
+          <p:nvPr/>
+        </p:nvSpPr>
+        <p:spPr>
+          <a:xfrm>
+            <a:off x="3566160" y="6126480"/>
+            <a:ext cx="26640" cy="26640"/>
+          </a:xfrm>
+          <a:prstGeom prst="ellipse">
+            <a:avLst/>
+          </a:prstGeom>
+          <a:solidFill>
+            <a:srgbClr val="FFFFFF">
+              <a:alpha val="35000"/>
+            </a:srgbClr>
+          </a:solidFill>
+          <a:ln w="0">
+            <a:noFill/>
+          </a:ln>
+        </p:spPr>
+        <p:style>
+          <a:lnRef idx="0"/>
+          <a:fillRef idx="0"/>
+          <a:effectRef idx="0"/>
+          <a:fontRef idx="minor"/>
+        </p:style>
+        <p:txBody>
+          <a:bodyPr lIns="13320" tIns="-25920" rIns="13320" bIns="-25920" anchor="t">
+            <a:noAutofit/>
+          </a:bodyPr>
+          <a:lstStyle/>
+          <a:p/>
+        </p:txBody>
+      </p:sp>
+      <p:sp>
+        <p:nvSpPr>
+          <p:cNvPr id="34" name="Shape 24">
+            <a:extLst>
+              <a:ext uri="{FF2B5EF4-FFF2-40B4-BE49-F238E27FC236}">
+                <a16:creationId xmlns:a16="http://schemas.microsoft.com/office/drawing/2014/main" id="{152806F5-AA82-48F1-9840-19254E8F64F7}"/>
+              </a:ext>
+            </a:extLst>
+          </p:cNvPr>
+          <p:cNvSpPr>
+            <a:spLocks noGrp="1"/>
+          </p:cNvSpPr>
+          <p:nvPr/>
+        </p:nvSpPr>
+        <p:spPr>
+          <a:xfrm>
+            <a:off x="5120640" y="6217920"/>
+            <a:ext cx="45000" cy="45000"/>
+          </a:xfrm>
+          <a:prstGeom prst="ellipse">
+            <a:avLst/>
+          </a:prstGeom>
+          <a:solidFill>
+            <a:srgbClr val="FFFFFF">
+              <a:alpha val="55000"/>
+            </a:srgbClr>
+          </a:solidFill>
+          <a:ln w="0">
+            <a:noFill/>
+          </a:ln>
+        </p:spPr>
+        <p:style>
+          <a:lnRef idx="0"/>
+          <a:fillRef idx="0"/>
+          <a:effectRef idx="0"/>
+          <a:fontRef idx="minor"/>
+        </p:style>
+        <p:txBody>
+          <a:bodyPr lIns="22680" tIns="-12600" rIns="22680" bIns="-12600" anchor="t">
+            <a:noAutofit/>
+          </a:bodyPr>
+          <a:lstStyle/>
+          <a:p/>
+        </p:txBody>
+      </p:sp>
+      <p:sp>
+        <p:nvSpPr>
+          <p:cNvPr id="35" name="Shape 25">
+            <a:extLst>
+              <a:ext uri="{FF2B5EF4-FFF2-40B4-BE49-F238E27FC236}">
+                <a16:creationId xmlns:a16="http://schemas.microsoft.com/office/drawing/2014/main" id="{8EEF79D1-DD46-497A-B9A6-100BCEBC117C}"/>
+              </a:ext>
+            </a:extLst>
+          </p:cNvPr>
+          <p:cNvSpPr>
+            <a:spLocks noGrp="1"/>
+          </p:cNvSpPr>
+          <p:nvPr/>
+        </p:nvSpPr>
+        <p:spPr>
+          <a:xfrm>
+            <a:off x="6675120" y="6035040"/>
+            <a:ext cx="26640" cy="26640"/>
+          </a:xfrm>
+          <a:prstGeom prst="ellipse">
+            <a:avLst/>
+          </a:prstGeom>
+          <a:solidFill>
+            <a:srgbClr val="FFFFFF">
+              <a:alpha val="35000"/>
+            </a:srgbClr>
+          </a:solidFill>
+          <a:ln w="0">
+            <a:noFill/>
+          </a:ln>
+        </p:spPr>
+        <p:style>
+          <a:lnRef idx="0"/>
+          <a:fillRef idx="0"/>
+          <a:effectRef idx="0"/>
+          <a:fontRef idx="minor"/>
+        </p:style>
+        <p:txBody>
+          <a:bodyPr lIns="13320" tIns="-25920" rIns="13320" bIns="-25920" anchor="t">
+            <a:noAutofit/>
+          </a:bodyPr>
+          <a:lstStyle/>
+          <a:p/>
+        </p:txBody>
+      </p:sp>
+      <p:sp>
+        <p:nvSpPr>
+          <p:cNvPr id="36" name="Shape 26">
+            <a:extLst>
+              <a:ext uri="{FF2B5EF4-FFF2-40B4-BE49-F238E27FC236}">
+                <a16:creationId xmlns:a16="http://schemas.microsoft.com/office/drawing/2014/main" id="{C2FC792C-7D52-451E-AE12-586AC034FE95}"/>
+              </a:ext>
+            </a:extLst>
+          </p:cNvPr>
+          <p:cNvSpPr>
+            <a:spLocks noGrp="1"/>
+          </p:cNvSpPr>
+          <p:nvPr/>
+        </p:nvSpPr>
+        <p:spPr>
+          <a:xfrm>
+            <a:off x="8321040" y="6126480"/>
+            <a:ext cx="26640" cy="26640"/>
+          </a:xfrm>
+          <a:prstGeom prst="ellipse">
+            <a:avLst/>
+          </a:prstGeom>
+          <a:solidFill>
+            <a:srgbClr val="FFFFFF">
+              <a:alpha val="55000"/>
+            </a:srgbClr>
+          </a:solidFill>
+          <a:ln w="0">
+            <a:noFill/>
+          </a:ln>
+        </p:spPr>
+        <p:style>
+          <a:lnRef idx="0"/>
+          <a:fillRef idx="0"/>
+          <a:effectRef idx="0"/>
+          <a:fontRef idx="minor"/>
+        </p:style>
+        <p:txBody>
+          <a:bodyPr lIns="13320" tIns="-25920" rIns="13320" bIns="-25920" anchor="t">
+            <a:noAutofit/>
+          </a:bodyPr>
+          <a:lstStyle/>
+          <a:p/>
+        </p:txBody>
+      </p:sp>
+      <p:sp>
+        <p:nvSpPr>
+          <p:cNvPr id="37" name="Shape 27">
+            <a:extLst>
+              <a:ext uri="{FF2B5EF4-FFF2-40B4-BE49-F238E27FC236}">
+                <a16:creationId xmlns:a16="http://schemas.microsoft.com/office/drawing/2014/main" id="{EF69DF23-52DA-4913-9377-F82E7D01E706}"/>
+              </a:ext>
+            </a:extLst>
+          </p:cNvPr>
+          <p:cNvSpPr>
+            <a:spLocks noGrp="1"/>
+          </p:cNvSpPr>
+          <p:nvPr/>
+        </p:nvSpPr>
+        <p:spPr>
+          <a:xfrm>
+            <a:off x="9692640" y="5943600"/>
+            <a:ext cx="45000" cy="45000"/>
+          </a:xfrm>
+          <a:prstGeom prst="ellipse">
+            <a:avLst/>
+          </a:prstGeom>
+          <a:solidFill>
+            <a:srgbClr val="FFFFFF">
+              <a:alpha val="35000"/>
+            </a:srgbClr>
+          </a:solidFill>
+          <a:ln w="0">
+            <a:noFill/>
+          </a:ln>
+        </p:spPr>
+        <p:style>
+          <a:lnRef idx="0"/>
+          <a:fillRef idx="0"/>
+          <a:effectRef idx="0"/>
+          <a:fontRef idx="minor"/>
+        </p:style>
+        <p:txBody>
+          <a:bodyPr lIns="22680" tIns="-12600" rIns="22680" bIns="-12600" anchor="t">
+            <a:noAutofit/>
+          </a:bodyPr>
+          <a:lstStyle/>
+          <a:p/>
+        </p:txBody>
+      </p:sp>
+      <p:sp>
+        <p:nvSpPr>
+          <p:cNvPr id="38" name="Shape 28">
+            <a:extLst>
+              <a:ext uri="{FF2B5EF4-FFF2-40B4-BE49-F238E27FC236}">
+                <a16:creationId xmlns:a16="http://schemas.microsoft.com/office/drawing/2014/main" id="{354CE2F4-7E35-482A-9567-A7453366C28A}"/>
+              </a:ext>
+            </a:extLst>
+          </p:cNvPr>
+          <p:cNvSpPr>
+            <a:spLocks noGrp="1"/>
+          </p:cNvSpPr>
+          <p:nvPr/>
+        </p:nvSpPr>
+        <p:spPr>
+          <a:xfrm>
+            <a:off x="7646760" y="1108800"/>
+            <a:ext cx="4640040" cy="4640040"/>
+          </a:xfrm>
+          <a:prstGeom prst="ellipse">
+            <a:avLst/>
+          </a:prstGeom>
+          <a:solidFill>
+            <a:srgbClr val="F2A93B">
+              <a:alpha val="10000"/>
+            </a:srgbClr>
+          </a:solidFill>
+          <a:ln w="0">
+            <a:noFill/>
+          </a:ln>
+        </p:spPr>
+        <p:style>
+          <a:lnRef idx="0"/>
+          <a:fillRef idx="0"/>
+          <a:effectRef idx="0"/>
+          <a:fontRef idx="minor"/>
+        </p:style>
+        <p:txBody>
+          <a:bodyPr lIns="90000" tIns="45000" rIns="90000" bIns="45000" anchor="t">
+            <a:noAutofit/>
+          </a:bodyPr>
+          <a:lstStyle/>
+          <a:p/>
+        </p:txBody>
+      </p:sp>
+      <p:sp>
+        <p:nvSpPr>
+          <p:cNvPr id="39" name="Shape 29">
+            <a:extLst>
+              <a:ext uri="{FF2B5EF4-FFF2-40B4-BE49-F238E27FC236}">
+                <a16:creationId xmlns:a16="http://schemas.microsoft.com/office/drawing/2014/main" id="{0EF7F037-1672-4D18-B923-34B785CD5227}"/>
+              </a:ext>
+            </a:extLst>
+          </p:cNvPr>
+          <p:cNvSpPr>
+            <a:spLocks noGrp="1"/>
+          </p:cNvSpPr>
+          <p:nvPr/>
+        </p:nvSpPr>
+        <p:spPr>
+          <a:xfrm>
+            <a:off x="8078760" y="1540800"/>
+            <a:ext cx="3775680" cy="3775680"/>
+          </a:xfrm>
+          <a:prstGeom prst="ellipse">
+            <a:avLst/>
+          </a:prstGeom>
+          <a:solidFill>
+            <a:srgbClr val="F2A93B">
+              <a:alpha val="18000"/>
+            </a:srgbClr>
+          </a:solidFill>
+          <a:ln w="0">
+            <a:noFill/>
+          </a:ln>
+        </p:spPr>
+        <p:style>
+          <a:lnRef idx="0"/>
+          <a:fillRef idx="0"/>
+          <a:effectRef idx="0"/>
+          <a:fontRef idx="minor"/>
+        </p:style>
+        <p:txBody>
+          <a:bodyPr lIns="90000" tIns="45000" rIns="90000" bIns="45000" anchor="t">
+            <a:noAutofit/>
+          </a:bodyPr>
+          <a:lstStyle/>
+          <a:p/>
+        </p:txBody>
+      </p:sp>
+      <p:sp>
+        <p:nvSpPr>
+          <p:cNvPr id="40" name="Shape 30">
+            <a:extLst>
+              <a:ext uri="{FF2B5EF4-FFF2-40B4-BE49-F238E27FC236}">
+                <a16:creationId xmlns:a16="http://schemas.microsoft.com/office/drawing/2014/main" id="{A73D7A36-64FD-4C33-8779-7E171F3B3EA8}"/>
+              </a:ext>
+            </a:extLst>
+          </p:cNvPr>
+          <p:cNvSpPr>
+            <a:spLocks noGrp="1"/>
+          </p:cNvSpPr>
+          <p:nvPr/>
+        </p:nvSpPr>
+        <p:spPr>
+          <a:xfrm>
+            <a:off x="8366760" y="1828800"/>
+            <a:ext cx="3199680" cy="3199680"/>
+          </a:xfrm>
+          <a:prstGeom prst="ellipse">
+            <a:avLst/>
+          </a:prstGeom>
+          <a:solidFill>
+            <a:srgbClr val="C9D3EE"/>
+          </a:solidFill>
+          <a:ln w="0">
+            <a:noFill/>
+          </a:ln>
+        </p:spPr>
+        <p:style>
+          <a:lnRef idx="0"/>
+          <a:fillRef idx="0"/>
+          <a:effectRef idx="0"/>
+          <a:fontRef idx="minor"/>
+        </p:style>
+        <p:txBody>
+          <a:bodyPr lIns="90000" tIns="45000" rIns="90000" bIns="45000" anchor="t">
+            <a:noAutofit/>
+          </a:bodyPr>
+          <a:lstStyle/>
+          <a:p/>
+        </p:txBody>
+      </p:sp>
+      <p:sp>
+        <p:nvSpPr>
+          <p:cNvPr id="41" name="Shape 31">
+            <a:extLst>
+              <a:ext uri="{FF2B5EF4-FFF2-40B4-BE49-F238E27FC236}">
+                <a16:creationId xmlns:a16="http://schemas.microsoft.com/office/drawing/2014/main" id="{45CF36FE-721E-4091-8C03-05FBB06527E0}"/>
+              </a:ext>
+            </a:extLst>
+          </p:cNvPr>
+          <p:cNvSpPr>
+            <a:spLocks noGrp="1"/>
+          </p:cNvSpPr>
+          <p:nvPr/>
+        </p:nvSpPr>
+        <p:spPr>
+          <a:xfrm>
+            <a:off x="9182880" y="2804760"/>
+            <a:ext cx="447480" cy="447480"/>
+          </a:xfrm>
+          <a:prstGeom prst="ellipse">
+            <a:avLst/>
+          </a:prstGeom>
+          <a:solidFill>
+            <a:srgbClr val="A9B6DA">
+              <a:alpha val="75000"/>
+            </a:srgbClr>
+          </a:solidFill>
+          <a:ln w="0">
+            <a:noFill/>
+          </a:ln>
+        </p:spPr>
+        <p:style>
+          <a:lnRef idx="0"/>
+          <a:fillRef idx="0"/>
+          <a:effectRef idx="0"/>
+          <a:fontRef idx="minor"/>
+        </p:style>
+        <p:txBody>
+          <a:bodyPr lIns="90000" tIns="45000" rIns="90000" bIns="45000" anchor="t">
+            <a:noAutofit/>
+          </a:bodyPr>
+          <a:lstStyle/>
+          <a:p/>
+        </p:txBody>
+      </p:sp>
+      <p:sp>
+        <p:nvSpPr>
+          <p:cNvPr id="42" name="Shape 32">
+            <a:extLst>
+              <a:ext uri="{FF2B5EF4-FFF2-40B4-BE49-F238E27FC236}">
+                <a16:creationId xmlns:a16="http://schemas.microsoft.com/office/drawing/2014/main" id="{CA8AF201-2153-4AAE-BA88-210A0D26701B}"/>
+              </a:ext>
+            </a:extLst>
+          </p:cNvPr>
+          <p:cNvSpPr>
+            <a:spLocks noGrp="1"/>
+          </p:cNvSpPr>
+          <p:nvPr/>
+        </p:nvSpPr>
+        <p:spPr>
+          <a:xfrm>
+            <a:off x="10271160" y="3413160"/>
+            <a:ext cx="351360" cy="351360"/>
+          </a:xfrm>
+          <a:prstGeom prst="ellipse">
+            <a:avLst/>
+          </a:prstGeom>
+          <a:solidFill>
+            <a:srgbClr val="A9B6DA">
+              <a:alpha val="75000"/>
+            </a:srgbClr>
+          </a:solidFill>
+          <a:ln w="0">
+            <a:noFill/>
+          </a:ln>
+        </p:spPr>
+        <p:style>
+          <a:lnRef idx="0"/>
+          <a:fillRef idx="0"/>
+          <a:effectRef idx="0"/>
+          <a:fontRef idx="minor"/>
+        </p:style>
+        <p:txBody>
+          <a:bodyPr lIns="90000" tIns="45000" rIns="90000" bIns="45000" anchor="t">
+            <a:noAutofit/>
+          </a:bodyPr>
+          <a:lstStyle/>
+          <a:p/>
+        </p:txBody>
+      </p:sp>
+      <p:sp>
+        <p:nvSpPr>
+          <p:cNvPr id="43" name="Shape 33">
+            <a:extLst>
+              <a:ext uri="{FF2B5EF4-FFF2-40B4-BE49-F238E27FC236}">
+                <a16:creationId xmlns:a16="http://schemas.microsoft.com/office/drawing/2014/main" id="{B8CFD4A3-554B-4CCF-8921-7DEF458F4E75}"/>
+              </a:ext>
+            </a:extLst>
+          </p:cNvPr>
+          <p:cNvSpPr>
+            <a:spLocks noGrp="1"/>
+          </p:cNvSpPr>
+          <p:nvPr/>
+        </p:nvSpPr>
+        <p:spPr>
+          <a:xfrm>
+            <a:off x="9662760" y="3925080"/>
+            <a:ext cx="287280" cy="287280"/>
+          </a:xfrm>
+          <a:prstGeom prst="ellipse">
+            <a:avLst/>
+          </a:prstGeom>
+          <a:solidFill>
+            <a:srgbClr val="A9B6DA">
+              <a:alpha val="75000"/>
+            </a:srgbClr>
+          </a:solidFill>
+          <a:ln w="0">
+            <a:noFill/>
+          </a:ln>
+        </p:spPr>
+        <p:style>
+          <a:lnRef idx="0"/>
+          <a:fillRef idx="0"/>
+          <a:effectRef idx="0"/>
+          <a:fontRef idx="minor"/>
+        </p:style>
+        <p:txBody>
+          <a:bodyPr lIns="90000" tIns="45000" rIns="90000" bIns="45000" anchor="t">
+            <a:noAutofit/>
+          </a:bodyPr>
+          <a:lstStyle/>
+          <a:p/>
+        </p:txBody>
+      </p:sp>
+      <p:sp>
+        <p:nvSpPr>
+          <p:cNvPr id="44" name="Shape 34">
+            <a:extLst>
+              <a:ext uri="{FF2B5EF4-FFF2-40B4-BE49-F238E27FC236}">
+                <a16:creationId xmlns:a16="http://schemas.microsoft.com/office/drawing/2014/main" id="{077ACE80-8C44-4547-AEAA-019E273381E3}"/>
+              </a:ext>
+            </a:extLst>
+          </p:cNvPr>
+          <p:cNvSpPr>
+            <a:spLocks noGrp="1"/>
+          </p:cNvSpPr>
+          <p:nvPr/>
+        </p:nvSpPr>
+        <p:spPr>
+          <a:xfrm>
+            <a:off x="10103040" y="2604960"/>
+            <a:ext cx="207360" cy="207360"/>
+          </a:xfrm>
+          <a:prstGeom prst="ellipse">
+            <a:avLst/>
+          </a:prstGeom>
+          <a:solidFill>
+            <a:srgbClr val="A9B6DA">
+              <a:alpha val="75000"/>
+            </a:srgbClr>
+          </a:solidFill>
+          <a:ln w="0">
+            <a:noFill/>
+          </a:ln>
+        </p:spPr>
+        <p:style>
+          <a:lnRef idx="0"/>
+          <a:fillRef idx="0"/>
+          <a:effectRef idx="0"/>
+          <a:fontRef idx="minor"/>
+        </p:style>
+        <p:txBody>
+          <a:bodyPr lIns="90000" tIns="45000" rIns="90000" bIns="45000" anchor="t">
+            <a:noAutofit/>
+          </a:bodyPr>
+          <a:lstStyle/>
+          <a:p/>
+        </p:txBody>
+      </p:sp>
+      <p:sp>
+        <p:nvSpPr>
+          <p:cNvPr id="45" name="TextBox 44"/>
           <p:cNvSpPr txBox="1"/>
           <p:nvPr/>
         </p:nvSpPr>
         <p:spPr>
           <a:xfrm>
-            <a:off x="914400" y="914400"/>
-            <a:ext cx="10363200" cy="914400"/>
+            <a:off x="457200" y="457200"/>
+            <a:ext cx="5486400" cy="914400"/>
           </a:xfrm>
           <a:prstGeom prst="rect">
             <a:avLst/>
@@ -7324,7 +8905,7 @@
           <a:lstStyle/>
           <a:p>
             <a:pPr>
-              <a:defRPr b="1" sz="3200">
+              <a:defRPr b="1" sz="3600">
                 <a:solidFill>
                   <a:srgbClr val="F2A93B"/>
                 </a:solidFill>
@@ -7332,21 +8913,21 @@
               </a:defRPr>
             </a:pPr>
             <a:r>
-              <a:t>EDUCATIONAL &amp; AI-ASSISTED PROJECT</a:t>
+              <a:t>EDUCATIONAL &amp; AI-ASSISTED</a:t>
             </a:r>
           </a:p>
         </p:txBody>
       </p:sp>
       <p:sp>
         <p:nvSpPr>
-          <p:cNvPr id="3" name="TextBox 2"/>
+          <p:cNvPr id="46" name="TextBox 45"/>
           <p:cNvSpPr txBox="1"/>
           <p:nvPr/>
         </p:nvSpPr>
         <p:spPr>
           <a:xfrm>
-            <a:off x="914400" y="2286000"/>
-            <a:ext cx="10363200" cy="3657600"/>
+            <a:off x="457200" y="1645920"/>
+            <a:ext cx="5486400" cy="4572000"/>
           </a:xfrm>
           <a:prstGeom prst="rect">
             <a:avLst/>
@@ -7363,7 +8944,7 @@
               <a:spcAft>
                 <a:spcPts val="2400"/>
               </a:spcAft>
-              <a:defRPr sz="2400">
+              <a:defRPr sz="2800">
                 <a:solidFill>
                   <a:srgbClr val="EAF0FF"/>
                 </a:solidFill>

--- a/Paper-and-Pitch/Pitch.pptx
+++ b/Paper-and-Pitch/Pitch.pptx
@@ -2926,7 +2926,7 @@
                 <a:ea typeface="Calibri"/>
                 <a:cs typeface="Calibri"/>
               </a:rPr>
-              <a:t>lemoon01110</a:t>
+              <a:t>Jack Wu (lemoon01110)  ·  ORCID 0009-0004-1710-9018  ·  v2.0.0  ·  github.com/lemoon01110/Lunar-Titanium-Magnetism</a:t>
             </a:r>
             <a:r>
               <a:rPr sz="1400" b="0" u="none">
@@ -2937,7 +2937,7 @@
                 <a:ea typeface="Calibri"/>
                 <a:cs typeface="Calibri"/>
               </a:rPr>
-              <a:t>   ·   github.com/lemoon01110/Lunar-Titanium-Magnetism</a:t>
+              <a:t/>
             </a:r>
           </a:p>
         </p:txBody>
@@ -2973,6 +2973,2115 @@
       </p:grpSpPr>
       <p:sp>
         <p:nvSpPr>
+          <p:cNvPr id="390" name="Shape 0">
+            <a:extLst xmlns:a="http://schemas.openxmlformats.org/drawingml/2006/main">
+              <a:ext uri="{FF2B5EF4-FFF2-40B4-BE49-F238E27FC236}">
+                <a16:creationId xmlns:a16="http://schemas.microsoft.com/office/drawing/2014/main" id="{B514E457-E824-4DC1-B3B7-F4110259BB72}"/>
+              </a:ext>
+            </a:extLst>
+          </p:cNvPr>
+          <p:cNvSpPr>
+            <a:spLocks xmlns:a="http://schemas.openxmlformats.org/drawingml/2006/main" noGrp="1"/>
+          </p:cNvSpPr>
+          <p:nvPr/>
+        </p:nvSpPr>
+        <p:spPr>
+          <a:xfrm xmlns:a="http://schemas.openxmlformats.org/drawingml/2006/main">
+            <a:off x="548640" y="640080"/>
+            <a:ext cx="45000" cy="45000"/>
+          </a:xfrm>
+          <a:prstGeom xmlns:a="http://schemas.openxmlformats.org/drawingml/2006/main" prst="ellipse">
+            <a:avLst/>
+          </a:prstGeom>
+          <a:solidFill xmlns:a="http://schemas.openxmlformats.org/drawingml/2006/main">
+            <a:srgbClr val="FFFFFF">
+              <a:alpha val="55000"/>
+            </a:srgbClr>
+          </a:solidFill>
+          <a:ln xmlns:a="http://schemas.openxmlformats.org/drawingml/2006/main" w="0">
+            <a:noFill/>
+          </a:ln>
+        </p:spPr>
+        <p:style>
+          <a:lnRef xmlns:a="http://schemas.openxmlformats.org/drawingml/2006/main" idx="0"/>
+          <a:fillRef xmlns:a="http://schemas.openxmlformats.org/drawingml/2006/main" idx="0"/>
+          <a:effectRef xmlns:a="http://schemas.openxmlformats.org/drawingml/2006/main" idx="0"/>
+          <a:fontRef xmlns:a="http://schemas.openxmlformats.org/drawingml/2006/main" idx="minor"/>
+        </p:style>
+        <p:txBody>
+          <a:bodyPr xmlns:a="http://schemas.openxmlformats.org/drawingml/2006/main" lIns="22680" tIns="-12600" rIns="22680" bIns="-12600" anchor="t">
+            <a:noAutofit/>
+          </a:bodyPr>
+          <a:lstStyle xmlns:a="http://schemas.openxmlformats.org/drawingml/2006/main"/>
+          <a:p xmlns:a="http://schemas.openxmlformats.org/drawingml/2006/main"/>
+        </p:txBody>
+      </p:sp>
+      <p:sp>
+        <p:nvSpPr>
+          <p:cNvPr id="391" name="Shape 1">
+            <a:extLst xmlns:a="http://schemas.openxmlformats.org/drawingml/2006/main">
+              <a:ext uri="{FF2B5EF4-FFF2-40B4-BE49-F238E27FC236}">
+                <a16:creationId xmlns:a16="http://schemas.microsoft.com/office/drawing/2014/main" id="{A066E4F9-A6A9-4258-A020-BD560E6A411E}"/>
+              </a:ext>
+            </a:extLst>
+          </p:cNvPr>
+          <p:cNvSpPr>
+            <a:spLocks xmlns:a="http://schemas.openxmlformats.org/drawingml/2006/main" noGrp="1"/>
+          </p:cNvSpPr>
+          <p:nvPr/>
+        </p:nvSpPr>
+        <p:spPr>
+          <a:xfrm xmlns:a="http://schemas.openxmlformats.org/drawingml/2006/main">
+            <a:off x="1280160" y="1188720"/>
+            <a:ext cx="26640" cy="26640"/>
+          </a:xfrm>
+          <a:prstGeom xmlns:a="http://schemas.openxmlformats.org/drawingml/2006/main" prst="ellipse">
+            <a:avLst/>
+          </a:prstGeom>
+          <a:solidFill xmlns:a="http://schemas.openxmlformats.org/drawingml/2006/main">
+            <a:srgbClr val="FFFFFF">
+              <a:alpha val="35000"/>
+            </a:srgbClr>
+          </a:solidFill>
+          <a:ln xmlns:a="http://schemas.openxmlformats.org/drawingml/2006/main" w="0">
+            <a:noFill/>
+          </a:ln>
+        </p:spPr>
+        <p:style>
+          <a:lnRef xmlns:a="http://schemas.openxmlformats.org/drawingml/2006/main" idx="0"/>
+          <a:fillRef xmlns:a="http://schemas.openxmlformats.org/drawingml/2006/main" idx="0"/>
+          <a:effectRef xmlns:a="http://schemas.openxmlformats.org/drawingml/2006/main" idx="0"/>
+          <a:fontRef xmlns:a="http://schemas.openxmlformats.org/drawingml/2006/main" idx="minor"/>
+        </p:style>
+        <p:txBody>
+          <a:bodyPr xmlns:a="http://schemas.openxmlformats.org/drawingml/2006/main" lIns="13320" tIns="-25920" rIns="13320" bIns="-25920" anchor="t">
+            <a:noAutofit/>
+          </a:bodyPr>
+          <a:lstStyle xmlns:a="http://schemas.openxmlformats.org/drawingml/2006/main"/>
+          <a:p xmlns:a="http://schemas.openxmlformats.org/drawingml/2006/main"/>
+        </p:txBody>
+      </p:sp>
+      <p:sp>
+        <p:nvSpPr>
+          <p:cNvPr id="392" name="Shape 2">
+            <a:extLst xmlns:a="http://schemas.openxmlformats.org/drawingml/2006/main">
+              <a:ext uri="{FF2B5EF4-FFF2-40B4-BE49-F238E27FC236}">
+                <a16:creationId xmlns:a16="http://schemas.microsoft.com/office/drawing/2014/main" id="{6E0503B3-060E-44F7-A4D2-AA3A70929140}"/>
+              </a:ext>
+            </a:extLst>
+          </p:cNvPr>
+          <p:cNvSpPr>
+            <a:spLocks xmlns:a="http://schemas.openxmlformats.org/drawingml/2006/main" noGrp="1"/>
+          </p:cNvSpPr>
+          <p:nvPr/>
+        </p:nvSpPr>
+        <p:spPr>
+          <a:xfrm xmlns:a="http://schemas.openxmlformats.org/drawingml/2006/main">
+            <a:off x="1920240" y="457200"/>
+            <a:ext cx="26640" cy="26640"/>
+          </a:xfrm>
+          <a:prstGeom xmlns:a="http://schemas.openxmlformats.org/drawingml/2006/main" prst="ellipse">
+            <a:avLst/>
+          </a:prstGeom>
+          <a:solidFill xmlns:a="http://schemas.openxmlformats.org/drawingml/2006/main">
+            <a:srgbClr val="FFFFFF">
+              <a:alpha val="55000"/>
+            </a:srgbClr>
+          </a:solidFill>
+          <a:ln xmlns:a="http://schemas.openxmlformats.org/drawingml/2006/main" w="0">
+            <a:noFill/>
+          </a:ln>
+        </p:spPr>
+        <p:style>
+          <a:lnRef xmlns:a="http://schemas.openxmlformats.org/drawingml/2006/main" idx="0"/>
+          <a:fillRef xmlns:a="http://schemas.openxmlformats.org/drawingml/2006/main" idx="0"/>
+          <a:effectRef xmlns:a="http://schemas.openxmlformats.org/drawingml/2006/main" idx="0"/>
+          <a:fontRef xmlns:a="http://schemas.openxmlformats.org/drawingml/2006/main" idx="minor"/>
+        </p:style>
+        <p:txBody>
+          <a:bodyPr xmlns:a="http://schemas.openxmlformats.org/drawingml/2006/main" lIns="13320" tIns="-25920" rIns="13320" bIns="-25920" anchor="t">
+            <a:noAutofit/>
+          </a:bodyPr>
+          <a:lstStyle xmlns:a="http://schemas.openxmlformats.org/drawingml/2006/main"/>
+          <a:p xmlns:a="http://schemas.openxmlformats.org/drawingml/2006/main"/>
+        </p:txBody>
+      </p:sp>
+      <p:sp>
+        <p:nvSpPr>
+          <p:cNvPr id="393" name="Shape 3">
+            <a:extLst xmlns:a="http://schemas.openxmlformats.org/drawingml/2006/main">
+              <a:ext uri="{FF2B5EF4-FFF2-40B4-BE49-F238E27FC236}">
+                <a16:creationId xmlns:a16="http://schemas.microsoft.com/office/drawing/2014/main" id="{CE296E31-D0A1-49CA-BA01-16A0C88DCA18}"/>
+              </a:ext>
+            </a:extLst>
+          </p:cNvPr>
+          <p:cNvSpPr>
+            <a:spLocks xmlns:a="http://schemas.openxmlformats.org/drawingml/2006/main" noGrp="1"/>
+          </p:cNvSpPr>
+          <p:nvPr/>
+        </p:nvSpPr>
+        <p:spPr>
+          <a:xfrm xmlns:a="http://schemas.openxmlformats.org/drawingml/2006/main">
+            <a:off x="2926080" y="914400"/>
+            <a:ext cx="45000" cy="45000"/>
+          </a:xfrm>
+          <a:prstGeom xmlns:a="http://schemas.openxmlformats.org/drawingml/2006/main" prst="ellipse">
+            <a:avLst/>
+          </a:prstGeom>
+          <a:solidFill xmlns:a="http://schemas.openxmlformats.org/drawingml/2006/main">
+            <a:srgbClr val="FFFFFF">
+              <a:alpha val="35000"/>
+            </a:srgbClr>
+          </a:solidFill>
+          <a:ln xmlns:a="http://schemas.openxmlformats.org/drawingml/2006/main" w="0">
+            <a:noFill/>
+          </a:ln>
+        </p:spPr>
+        <p:style>
+          <a:lnRef xmlns:a="http://schemas.openxmlformats.org/drawingml/2006/main" idx="0"/>
+          <a:fillRef xmlns:a="http://schemas.openxmlformats.org/drawingml/2006/main" idx="0"/>
+          <a:effectRef xmlns:a="http://schemas.openxmlformats.org/drawingml/2006/main" idx="0"/>
+          <a:fontRef xmlns:a="http://schemas.openxmlformats.org/drawingml/2006/main" idx="minor"/>
+        </p:style>
+        <p:txBody>
+          <a:bodyPr xmlns:a="http://schemas.openxmlformats.org/drawingml/2006/main" lIns="22680" tIns="-12600" rIns="22680" bIns="-12600" anchor="t">
+            <a:noAutofit/>
+          </a:bodyPr>
+          <a:lstStyle xmlns:a="http://schemas.openxmlformats.org/drawingml/2006/main"/>
+          <a:p xmlns:a="http://schemas.openxmlformats.org/drawingml/2006/main"/>
+        </p:txBody>
+      </p:sp>
+      <p:sp>
+        <p:nvSpPr>
+          <p:cNvPr id="394" name="Shape 4">
+            <a:extLst xmlns:a="http://schemas.openxmlformats.org/drawingml/2006/main">
+              <a:ext uri="{FF2B5EF4-FFF2-40B4-BE49-F238E27FC236}">
+                <a16:creationId xmlns:a16="http://schemas.microsoft.com/office/drawing/2014/main" id="{491C7BA0-054E-4A42-A379-FD00F58881DA}"/>
+              </a:ext>
+            </a:extLst>
+          </p:cNvPr>
+          <p:cNvSpPr>
+            <a:spLocks xmlns:a="http://schemas.openxmlformats.org/drawingml/2006/main" noGrp="1"/>
+          </p:cNvSpPr>
+          <p:nvPr/>
+        </p:nvSpPr>
+        <p:spPr>
+          <a:xfrm xmlns:a="http://schemas.openxmlformats.org/drawingml/2006/main">
+            <a:off x="822960" y="2194560"/>
+            <a:ext cx="26640" cy="26640"/>
+          </a:xfrm>
+          <a:prstGeom xmlns:a="http://schemas.openxmlformats.org/drawingml/2006/main" prst="ellipse">
+            <a:avLst/>
+          </a:prstGeom>
+          <a:solidFill xmlns:a="http://schemas.openxmlformats.org/drawingml/2006/main">
+            <a:srgbClr val="FFFFFF">
+              <a:alpha val="55000"/>
+            </a:srgbClr>
+          </a:solidFill>
+          <a:ln xmlns:a="http://schemas.openxmlformats.org/drawingml/2006/main" w="0">
+            <a:noFill/>
+          </a:ln>
+        </p:spPr>
+        <p:style>
+          <a:lnRef xmlns:a="http://schemas.openxmlformats.org/drawingml/2006/main" idx="0"/>
+          <a:fillRef xmlns:a="http://schemas.openxmlformats.org/drawingml/2006/main" idx="0"/>
+          <a:effectRef xmlns:a="http://schemas.openxmlformats.org/drawingml/2006/main" idx="0"/>
+          <a:fontRef xmlns:a="http://schemas.openxmlformats.org/drawingml/2006/main" idx="minor"/>
+        </p:style>
+        <p:txBody>
+          <a:bodyPr xmlns:a="http://schemas.openxmlformats.org/drawingml/2006/main" lIns="13320" tIns="-25920" rIns="13320" bIns="-25920" anchor="t">
+            <a:noAutofit/>
+          </a:bodyPr>
+          <a:lstStyle xmlns:a="http://schemas.openxmlformats.org/drawingml/2006/main"/>
+          <a:p xmlns:a="http://schemas.openxmlformats.org/drawingml/2006/main"/>
+        </p:txBody>
+      </p:sp>
+      <p:sp>
+        <p:nvSpPr>
+          <p:cNvPr id="395" name="Shape 5">
+            <a:extLst xmlns:a="http://schemas.openxmlformats.org/drawingml/2006/main">
+              <a:ext uri="{FF2B5EF4-FFF2-40B4-BE49-F238E27FC236}">
+                <a16:creationId xmlns:a16="http://schemas.microsoft.com/office/drawing/2014/main" id="{F8B3FA18-89DE-4B27-B6FE-10E25AFEF69E}"/>
+              </a:ext>
+            </a:extLst>
+          </p:cNvPr>
+          <p:cNvSpPr>
+            <a:spLocks xmlns:a="http://schemas.openxmlformats.org/drawingml/2006/main" noGrp="1"/>
+          </p:cNvSpPr>
+          <p:nvPr/>
+        </p:nvSpPr>
+        <p:spPr>
+          <a:xfrm xmlns:a="http://schemas.openxmlformats.org/drawingml/2006/main">
+            <a:off x="1645920" y="3017520"/>
+            <a:ext cx="26640" cy="26640"/>
+          </a:xfrm>
+          <a:prstGeom xmlns:a="http://schemas.openxmlformats.org/drawingml/2006/main" prst="ellipse">
+            <a:avLst/>
+          </a:prstGeom>
+          <a:solidFill xmlns:a="http://schemas.openxmlformats.org/drawingml/2006/main">
+            <a:srgbClr val="FFFFFF">
+              <a:alpha val="35000"/>
+            </a:srgbClr>
+          </a:solidFill>
+          <a:ln xmlns:a="http://schemas.openxmlformats.org/drawingml/2006/main" w="0">
+            <a:noFill/>
+          </a:ln>
+        </p:spPr>
+        <p:style>
+          <a:lnRef xmlns:a="http://schemas.openxmlformats.org/drawingml/2006/main" idx="0"/>
+          <a:fillRef xmlns:a="http://schemas.openxmlformats.org/drawingml/2006/main" idx="0"/>
+          <a:effectRef xmlns:a="http://schemas.openxmlformats.org/drawingml/2006/main" idx="0"/>
+          <a:fontRef xmlns:a="http://schemas.openxmlformats.org/drawingml/2006/main" idx="minor"/>
+        </p:style>
+        <p:txBody>
+          <a:bodyPr xmlns:a="http://schemas.openxmlformats.org/drawingml/2006/main" lIns="13320" tIns="-25920" rIns="13320" bIns="-25920" anchor="t">
+            <a:noAutofit/>
+          </a:bodyPr>
+          <a:lstStyle xmlns:a="http://schemas.openxmlformats.org/drawingml/2006/main"/>
+          <a:p xmlns:a="http://schemas.openxmlformats.org/drawingml/2006/main"/>
+        </p:txBody>
+      </p:sp>
+      <p:sp>
+        <p:nvSpPr>
+          <p:cNvPr id="396" name="Shape 6">
+            <a:extLst xmlns:a="http://schemas.openxmlformats.org/drawingml/2006/main">
+              <a:ext uri="{FF2B5EF4-FFF2-40B4-BE49-F238E27FC236}">
+                <a16:creationId xmlns:a16="http://schemas.microsoft.com/office/drawing/2014/main" id="{4053098E-82FB-4426-BB93-B30138C8E4DB}"/>
+              </a:ext>
+            </a:extLst>
+          </p:cNvPr>
+          <p:cNvSpPr>
+            <a:spLocks xmlns:a="http://schemas.openxmlformats.org/drawingml/2006/main" noGrp="1"/>
+          </p:cNvSpPr>
+          <p:nvPr/>
+        </p:nvSpPr>
+        <p:spPr>
+          <a:xfrm xmlns:a="http://schemas.openxmlformats.org/drawingml/2006/main">
+            <a:off x="457200" y="3840480"/>
+            <a:ext cx="45000" cy="45000"/>
+          </a:xfrm>
+          <a:prstGeom xmlns:a="http://schemas.openxmlformats.org/drawingml/2006/main" prst="ellipse">
+            <a:avLst/>
+          </a:prstGeom>
+          <a:solidFill xmlns:a="http://schemas.openxmlformats.org/drawingml/2006/main">
+            <a:srgbClr val="FFFFFF">
+              <a:alpha val="55000"/>
+            </a:srgbClr>
+          </a:solidFill>
+          <a:ln xmlns:a="http://schemas.openxmlformats.org/drawingml/2006/main" w="0">
+            <a:noFill/>
+          </a:ln>
+        </p:spPr>
+        <p:style>
+          <a:lnRef xmlns:a="http://schemas.openxmlformats.org/drawingml/2006/main" idx="0"/>
+          <a:fillRef xmlns:a="http://schemas.openxmlformats.org/drawingml/2006/main" idx="0"/>
+          <a:effectRef xmlns:a="http://schemas.openxmlformats.org/drawingml/2006/main" idx="0"/>
+          <a:fontRef xmlns:a="http://schemas.openxmlformats.org/drawingml/2006/main" idx="minor"/>
+        </p:style>
+        <p:txBody>
+          <a:bodyPr xmlns:a="http://schemas.openxmlformats.org/drawingml/2006/main" lIns="22680" tIns="-12600" rIns="22680" bIns="-12600" anchor="t">
+            <a:noAutofit/>
+          </a:bodyPr>
+          <a:lstStyle xmlns:a="http://schemas.openxmlformats.org/drawingml/2006/main"/>
+          <a:p xmlns:a="http://schemas.openxmlformats.org/drawingml/2006/main"/>
+        </p:txBody>
+      </p:sp>
+      <p:sp>
+        <p:nvSpPr>
+          <p:cNvPr id="397" name="Shape 7">
+            <a:extLst xmlns:a="http://schemas.openxmlformats.org/drawingml/2006/main">
+              <a:ext uri="{FF2B5EF4-FFF2-40B4-BE49-F238E27FC236}">
+                <a16:creationId xmlns:a16="http://schemas.microsoft.com/office/drawing/2014/main" id="{F3144DBA-F608-4CCD-B2CD-996458986E2B}"/>
+              </a:ext>
+            </a:extLst>
+          </p:cNvPr>
+          <p:cNvSpPr>
+            <a:spLocks xmlns:a="http://schemas.openxmlformats.org/drawingml/2006/main" noGrp="1"/>
+          </p:cNvSpPr>
+          <p:nvPr/>
+        </p:nvSpPr>
+        <p:spPr>
+          <a:xfrm xmlns:a="http://schemas.openxmlformats.org/drawingml/2006/main">
+            <a:off x="1097280" y="4663440"/>
+            <a:ext cx="26640" cy="26640"/>
+          </a:xfrm>
+          <a:prstGeom xmlns:a="http://schemas.openxmlformats.org/drawingml/2006/main" prst="ellipse">
+            <a:avLst/>
+          </a:prstGeom>
+          <a:solidFill xmlns:a="http://schemas.openxmlformats.org/drawingml/2006/main">
+            <a:srgbClr val="FFFFFF">
+              <a:alpha val="35000"/>
+            </a:srgbClr>
+          </a:solidFill>
+          <a:ln xmlns:a="http://schemas.openxmlformats.org/drawingml/2006/main" w="0">
+            <a:noFill/>
+          </a:ln>
+        </p:spPr>
+        <p:style>
+          <a:lnRef xmlns:a="http://schemas.openxmlformats.org/drawingml/2006/main" idx="0"/>
+          <a:fillRef xmlns:a="http://schemas.openxmlformats.org/drawingml/2006/main" idx="0"/>
+          <a:effectRef xmlns:a="http://schemas.openxmlformats.org/drawingml/2006/main" idx="0"/>
+          <a:fontRef xmlns:a="http://schemas.openxmlformats.org/drawingml/2006/main" idx="minor"/>
+        </p:style>
+        <p:txBody>
+          <a:bodyPr xmlns:a="http://schemas.openxmlformats.org/drawingml/2006/main" lIns="13320" tIns="-25920" rIns="13320" bIns="-25920" anchor="t">
+            <a:noAutofit/>
+          </a:bodyPr>
+          <a:lstStyle xmlns:a="http://schemas.openxmlformats.org/drawingml/2006/main"/>
+          <a:p xmlns:a="http://schemas.openxmlformats.org/drawingml/2006/main"/>
+        </p:txBody>
+      </p:sp>
+      <p:sp>
+        <p:nvSpPr>
+          <p:cNvPr id="398" name="Shape 8">
+            <a:extLst xmlns:a="http://schemas.openxmlformats.org/drawingml/2006/main">
+              <a:ext uri="{FF2B5EF4-FFF2-40B4-BE49-F238E27FC236}">
+                <a16:creationId xmlns:a16="http://schemas.microsoft.com/office/drawing/2014/main" id="{623DA0CC-7BFB-4ECF-9409-3831F3129947}"/>
+              </a:ext>
+            </a:extLst>
+          </p:cNvPr>
+          <p:cNvSpPr>
+            <a:spLocks xmlns:a="http://schemas.openxmlformats.org/drawingml/2006/main" noGrp="1"/>
+          </p:cNvSpPr>
+          <p:nvPr/>
+        </p:nvSpPr>
+        <p:spPr>
+          <a:xfrm xmlns:a="http://schemas.openxmlformats.org/drawingml/2006/main">
+            <a:off x="731520" y="5669280"/>
+            <a:ext cx="26640" cy="26640"/>
+          </a:xfrm>
+          <a:prstGeom xmlns:a="http://schemas.openxmlformats.org/drawingml/2006/main" prst="ellipse">
+            <a:avLst/>
+          </a:prstGeom>
+          <a:solidFill xmlns:a="http://schemas.openxmlformats.org/drawingml/2006/main">
+            <a:srgbClr val="FFFFFF">
+              <a:alpha val="55000"/>
+            </a:srgbClr>
+          </a:solidFill>
+          <a:ln xmlns:a="http://schemas.openxmlformats.org/drawingml/2006/main" w="0">
+            <a:noFill/>
+          </a:ln>
+        </p:spPr>
+        <p:style>
+          <a:lnRef xmlns:a="http://schemas.openxmlformats.org/drawingml/2006/main" idx="0"/>
+          <a:fillRef xmlns:a="http://schemas.openxmlformats.org/drawingml/2006/main" idx="0"/>
+          <a:effectRef xmlns:a="http://schemas.openxmlformats.org/drawingml/2006/main" idx="0"/>
+          <a:fontRef xmlns:a="http://schemas.openxmlformats.org/drawingml/2006/main" idx="minor"/>
+        </p:style>
+        <p:txBody>
+          <a:bodyPr xmlns:a="http://schemas.openxmlformats.org/drawingml/2006/main" lIns="13320" tIns="-25920" rIns="13320" bIns="-25920" anchor="t">
+            <a:noAutofit/>
+          </a:bodyPr>
+          <a:lstStyle xmlns:a="http://schemas.openxmlformats.org/drawingml/2006/main"/>
+          <a:p xmlns:a="http://schemas.openxmlformats.org/drawingml/2006/main"/>
+        </p:txBody>
+      </p:sp>
+      <p:sp>
+        <p:nvSpPr>
+          <p:cNvPr id="399" name="Shape 9">
+            <a:extLst xmlns:a="http://schemas.openxmlformats.org/drawingml/2006/main">
+              <a:ext uri="{FF2B5EF4-FFF2-40B4-BE49-F238E27FC236}">
+                <a16:creationId xmlns:a16="http://schemas.microsoft.com/office/drawing/2014/main" id="{BBB0BDEA-5923-4DA7-B4B8-DE366A49C23F}"/>
+              </a:ext>
+            </a:extLst>
+          </p:cNvPr>
+          <p:cNvSpPr>
+            <a:spLocks xmlns:a="http://schemas.openxmlformats.org/drawingml/2006/main" noGrp="1"/>
+          </p:cNvSpPr>
+          <p:nvPr/>
+        </p:nvSpPr>
+        <p:spPr>
+          <a:xfrm xmlns:a="http://schemas.openxmlformats.org/drawingml/2006/main">
+            <a:off x="2194560" y="6035040"/>
+            <a:ext cx="45000" cy="45000"/>
+          </a:xfrm>
+          <a:prstGeom xmlns:a="http://schemas.openxmlformats.org/drawingml/2006/main" prst="ellipse">
+            <a:avLst/>
+          </a:prstGeom>
+          <a:solidFill xmlns:a="http://schemas.openxmlformats.org/drawingml/2006/main">
+            <a:srgbClr val="FFFFFF">
+              <a:alpha val="35000"/>
+            </a:srgbClr>
+          </a:solidFill>
+          <a:ln xmlns:a="http://schemas.openxmlformats.org/drawingml/2006/main" w="0">
+            <a:noFill/>
+          </a:ln>
+        </p:spPr>
+        <p:style>
+          <a:lnRef xmlns:a="http://schemas.openxmlformats.org/drawingml/2006/main" idx="0"/>
+          <a:fillRef xmlns:a="http://schemas.openxmlformats.org/drawingml/2006/main" idx="0"/>
+          <a:effectRef xmlns:a="http://schemas.openxmlformats.org/drawingml/2006/main" idx="0"/>
+          <a:fontRef xmlns:a="http://schemas.openxmlformats.org/drawingml/2006/main" idx="minor"/>
+        </p:style>
+        <p:txBody>
+          <a:bodyPr xmlns:a="http://schemas.openxmlformats.org/drawingml/2006/main" lIns="22680" tIns="-12600" rIns="22680" bIns="-12600" anchor="t">
+            <a:noAutofit/>
+          </a:bodyPr>
+          <a:lstStyle xmlns:a="http://schemas.openxmlformats.org/drawingml/2006/main"/>
+          <a:p xmlns:a="http://schemas.openxmlformats.org/drawingml/2006/main"/>
+        </p:txBody>
+      </p:sp>
+      <p:sp>
+        <p:nvSpPr>
+          <p:cNvPr id="400" name="Shape 10">
+            <a:extLst xmlns:a="http://schemas.openxmlformats.org/drawingml/2006/main">
+              <a:ext uri="{FF2B5EF4-FFF2-40B4-BE49-F238E27FC236}">
+                <a16:creationId xmlns:a16="http://schemas.microsoft.com/office/drawing/2014/main" id="{1AC1EE80-79F6-41D6-B230-3F6502122F1A}"/>
+              </a:ext>
+            </a:extLst>
+          </p:cNvPr>
+          <p:cNvSpPr>
+            <a:spLocks xmlns:a="http://schemas.openxmlformats.org/drawingml/2006/main" noGrp="1"/>
+          </p:cNvSpPr>
+          <p:nvPr/>
+        </p:nvSpPr>
+        <p:spPr>
+          <a:xfrm xmlns:a="http://schemas.openxmlformats.org/drawingml/2006/main">
+            <a:off x="11612880" y="548640"/>
+            <a:ext cx="26640" cy="26640"/>
+          </a:xfrm>
+          <a:prstGeom xmlns:a="http://schemas.openxmlformats.org/drawingml/2006/main" prst="ellipse">
+            <a:avLst/>
+          </a:prstGeom>
+          <a:solidFill xmlns:a="http://schemas.openxmlformats.org/drawingml/2006/main">
+            <a:srgbClr val="FFFFFF">
+              <a:alpha val="55000"/>
+            </a:srgbClr>
+          </a:solidFill>
+          <a:ln xmlns:a="http://schemas.openxmlformats.org/drawingml/2006/main" w="0">
+            <a:noFill/>
+          </a:ln>
+        </p:spPr>
+        <p:style>
+          <a:lnRef xmlns:a="http://schemas.openxmlformats.org/drawingml/2006/main" idx="0"/>
+          <a:fillRef xmlns:a="http://schemas.openxmlformats.org/drawingml/2006/main" idx="0"/>
+          <a:effectRef xmlns:a="http://schemas.openxmlformats.org/drawingml/2006/main" idx="0"/>
+          <a:fontRef xmlns:a="http://schemas.openxmlformats.org/drawingml/2006/main" idx="minor"/>
+        </p:style>
+        <p:txBody>
+          <a:bodyPr xmlns:a="http://schemas.openxmlformats.org/drawingml/2006/main" lIns="13320" tIns="-25920" rIns="13320" bIns="-25920" anchor="t">
+            <a:noAutofit/>
+          </a:bodyPr>
+          <a:lstStyle xmlns:a="http://schemas.openxmlformats.org/drawingml/2006/main"/>
+          <a:p xmlns:a="http://schemas.openxmlformats.org/drawingml/2006/main"/>
+        </p:txBody>
+      </p:sp>
+      <p:sp>
+        <p:nvSpPr>
+          <p:cNvPr id="401" name="Shape 11">
+            <a:extLst xmlns:a="http://schemas.openxmlformats.org/drawingml/2006/main">
+              <a:ext uri="{FF2B5EF4-FFF2-40B4-BE49-F238E27FC236}">
+                <a16:creationId xmlns:a16="http://schemas.microsoft.com/office/drawing/2014/main" id="{85CF86A7-BE80-4CBA-AB14-F19D1950C316}"/>
+              </a:ext>
+            </a:extLst>
+          </p:cNvPr>
+          <p:cNvSpPr>
+            <a:spLocks xmlns:a="http://schemas.openxmlformats.org/drawingml/2006/main" noGrp="1"/>
+          </p:cNvSpPr>
+          <p:nvPr/>
+        </p:nvSpPr>
+        <p:spPr>
+          <a:xfrm xmlns:a="http://schemas.openxmlformats.org/drawingml/2006/main">
+            <a:off x="10881360" y="1280160"/>
+            <a:ext cx="26640" cy="26640"/>
+          </a:xfrm>
+          <a:prstGeom xmlns:a="http://schemas.openxmlformats.org/drawingml/2006/main" prst="ellipse">
+            <a:avLst/>
+          </a:prstGeom>
+          <a:solidFill xmlns:a="http://schemas.openxmlformats.org/drawingml/2006/main">
+            <a:srgbClr val="FFFFFF">
+              <a:alpha val="35000"/>
+            </a:srgbClr>
+          </a:solidFill>
+          <a:ln xmlns:a="http://schemas.openxmlformats.org/drawingml/2006/main" w="0">
+            <a:noFill/>
+          </a:ln>
+        </p:spPr>
+        <p:style>
+          <a:lnRef xmlns:a="http://schemas.openxmlformats.org/drawingml/2006/main" idx="0"/>
+          <a:fillRef xmlns:a="http://schemas.openxmlformats.org/drawingml/2006/main" idx="0"/>
+          <a:effectRef xmlns:a="http://schemas.openxmlformats.org/drawingml/2006/main" idx="0"/>
+          <a:fontRef xmlns:a="http://schemas.openxmlformats.org/drawingml/2006/main" idx="minor"/>
+        </p:style>
+        <p:txBody>
+          <a:bodyPr xmlns:a="http://schemas.openxmlformats.org/drawingml/2006/main" lIns="13320" tIns="-25920" rIns="13320" bIns="-25920" anchor="t">
+            <a:noAutofit/>
+          </a:bodyPr>
+          <a:lstStyle xmlns:a="http://schemas.openxmlformats.org/drawingml/2006/main"/>
+          <a:p xmlns:a="http://schemas.openxmlformats.org/drawingml/2006/main"/>
+        </p:txBody>
+      </p:sp>
+      <p:sp>
+        <p:nvSpPr>
+          <p:cNvPr id="402" name="Shape 12">
+            <a:extLst xmlns:a="http://schemas.openxmlformats.org/drawingml/2006/main">
+              <a:ext uri="{FF2B5EF4-FFF2-40B4-BE49-F238E27FC236}">
+                <a16:creationId xmlns:a16="http://schemas.microsoft.com/office/drawing/2014/main" id="{3F72594F-53CA-4499-89AA-1A8E4350A647}"/>
+              </a:ext>
+            </a:extLst>
+          </p:cNvPr>
+          <p:cNvSpPr>
+            <a:spLocks xmlns:a="http://schemas.openxmlformats.org/drawingml/2006/main" noGrp="1"/>
+          </p:cNvSpPr>
+          <p:nvPr/>
+        </p:nvSpPr>
+        <p:spPr>
+          <a:xfrm xmlns:a="http://schemas.openxmlformats.org/drawingml/2006/main">
+            <a:off x="11795760" y="2103120"/>
+            <a:ext cx="45000" cy="45000"/>
+          </a:xfrm>
+          <a:prstGeom xmlns:a="http://schemas.openxmlformats.org/drawingml/2006/main" prst="ellipse">
+            <a:avLst/>
+          </a:prstGeom>
+          <a:solidFill xmlns:a="http://schemas.openxmlformats.org/drawingml/2006/main">
+            <a:srgbClr val="FFFFFF">
+              <a:alpha val="55000"/>
+            </a:srgbClr>
+          </a:solidFill>
+          <a:ln xmlns:a="http://schemas.openxmlformats.org/drawingml/2006/main" w="0">
+            <a:noFill/>
+          </a:ln>
+        </p:spPr>
+        <p:style>
+          <a:lnRef xmlns:a="http://schemas.openxmlformats.org/drawingml/2006/main" idx="0"/>
+          <a:fillRef xmlns:a="http://schemas.openxmlformats.org/drawingml/2006/main" idx="0"/>
+          <a:effectRef xmlns:a="http://schemas.openxmlformats.org/drawingml/2006/main" idx="0"/>
+          <a:fontRef xmlns:a="http://schemas.openxmlformats.org/drawingml/2006/main" idx="minor"/>
+        </p:style>
+        <p:txBody>
+          <a:bodyPr xmlns:a="http://schemas.openxmlformats.org/drawingml/2006/main" lIns="22680" tIns="-12600" rIns="22680" bIns="-12600" anchor="t">
+            <a:noAutofit/>
+          </a:bodyPr>
+          <a:lstStyle xmlns:a="http://schemas.openxmlformats.org/drawingml/2006/main"/>
+          <a:p xmlns:a="http://schemas.openxmlformats.org/drawingml/2006/main"/>
+        </p:txBody>
+      </p:sp>
+      <p:sp>
+        <p:nvSpPr>
+          <p:cNvPr id="403" name="Shape 13">
+            <a:extLst xmlns:a="http://schemas.openxmlformats.org/drawingml/2006/main">
+              <a:ext uri="{FF2B5EF4-FFF2-40B4-BE49-F238E27FC236}">
+                <a16:creationId xmlns:a16="http://schemas.microsoft.com/office/drawing/2014/main" id="{D1E7E4F0-5324-46BD-BD96-8E9CADA62927}"/>
+              </a:ext>
+            </a:extLst>
+          </p:cNvPr>
+          <p:cNvSpPr>
+            <a:spLocks xmlns:a="http://schemas.openxmlformats.org/drawingml/2006/main" noGrp="1"/>
+          </p:cNvSpPr>
+          <p:nvPr/>
+        </p:nvSpPr>
+        <p:spPr>
+          <a:xfrm xmlns:a="http://schemas.openxmlformats.org/drawingml/2006/main">
+            <a:off x="11247120" y="2926080"/>
+            <a:ext cx="26640" cy="26640"/>
+          </a:xfrm>
+          <a:prstGeom xmlns:a="http://schemas.openxmlformats.org/drawingml/2006/main" prst="ellipse">
+            <a:avLst/>
+          </a:prstGeom>
+          <a:solidFill xmlns:a="http://schemas.openxmlformats.org/drawingml/2006/main">
+            <a:srgbClr val="FFFFFF">
+              <a:alpha val="35000"/>
+            </a:srgbClr>
+          </a:solidFill>
+          <a:ln xmlns:a="http://schemas.openxmlformats.org/drawingml/2006/main" w="0">
+            <a:noFill/>
+          </a:ln>
+        </p:spPr>
+        <p:style>
+          <a:lnRef xmlns:a="http://schemas.openxmlformats.org/drawingml/2006/main" idx="0"/>
+          <a:fillRef xmlns:a="http://schemas.openxmlformats.org/drawingml/2006/main" idx="0"/>
+          <a:effectRef xmlns:a="http://schemas.openxmlformats.org/drawingml/2006/main" idx="0"/>
+          <a:fontRef xmlns:a="http://schemas.openxmlformats.org/drawingml/2006/main" idx="minor"/>
+        </p:style>
+        <p:txBody>
+          <a:bodyPr xmlns:a="http://schemas.openxmlformats.org/drawingml/2006/main" lIns="13320" tIns="-25920" rIns="13320" bIns="-25920" anchor="t">
+            <a:noAutofit/>
+          </a:bodyPr>
+          <a:lstStyle xmlns:a="http://schemas.openxmlformats.org/drawingml/2006/main"/>
+          <a:p xmlns:a="http://schemas.openxmlformats.org/drawingml/2006/main"/>
+        </p:txBody>
+      </p:sp>
+      <p:sp>
+        <p:nvSpPr>
+          <p:cNvPr id="404" name="Shape 14">
+            <a:extLst xmlns:a="http://schemas.openxmlformats.org/drawingml/2006/main">
+              <a:ext uri="{FF2B5EF4-FFF2-40B4-BE49-F238E27FC236}">
+                <a16:creationId xmlns:a16="http://schemas.microsoft.com/office/drawing/2014/main" id="{749114D4-15C0-4C68-8F3B-A0835F0BE338}"/>
+              </a:ext>
+            </a:extLst>
+          </p:cNvPr>
+          <p:cNvSpPr>
+            <a:spLocks xmlns:a="http://schemas.openxmlformats.org/drawingml/2006/main" noGrp="1"/>
+          </p:cNvSpPr>
+          <p:nvPr/>
+        </p:nvSpPr>
+        <p:spPr>
+          <a:xfrm xmlns:a="http://schemas.openxmlformats.org/drawingml/2006/main">
+            <a:off x="11704320" y="3749040"/>
+            <a:ext cx="26640" cy="26640"/>
+          </a:xfrm>
+          <a:prstGeom xmlns:a="http://schemas.openxmlformats.org/drawingml/2006/main" prst="ellipse">
+            <a:avLst/>
+          </a:prstGeom>
+          <a:solidFill xmlns:a="http://schemas.openxmlformats.org/drawingml/2006/main">
+            <a:srgbClr val="FFFFFF">
+              <a:alpha val="55000"/>
+            </a:srgbClr>
+          </a:solidFill>
+          <a:ln xmlns:a="http://schemas.openxmlformats.org/drawingml/2006/main" w="0">
+            <a:noFill/>
+          </a:ln>
+        </p:spPr>
+        <p:style>
+          <a:lnRef xmlns:a="http://schemas.openxmlformats.org/drawingml/2006/main" idx="0"/>
+          <a:fillRef xmlns:a="http://schemas.openxmlformats.org/drawingml/2006/main" idx="0"/>
+          <a:effectRef xmlns:a="http://schemas.openxmlformats.org/drawingml/2006/main" idx="0"/>
+          <a:fontRef xmlns:a="http://schemas.openxmlformats.org/drawingml/2006/main" idx="minor"/>
+        </p:style>
+        <p:txBody>
+          <a:bodyPr xmlns:a="http://schemas.openxmlformats.org/drawingml/2006/main" lIns="13320" tIns="-25920" rIns="13320" bIns="-25920" anchor="t">
+            <a:noAutofit/>
+          </a:bodyPr>
+          <a:lstStyle xmlns:a="http://schemas.openxmlformats.org/drawingml/2006/main"/>
+          <a:p xmlns:a="http://schemas.openxmlformats.org/drawingml/2006/main"/>
+        </p:txBody>
+      </p:sp>
+      <p:sp>
+        <p:nvSpPr>
+          <p:cNvPr id="405" name="Shape 15">
+            <a:extLst xmlns:a="http://schemas.openxmlformats.org/drawingml/2006/main">
+              <a:ext uri="{FF2B5EF4-FFF2-40B4-BE49-F238E27FC236}">
+                <a16:creationId xmlns:a16="http://schemas.microsoft.com/office/drawing/2014/main" id="{7D6021B1-DB58-4779-8E37-021FD32E2062}"/>
+              </a:ext>
+            </a:extLst>
+          </p:cNvPr>
+          <p:cNvSpPr>
+            <a:spLocks xmlns:a="http://schemas.openxmlformats.org/drawingml/2006/main" noGrp="1"/>
+          </p:cNvSpPr>
+          <p:nvPr/>
+        </p:nvSpPr>
+        <p:spPr>
+          <a:xfrm xmlns:a="http://schemas.openxmlformats.org/drawingml/2006/main">
+            <a:off x="11064240" y="4572000"/>
+            <a:ext cx="45000" cy="45000"/>
+          </a:xfrm>
+          <a:prstGeom xmlns:a="http://schemas.openxmlformats.org/drawingml/2006/main" prst="ellipse">
+            <a:avLst/>
+          </a:prstGeom>
+          <a:solidFill xmlns:a="http://schemas.openxmlformats.org/drawingml/2006/main">
+            <a:srgbClr val="FFFFFF">
+              <a:alpha val="35000"/>
+            </a:srgbClr>
+          </a:solidFill>
+          <a:ln xmlns:a="http://schemas.openxmlformats.org/drawingml/2006/main" w="0">
+            <a:noFill/>
+          </a:ln>
+        </p:spPr>
+        <p:style>
+          <a:lnRef xmlns:a="http://schemas.openxmlformats.org/drawingml/2006/main" idx="0"/>
+          <a:fillRef xmlns:a="http://schemas.openxmlformats.org/drawingml/2006/main" idx="0"/>
+          <a:effectRef xmlns:a="http://schemas.openxmlformats.org/drawingml/2006/main" idx="0"/>
+          <a:fontRef xmlns:a="http://schemas.openxmlformats.org/drawingml/2006/main" idx="minor"/>
+        </p:style>
+        <p:txBody>
+          <a:bodyPr xmlns:a="http://schemas.openxmlformats.org/drawingml/2006/main" lIns="22680" tIns="-12600" rIns="22680" bIns="-12600" anchor="t">
+            <a:noAutofit/>
+          </a:bodyPr>
+          <a:lstStyle xmlns:a="http://schemas.openxmlformats.org/drawingml/2006/main"/>
+          <a:p xmlns:a="http://schemas.openxmlformats.org/drawingml/2006/main"/>
+        </p:txBody>
+      </p:sp>
+      <p:sp>
+        <p:nvSpPr>
+          <p:cNvPr id="406" name="Shape 16">
+            <a:extLst xmlns:a="http://schemas.openxmlformats.org/drawingml/2006/main">
+              <a:ext uri="{FF2B5EF4-FFF2-40B4-BE49-F238E27FC236}">
+                <a16:creationId xmlns:a16="http://schemas.microsoft.com/office/drawing/2014/main" id="{29AC4662-131E-4ABC-9F4B-81BB9126BA60}"/>
+              </a:ext>
+            </a:extLst>
+          </p:cNvPr>
+          <p:cNvSpPr>
+            <a:spLocks xmlns:a="http://schemas.openxmlformats.org/drawingml/2006/main" noGrp="1"/>
+          </p:cNvSpPr>
+          <p:nvPr/>
+        </p:nvSpPr>
+        <p:spPr>
+          <a:xfrm xmlns:a="http://schemas.openxmlformats.org/drawingml/2006/main">
+            <a:off x="11521440" y="5394960"/>
+            <a:ext cx="26640" cy="26640"/>
+          </a:xfrm>
+          <a:prstGeom xmlns:a="http://schemas.openxmlformats.org/drawingml/2006/main" prst="ellipse">
+            <a:avLst/>
+          </a:prstGeom>
+          <a:solidFill xmlns:a="http://schemas.openxmlformats.org/drawingml/2006/main">
+            <a:srgbClr val="FFFFFF">
+              <a:alpha val="55000"/>
+            </a:srgbClr>
+          </a:solidFill>
+          <a:ln xmlns:a="http://schemas.openxmlformats.org/drawingml/2006/main" w="0">
+            <a:noFill/>
+          </a:ln>
+        </p:spPr>
+        <p:style>
+          <a:lnRef xmlns:a="http://schemas.openxmlformats.org/drawingml/2006/main" idx="0"/>
+          <a:fillRef xmlns:a="http://schemas.openxmlformats.org/drawingml/2006/main" idx="0"/>
+          <a:effectRef xmlns:a="http://schemas.openxmlformats.org/drawingml/2006/main" idx="0"/>
+          <a:fontRef xmlns:a="http://schemas.openxmlformats.org/drawingml/2006/main" idx="minor"/>
+        </p:style>
+        <p:txBody>
+          <a:bodyPr xmlns:a="http://schemas.openxmlformats.org/drawingml/2006/main" lIns="13320" tIns="-25920" rIns="13320" bIns="-25920" anchor="t">
+            <a:noAutofit/>
+          </a:bodyPr>
+          <a:lstStyle xmlns:a="http://schemas.openxmlformats.org/drawingml/2006/main"/>
+          <a:p xmlns:a="http://schemas.openxmlformats.org/drawingml/2006/main"/>
+        </p:txBody>
+      </p:sp>
+      <p:sp>
+        <p:nvSpPr>
+          <p:cNvPr id="407" name="Shape 17">
+            <a:extLst xmlns:a="http://schemas.openxmlformats.org/drawingml/2006/main">
+              <a:ext uri="{FF2B5EF4-FFF2-40B4-BE49-F238E27FC236}">
+                <a16:creationId xmlns:a16="http://schemas.microsoft.com/office/drawing/2014/main" id="{4A22F7C8-2691-4C03-9CB6-8CDEDB4C030E}"/>
+              </a:ext>
+            </a:extLst>
+          </p:cNvPr>
+          <p:cNvSpPr>
+            <a:spLocks xmlns:a="http://schemas.openxmlformats.org/drawingml/2006/main" noGrp="1"/>
+          </p:cNvSpPr>
+          <p:nvPr/>
+        </p:nvSpPr>
+        <p:spPr>
+          <a:xfrm xmlns:a="http://schemas.openxmlformats.org/drawingml/2006/main">
+            <a:off x="10607040" y="5943600"/>
+            <a:ext cx="26640" cy="26640"/>
+          </a:xfrm>
+          <a:prstGeom xmlns:a="http://schemas.openxmlformats.org/drawingml/2006/main" prst="ellipse">
+            <a:avLst/>
+          </a:prstGeom>
+          <a:solidFill xmlns:a="http://schemas.openxmlformats.org/drawingml/2006/main">
+            <a:srgbClr val="FFFFFF">
+              <a:alpha val="35000"/>
+            </a:srgbClr>
+          </a:solidFill>
+          <a:ln xmlns:a="http://schemas.openxmlformats.org/drawingml/2006/main" w="0">
+            <a:noFill/>
+          </a:ln>
+        </p:spPr>
+        <p:style>
+          <a:lnRef xmlns:a="http://schemas.openxmlformats.org/drawingml/2006/main" idx="0"/>
+          <a:fillRef xmlns:a="http://schemas.openxmlformats.org/drawingml/2006/main" idx="0"/>
+          <a:effectRef xmlns:a="http://schemas.openxmlformats.org/drawingml/2006/main" idx="0"/>
+          <a:fontRef xmlns:a="http://schemas.openxmlformats.org/drawingml/2006/main" idx="minor"/>
+        </p:style>
+        <p:txBody>
+          <a:bodyPr xmlns:a="http://schemas.openxmlformats.org/drawingml/2006/main" lIns="13320" tIns="-25920" rIns="13320" bIns="-25920" anchor="t">
+            <a:noAutofit/>
+          </a:bodyPr>
+          <a:lstStyle xmlns:a="http://schemas.openxmlformats.org/drawingml/2006/main"/>
+          <a:p xmlns:a="http://schemas.openxmlformats.org/drawingml/2006/main"/>
+        </p:txBody>
+      </p:sp>
+      <p:sp>
+        <p:nvSpPr>
+          <p:cNvPr id="408" name="Shape 18">
+            <a:extLst xmlns:a="http://schemas.openxmlformats.org/drawingml/2006/main">
+              <a:ext uri="{FF2B5EF4-FFF2-40B4-BE49-F238E27FC236}">
+                <a16:creationId xmlns:a16="http://schemas.microsoft.com/office/drawing/2014/main" id="{A2E9BDEF-37F9-4698-94E9-158BA351D153}"/>
+              </a:ext>
+            </a:extLst>
+          </p:cNvPr>
+          <p:cNvSpPr>
+            <a:spLocks xmlns:a="http://schemas.openxmlformats.org/drawingml/2006/main" noGrp="1"/>
+          </p:cNvSpPr>
+          <p:nvPr/>
+        </p:nvSpPr>
+        <p:spPr>
+          <a:xfrm xmlns:a="http://schemas.openxmlformats.org/drawingml/2006/main">
+            <a:off x="9875520" y="457200"/>
+            <a:ext cx="45000" cy="45000"/>
+          </a:xfrm>
+          <a:prstGeom xmlns:a="http://schemas.openxmlformats.org/drawingml/2006/main" prst="ellipse">
+            <a:avLst/>
+          </a:prstGeom>
+          <a:solidFill xmlns:a="http://schemas.openxmlformats.org/drawingml/2006/main">
+            <a:srgbClr val="FFFFFF">
+              <a:alpha val="55000"/>
+            </a:srgbClr>
+          </a:solidFill>
+          <a:ln xmlns:a="http://schemas.openxmlformats.org/drawingml/2006/main" w="0">
+            <a:noFill/>
+          </a:ln>
+        </p:spPr>
+        <p:style>
+          <a:lnRef xmlns:a="http://schemas.openxmlformats.org/drawingml/2006/main" idx="0"/>
+          <a:fillRef xmlns:a="http://schemas.openxmlformats.org/drawingml/2006/main" idx="0"/>
+          <a:effectRef xmlns:a="http://schemas.openxmlformats.org/drawingml/2006/main" idx="0"/>
+          <a:fontRef xmlns:a="http://schemas.openxmlformats.org/drawingml/2006/main" idx="minor"/>
+        </p:style>
+        <p:txBody>
+          <a:bodyPr xmlns:a="http://schemas.openxmlformats.org/drawingml/2006/main" lIns="22680" tIns="-12600" rIns="22680" bIns="-12600" anchor="t">
+            <a:noAutofit/>
+          </a:bodyPr>
+          <a:lstStyle xmlns:a="http://schemas.openxmlformats.org/drawingml/2006/main"/>
+          <a:p xmlns:a="http://schemas.openxmlformats.org/drawingml/2006/main"/>
+        </p:txBody>
+      </p:sp>
+      <p:sp>
+        <p:nvSpPr>
+          <p:cNvPr id="409" name="Shape 19">
+            <a:extLst xmlns:a="http://schemas.openxmlformats.org/drawingml/2006/main">
+              <a:ext uri="{FF2B5EF4-FFF2-40B4-BE49-F238E27FC236}">
+                <a16:creationId xmlns:a16="http://schemas.microsoft.com/office/drawing/2014/main" id="{5BF83A0D-27F0-46C2-B1DF-FCDDCC4738EC}"/>
+              </a:ext>
+            </a:extLst>
+          </p:cNvPr>
+          <p:cNvSpPr>
+            <a:spLocks xmlns:a="http://schemas.openxmlformats.org/drawingml/2006/main" noGrp="1"/>
+          </p:cNvSpPr>
+          <p:nvPr/>
+        </p:nvSpPr>
+        <p:spPr>
+          <a:xfrm xmlns:a="http://schemas.openxmlformats.org/drawingml/2006/main">
+            <a:off x="9052560" y="731520"/>
+            <a:ext cx="26640" cy="26640"/>
+          </a:xfrm>
+          <a:prstGeom xmlns:a="http://schemas.openxmlformats.org/drawingml/2006/main" prst="ellipse">
+            <a:avLst/>
+          </a:prstGeom>
+          <a:solidFill xmlns:a="http://schemas.openxmlformats.org/drawingml/2006/main">
+            <a:srgbClr val="FFFFFF">
+              <a:alpha val="35000"/>
+            </a:srgbClr>
+          </a:solidFill>
+          <a:ln xmlns:a="http://schemas.openxmlformats.org/drawingml/2006/main" w="0">
+            <a:noFill/>
+          </a:ln>
+        </p:spPr>
+        <p:style>
+          <a:lnRef xmlns:a="http://schemas.openxmlformats.org/drawingml/2006/main" idx="0"/>
+          <a:fillRef xmlns:a="http://schemas.openxmlformats.org/drawingml/2006/main" idx="0"/>
+          <a:effectRef xmlns:a="http://schemas.openxmlformats.org/drawingml/2006/main" idx="0"/>
+          <a:fontRef xmlns:a="http://schemas.openxmlformats.org/drawingml/2006/main" idx="minor"/>
+        </p:style>
+        <p:txBody>
+          <a:bodyPr xmlns:a="http://schemas.openxmlformats.org/drawingml/2006/main" lIns="13320" tIns="-25920" rIns="13320" bIns="-25920" anchor="t">
+            <a:noAutofit/>
+          </a:bodyPr>
+          <a:lstStyle xmlns:a="http://schemas.openxmlformats.org/drawingml/2006/main"/>
+          <a:p xmlns:a="http://schemas.openxmlformats.org/drawingml/2006/main"/>
+        </p:txBody>
+      </p:sp>
+      <p:sp>
+        <p:nvSpPr>
+          <p:cNvPr id="410" name="Shape 20">
+            <a:extLst xmlns:a="http://schemas.openxmlformats.org/drawingml/2006/main">
+              <a:ext uri="{FF2B5EF4-FFF2-40B4-BE49-F238E27FC236}">
+                <a16:creationId xmlns:a16="http://schemas.microsoft.com/office/drawing/2014/main" id="{66C77E29-F312-4F2E-BA4D-1B5C992C2769}"/>
+              </a:ext>
+            </a:extLst>
+          </p:cNvPr>
+          <p:cNvSpPr>
+            <a:spLocks xmlns:a="http://schemas.openxmlformats.org/drawingml/2006/main" noGrp="1"/>
+          </p:cNvSpPr>
+          <p:nvPr/>
+        </p:nvSpPr>
+        <p:spPr>
+          <a:xfrm xmlns:a="http://schemas.openxmlformats.org/drawingml/2006/main">
+            <a:off x="6126480" y="365760"/>
+            <a:ext cx="26640" cy="26640"/>
+          </a:xfrm>
+          <a:prstGeom xmlns:a="http://schemas.openxmlformats.org/drawingml/2006/main" prst="ellipse">
+            <a:avLst/>
+          </a:prstGeom>
+          <a:solidFill xmlns:a="http://schemas.openxmlformats.org/drawingml/2006/main">
+            <a:srgbClr val="FFFFFF">
+              <a:alpha val="55000"/>
+            </a:srgbClr>
+          </a:solidFill>
+          <a:ln xmlns:a="http://schemas.openxmlformats.org/drawingml/2006/main" w="0">
+            <a:noFill/>
+          </a:ln>
+        </p:spPr>
+        <p:style>
+          <a:lnRef xmlns:a="http://schemas.openxmlformats.org/drawingml/2006/main" idx="0"/>
+          <a:fillRef xmlns:a="http://schemas.openxmlformats.org/drawingml/2006/main" idx="0"/>
+          <a:effectRef xmlns:a="http://schemas.openxmlformats.org/drawingml/2006/main" idx="0"/>
+          <a:fontRef xmlns:a="http://schemas.openxmlformats.org/drawingml/2006/main" idx="minor"/>
+        </p:style>
+        <p:txBody>
+          <a:bodyPr xmlns:a="http://schemas.openxmlformats.org/drawingml/2006/main" lIns="13320" tIns="-25920" rIns="13320" bIns="-25920" anchor="t">
+            <a:noAutofit/>
+          </a:bodyPr>
+          <a:lstStyle xmlns:a="http://schemas.openxmlformats.org/drawingml/2006/main"/>
+          <a:p xmlns:a="http://schemas.openxmlformats.org/drawingml/2006/main"/>
+        </p:txBody>
+      </p:sp>
+      <p:sp>
+        <p:nvSpPr>
+          <p:cNvPr id="411" name="Shape 21">
+            <a:extLst xmlns:a="http://schemas.openxmlformats.org/drawingml/2006/main">
+              <a:ext uri="{FF2B5EF4-FFF2-40B4-BE49-F238E27FC236}">
+                <a16:creationId xmlns:a16="http://schemas.microsoft.com/office/drawing/2014/main" id="{4F8D3981-4C68-4C2C-BE24-7263DA1EC162}"/>
+              </a:ext>
+            </a:extLst>
+          </p:cNvPr>
+          <p:cNvSpPr>
+            <a:spLocks xmlns:a="http://schemas.openxmlformats.org/drawingml/2006/main" noGrp="1"/>
+          </p:cNvSpPr>
+          <p:nvPr/>
+        </p:nvSpPr>
+        <p:spPr>
+          <a:xfrm xmlns:a="http://schemas.openxmlformats.org/drawingml/2006/main">
+            <a:off x="4206240" y="548640"/>
+            <a:ext cx="45000" cy="45000"/>
+          </a:xfrm>
+          <a:prstGeom xmlns:a="http://schemas.openxmlformats.org/drawingml/2006/main" prst="ellipse">
+            <a:avLst/>
+          </a:prstGeom>
+          <a:solidFill xmlns:a="http://schemas.openxmlformats.org/drawingml/2006/main">
+            <a:srgbClr val="FFFFFF">
+              <a:alpha val="35000"/>
+            </a:srgbClr>
+          </a:solidFill>
+          <a:ln xmlns:a="http://schemas.openxmlformats.org/drawingml/2006/main" w="0">
+            <a:noFill/>
+          </a:ln>
+        </p:spPr>
+        <p:style>
+          <a:lnRef xmlns:a="http://schemas.openxmlformats.org/drawingml/2006/main" idx="0"/>
+          <a:fillRef xmlns:a="http://schemas.openxmlformats.org/drawingml/2006/main" idx="0"/>
+          <a:effectRef xmlns:a="http://schemas.openxmlformats.org/drawingml/2006/main" idx="0"/>
+          <a:fontRef xmlns:a="http://schemas.openxmlformats.org/drawingml/2006/main" idx="minor"/>
+        </p:style>
+        <p:txBody>
+          <a:bodyPr xmlns:a="http://schemas.openxmlformats.org/drawingml/2006/main" lIns="22680" tIns="-12600" rIns="22680" bIns="-12600" anchor="t">
+            <a:noAutofit/>
+          </a:bodyPr>
+          <a:lstStyle xmlns:a="http://schemas.openxmlformats.org/drawingml/2006/main"/>
+          <a:p xmlns:a="http://schemas.openxmlformats.org/drawingml/2006/main"/>
+        </p:txBody>
+      </p:sp>
+      <p:sp>
+        <p:nvSpPr>
+          <p:cNvPr id="412" name="Shape 22">
+            <a:extLst xmlns:a="http://schemas.openxmlformats.org/drawingml/2006/main">
+              <a:ext uri="{FF2B5EF4-FFF2-40B4-BE49-F238E27FC236}">
+                <a16:creationId xmlns:a16="http://schemas.microsoft.com/office/drawing/2014/main" id="{2FA917AD-58D6-4687-9BA9-21F7DC5660B0}"/>
+              </a:ext>
+            </a:extLst>
+          </p:cNvPr>
+          <p:cNvSpPr>
+            <a:spLocks xmlns:a="http://schemas.openxmlformats.org/drawingml/2006/main" noGrp="1"/>
+          </p:cNvSpPr>
+          <p:nvPr/>
+        </p:nvSpPr>
+        <p:spPr>
+          <a:xfrm xmlns:a="http://schemas.openxmlformats.org/drawingml/2006/main">
+            <a:off x="7406640" y="640080"/>
+            <a:ext cx="26640" cy="26640"/>
+          </a:xfrm>
+          <a:prstGeom xmlns:a="http://schemas.openxmlformats.org/drawingml/2006/main" prst="ellipse">
+            <a:avLst/>
+          </a:prstGeom>
+          <a:solidFill xmlns:a="http://schemas.openxmlformats.org/drawingml/2006/main">
+            <a:srgbClr val="FFFFFF">
+              <a:alpha val="55000"/>
+            </a:srgbClr>
+          </a:solidFill>
+          <a:ln xmlns:a="http://schemas.openxmlformats.org/drawingml/2006/main" w="0">
+            <a:noFill/>
+          </a:ln>
+        </p:spPr>
+        <p:style>
+          <a:lnRef xmlns:a="http://schemas.openxmlformats.org/drawingml/2006/main" idx="0"/>
+          <a:fillRef xmlns:a="http://schemas.openxmlformats.org/drawingml/2006/main" idx="0"/>
+          <a:effectRef xmlns:a="http://schemas.openxmlformats.org/drawingml/2006/main" idx="0"/>
+          <a:fontRef xmlns:a="http://schemas.openxmlformats.org/drawingml/2006/main" idx="minor"/>
+        </p:style>
+        <p:txBody>
+          <a:bodyPr xmlns:a="http://schemas.openxmlformats.org/drawingml/2006/main" lIns="13320" tIns="-25920" rIns="13320" bIns="-25920" anchor="t">
+            <a:noAutofit/>
+          </a:bodyPr>
+          <a:lstStyle xmlns:a="http://schemas.openxmlformats.org/drawingml/2006/main"/>
+          <a:p xmlns:a="http://schemas.openxmlformats.org/drawingml/2006/main"/>
+        </p:txBody>
+      </p:sp>
+      <p:sp>
+        <p:nvSpPr>
+          <p:cNvPr id="413" name="Shape 23">
+            <a:extLst xmlns:a="http://schemas.openxmlformats.org/drawingml/2006/main">
+              <a:ext uri="{FF2B5EF4-FFF2-40B4-BE49-F238E27FC236}">
+                <a16:creationId xmlns:a16="http://schemas.microsoft.com/office/drawing/2014/main" id="{9F2BE04A-96DB-4DAF-8594-EE0425A3B091}"/>
+              </a:ext>
+            </a:extLst>
+          </p:cNvPr>
+          <p:cNvSpPr>
+            <a:spLocks xmlns:a="http://schemas.openxmlformats.org/drawingml/2006/main" noGrp="1"/>
+          </p:cNvSpPr>
+          <p:nvPr/>
+        </p:nvSpPr>
+        <p:spPr>
+          <a:xfrm xmlns:a="http://schemas.openxmlformats.org/drawingml/2006/main">
+            <a:off x="3566160" y="6126480"/>
+            <a:ext cx="26640" cy="26640"/>
+          </a:xfrm>
+          <a:prstGeom xmlns:a="http://schemas.openxmlformats.org/drawingml/2006/main" prst="ellipse">
+            <a:avLst/>
+          </a:prstGeom>
+          <a:solidFill xmlns:a="http://schemas.openxmlformats.org/drawingml/2006/main">
+            <a:srgbClr val="FFFFFF">
+              <a:alpha val="35000"/>
+            </a:srgbClr>
+          </a:solidFill>
+          <a:ln xmlns:a="http://schemas.openxmlformats.org/drawingml/2006/main" w="0">
+            <a:noFill/>
+          </a:ln>
+        </p:spPr>
+        <p:style>
+          <a:lnRef xmlns:a="http://schemas.openxmlformats.org/drawingml/2006/main" idx="0"/>
+          <a:fillRef xmlns:a="http://schemas.openxmlformats.org/drawingml/2006/main" idx="0"/>
+          <a:effectRef xmlns:a="http://schemas.openxmlformats.org/drawingml/2006/main" idx="0"/>
+          <a:fontRef xmlns:a="http://schemas.openxmlformats.org/drawingml/2006/main" idx="minor"/>
+        </p:style>
+        <p:txBody>
+          <a:bodyPr xmlns:a="http://schemas.openxmlformats.org/drawingml/2006/main" lIns="13320" tIns="-25920" rIns="13320" bIns="-25920" anchor="t">
+            <a:noAutofit/>
+          </a:bodyPr>
+          <a:lstStyle xmlns:a="http://schemas.openxmlformats.org/drawingml/2006/main"/>
+          <a:p xmlns:a="http://schemas.openxmlformats.org/drawingml/2006/main"/>
+        </p:txBody>
+      </p:sp>
+      <p:sp>
+        <p:nvSpPr>
+          <p:cNvPr id="414" name="Shape 24">
+            <a:extLst xmlns:a="http://schemas.openxmlformats.org/drawingml/2006/main">
+              <a:ext uri="{FF2B5EF4-FFF2-40B4-BE49-F238E27FC236}">
+                <a16:creationId xmlns:a16="http://schemas.microsoft.com/office/drawing/2014/main" id="{59F7FFA8-2B65-441E-972F-FABB0044076D}"/>
+              </a:ext>
+            </a:extLst>
+          </p:cNvPr>
+          <p:cNvSpPr>
+            <a:spLocks xmlns:a="http://schemas.openxmlformats.org/drawingml/2006/main" noGrp="1"/>
+          </p:cNvSpPr>
+          <p:nvPr/>
+        </p:nvSpPr>
+        <p:spPr>
+          <a:xfrm xmlns:a="http://schemas.openxmlformats.org/drawingml/2006/main">
+            <a:off x="5120640" y="6217920"/>
+            <a:ext cx="45000" cy="45000"/>
+          </a:xfrm>
+          <a:prstGeom xmlns:a="http://schemas.openxmlformats.org/drawingml/2006/main" prst="ellipse">
+            <a:avLst/>
+          </a:prstGeom>
+          <a:solidFill xmlns:a="http://schemas.openxmlformats.org/drawingml/2006/main">
+            <a:srgbClr val="FFFFFF">
+              <a:alpha val="55000"/>
+            </a:srgbClr>
+          </a:solidFill>
+          <a:ln xmlns:a="http://schemas.openxmlformats.org/drawingml/2006/main" w="0">
+            <a:noFill/>
+          </a:ln>
+        </p:spPr>
+        <p:style>
+          <a:lnRef xmlns:a="http://schemas.openxmlformats.org/drawingml/2006/main" idx="0"/>
+          <a:fillRef xmlns:a="http://schemas.openxmlformats.org/drawingml/2006/main" idx="0"/>
+          <a:effectRef xmlns:a="http://schemas.openxmlformats.org/drawingml/2006/main" idx="0"/>
+          <a:fontRef xmlns:a="http://schemas.openxmlformats.org/drawingml/2006/main" idx="minor"/>
+        </p:style>
+        <p:txBody>
+          <a:bodyPr xmlns:a="http://schemas.openxmlformats.org/drawingml/2006/main" lIns="22680" tIns="-12600" rIns="22680" bIns="-12600" anchor="t">
+            <a:noAutofit/>
+          </a:bodyPr>
+          <a:lstStyle xmlns:a="http://schemas.openxmlformats.org/drawingml/2006/main"/>
+          <a:p xmlns:a="http://schemas.openxmlformats.org/drawingml/2006/main"/>
+        </p:txBody>
+      </p:sp>
+      <p:sp>
+        <p:nvSpPr>
+          <p:cNvPr id="415" name="Shape 25">
+            <a:extLst xmlns:a="http://schemas.openxmlformats.org/drawingml/2006/main">
+              <a:ext uri="{FF2B5EF4-FFF2-40B4-BE49-F238E27FC236}">
+                <a16:creationId xmlns:a16="http://schemas.microsoft.com/office/drawing/2014/main" id="{E1F3D0F3-7737-462F-93CC-E98425C6A371}"/>
+              </a:ext>
+            </a:extLst>
+          </p:cNvPr>
+          <p:cNvSpPr>
+            <a:spLocks xmlns:a="http://schemas.openxmlformats.org/drawingml/2006/main" noGrp="1"/>
+          </p:cNvSpPr>
+          <p:nvPr/>
+        </p:nvSpPr>
+        <p:spPr>
+          <a:xfrm xmlns:a="http://schemas.openxmlformats.org/drawingml/2006/main">
+            <a:off x="6675120" y="6035040"/>
+            <a:ext cx="26640" cy="26640"/>
+          </a:xfrm>
+          <a:prstGeom xmlns:a="http://schemas.openxmlformats.org/drawingml/2006/main" prst="ellipse">
+            <a:avLst/>
+          </a:prstGeom>
+          <a:solidFill xmlns:a="http://schemas.openxmlformats.org/drawingml/2006/main">
+            <a:srgbClr val="FFFFFF">
+              <a:alpha val="35000"/>
+            </a:srgbClr>
+          </a:solidFill>
+          <a:ln xmlns:a="http://schemas.openxmlformats.org/drawingml/2006/main" w="0">
+            <a:noFill/>
+          </a:ln>
+        </p:spPr>
+        <p:style>
+          <a:lnRef xmlns:a="http://schemas.openxmlformats.org/drawingml/2006/main" idx="0"/>
+          <a:fillRef xmlns:a="http://schemas.openxmlformats.org/drawingml/2006/main" idx="0"/>
+          <a:effectRef xmlns:a="http://schemas.openxmlformats.org/drawingml/2006/main" idx="0"/>
+          <a:fontRef xmlns:a="http://schemas.openxmlformats.org/drawingml/2006/main" idx="minor"/>
+        </p:style>
+        <p:txBody>
+          <a:bodyPr xmlns:a="http://schemas.openxmlformats.org/drawingml/2006/main" lIns="13320" tIns="-25920" rIns="13320" bIns="-25920" anchor="t">
+            <a:noAutofit/>
+          </a:bodyPr>
+          <a:lstStyle xmlns:a="http://schemas.openxmlformats.org/drawingml/2006/main"/>
+          <a:p xmlns:a="http://schemas.openxmlformats.org/drawingml/2006/main"/>
+        </p:txBody>
+      </p:sp>
+      <p:sp>
+        <p:nvSpPr>
+          <p:cNvPr id="416" name="Shape 26">
+            <a:extLst xmlns:a="http://schemas.openxmlformats.org/drawingml/2006/main">
+              <a:ext uri="{FF2B5EF4-FFF2-40B4-BE49-F238E27FC236}">
+                <a16:creationId xmlns:a16="http://schemas.microsoft.com/office/drawing/2014/main" id="{CB4AC790-0968-482C-B592-C01A8F5327D9}"/>
+              </a:ext>
+            </a:extLst>
+          </p:cNvPr>
+          <p:cNvSpPr>
+            <a:spLocks xmlns:a="http://schemas.openxmlformats.org/drawingml/2006/main" noGrp="1"/>
+          </p:cNvSpPr>
+          <p:nvPr/>
+        </p:nvSpPr>
+        <p:spPr>
+          <a:xfrm xmlns:a="http://schemas.openxmlformats.org/drawingml/2006/main">
+            <a:off x="8321040" y="6126480"/>
+            <a:ext cx="26640" cy="26640"/>
+          </a:xfrm>
+          <a:prstGeom xmlns:a="http://schemas.openxmlformats.org/drawingml/2006/main" prst="ellipse">
+            <a:avLst/>
+          </a:prstGeom>
+          <a:solidFill xmlns:a="http://schemas.openxmlformats.org/drawingml/2006/main">
+            <a:srgbClr val="FFFFFF">
+              <a:alpha val="55000"/>
+            </a:srgbClr>
+          </a:solidFill>
+          <a:ln xmlns:a="http://schemas.openxmlformats.org/drawingml/2006/main" w="0">
+            <a:noFill/>
+          </a:ln>
+        </p:spPr>
+        <p:style>
+          <a:lnRef xmlns:a="http://schemas.openxmlformats.org/drawingml/2006/main" idx="0"/>
+          <a:fillRef xmlns:a="http://schemas.openxmlformats.org/drawingml/2006/main" idx="0"/>
+          <a:effectRef xmlns:a="http://schemas.openxmlformats.org/drawingml/2006/main" idx="0"/>
+          <a:fontRef xmlns:a="http://schemas.openxmlformats.org/drawingml/2006/main" idx="minor"/>
+        </p:style>
+        <p:txBody>
+          <a:bodyPr xmlns:a="http://schemas.openxmlformats.org/drawingml/2006/main" lIns="13320" tIns="-25920" rIns="13320" bIns="-25920" anchor="t">
+            <a:noAutofit/>
+          </a:bodyPr>
+          <a:lstStyle xmlns:a="http://schemas.openxmlformats.org/drawingml/2006/main"/>
+          <a:p xmlns:a="http://schemas.openxmlformats.org/drawingml/2006/main"/>
+        </p:txBody>
+      </p:sp>
+      <p:sp>
+        <p:nvSpPr>
+          <p:cNvPr id="417" name="Shape 27">
+            <a:extLst xmlns:a="http://schemas.openxmlformats.org/drawingml/2006/main">
+              <a:ext uri="{FF2B5EF4-FFF2-40B4-BE49-F238E27FC236}">
+                <a16:creationId xmlns:a16="http://schemas.microsoft.com/office/drawing/2014/main" id="{56B22B23-B8FC-43D0-B156-4C91274FE65F}"/>
+              </a:ext>
+            </a:extLst>
+          </p:cNvPr>
+          <p:cNvSpPr>
+            <a:spLocks xmlns:a="http://schemas.openxmlformats.org/drawingml/2006/main" noGrp="1"/>
+          </p:cNvSpPr>
+          <p:nvPr/>
+        </p:nvSpPr>
+        <p:spPr>
+          <a:xfrm xmlns:a="http://schemas.openxmlformats.org/drawingml/2006/main">
+            <a:off x="9692640" y="5943600"/>
+            <a:ext cx="45000" cy="45000"/>
+          </a:xfrm>
+          <a:prstGeom xmlns:a="http://schemas.openxmlformats.org/drawingml/2006/main" prst="ellipse">
+            <a:avLst/>
+          </a:prstGeom>
+          <a:solidFill xmlns:a="http://schemas.openxmlformats.org/drawingml/2006/main">
+            <a:srgbClr val="FFFFFF">
+              <a:alpha val="35000"/>
+            </a:srgbClr>
+          </a:solidFill>
+          <a:ln xmlns:a="http://schemas.openxmlformats.org/drawingml/2006/main" w="0">
+            <a:noFill/>
+          </a:ln>
+        </p:spPr>
+        <p:style>
+          <a:lnRef xmlns:a="http://schemas.openxmlformats.org/drawingml/2006/main" idx="0"/>
+          <a:fillRef xmlns:a="http://schemas.openxmlformats.org/drawingml/2006/main" idx="0"/>
+          <a:effectRef xmlns:a="http://schemas.openxmlformats.org/drawingml/2006/main" idx="0"/>
+          <a:fontRef xmlns:a="http://schemas.openxmlformats.org/drawingml/2006/main" idx="minor"/>
+        </p:style>
+        <p:txBody>
+          <a:bodyPr xmlns:a="http://schemas.openxmlformats.org/drawingml/2006/main" lIns="22680" tIns="-12600" rIns="22680" bIns="-12600" anchor="t">
+            <a:noAutofit/>
+          </a:bodyPr>
+          <a:lstStyle xmlns:a="http://schemas.openxmlformats.org/drawingml/2006/main"/>
+          <a:p xmlns:a="http://schemas.openxmlformats.org/drawingml/2006/main"/>
+        </p:txBody>
+      </p:sp>
+      <p:sp>
+        <p:nvSpPr>
+          <p:cNvPr id="418" name="Text 28">
+            <a:extLst xmlns:a="http://schemas.openxmlformats.org/drawingml/2006/main">
+              <a:ext uri="{FF2B5EF4-FFF2-40B4-BE49-F238E27FC236}">
+                <a16:creationId xmlns:a16="http://schemas.microsoft.com/office/drawing/2014/main" id="{2354D53E-2939-493D-8E79-C6C43324AFDD}"/>
+              </a:ext>
+            </a:extLst>
+          </p:cNvPr>
+          <p:cNvSpPr>
+            <a:spLocks xmlns:a="http://schemas.openxmlformats.org/drawingml/2006/main" noGrp="1"/>
+          </p:cNvSpPr>
+          <p:nvPr/>
+        </p:nvSpPr>
+        <p:spPr>
+          <a:xfrm xmlns:a="http://schemas.openxmlformats.org/drawingml/2006/main">
+            <a:off x="640080" y="457200"/>
+            <a:ext cx="8228880" cy="319320"/>
+          </a:xfrm>
+          <a:prstGeom xmlns:a="http://schemas.openxmlformats.org/drawingml/2006/main" prst="rect">
+            <a:avLst/>
+          </a:prstGeom>
+          <a:noFill xmlns:a="http://schemas.openxmlformats.org/drawingml/2006/main"/>
+          <a:ln xmlns:a="http://schemas.openxmlformats.org/drawingml/2006/main" w="0">
+            <a:noFill/>
+          </a:ln>
+        </p:spPr>
+        <p:style>
+          <a:lnRef xmlns:a="http://schemas.openxmlformats.org/drawingml/2006/main" idx="0"/>
+          <a:fillRef xmlns:a="http://schemas.openxmlformats.org/drawingml/2006/main" idx="0"/>
+          <a:effectRef xmlns:a="http://schemas.openxmlformats.org/drawingml/2006/main" idx="0"/>
+          <a:fontRef xmlns:a="http://schemas.openxmlformats.org/drawingml/2006/main" idx="minor"/>
+        </p:style>
+        <p:txBody>
+          <a:bodyPr xmlns:a="http://schemas.openxmlformats.org/drawingml/2006/main" lIns="0" tIns="0" rIns="0" bIns="0" anchor="ctr">
+            <a:noAutofit/>
+          </a:bodyPr>
+          <a:lstStyle xmlns:a="http://schemas.openxmlformats.org/drawingml/2006/main"/>
+          <a:p xmlns:a="http://schemas.openxmlformats.org/drawingml/2006/main">
+            <a:pPr>
+              <a:lnSpc>
+                <a:spcPct val="100000"/>
+              </a:lnSpc>
+              <a:buNone/>
+            </a:pPr>
+            <a:r>
+              <a:rPr sz="1300" b="1" u="none">
+                <a:solidFill>
+                  <a:srgbClr val="F2A93B"/>
+                </a:solidFill>
+                <a:latin typeface="Calibri"/>
+                <a:ea typeface="Calibri"/>
+                <a:cs typeface="Calibri"/>
+              </a:rPr>
+              <a:t>TERRAIN VALIDITY</a:t>
+            </a:r>
+          </a:p>
+        </p:txBody>
+      </p:sp>
+      <p:sp>
+        <p:nvSpPr>
+          <p:cNvPr id="419" name="Text 29">
+            <a:extLst xmlns:a="http://schemas.openxmlformats.org/drawingml/2006/main">
+              <a:ext uri="{FF2B5EF4-FFF2-40B4-BE49-F238E27FC236}">
+                <a16:creationId xmlns:a16="http://schemas.microsoft.com/office/drawing/2014/main" id="{3E3BF542-CB4C-4F09-945C-934331A16328}"/>
+              </a:ext>
+            </a:extLst>
+          </p:cNvPr>
+          <p:cNvSpPr>
+            <a:spLocks xmlns:a="http://schemas.openxmlformats.org/drawingml/2006/main" noGrp="1"/>
+          </p:cNvSpPr>
+          <p:nvPr/>
+        </p:nvSpPr>
+        <p:spPr>
+          <a:xfrm xmlns:a="http://schemas.openxmlformats.org/drawingml/2006/main">
+            <a:off x="640080" y="868680"/>
+            <a:ext cx="10972080" cy="639360"/>
+          </a:xfrm>
+          <a:prstGeom xmlns:a="http://schemas.openxmlformats.org/drawingml/2006/main" prst="rect">
+            <a:avLst/>
+          </a:prstGeom>
+          <a:noFill xmlns:a="http://schemas.openxmlformats.org/drawingml/2006/main"/>
+          <a:ln xmlns:a="http://schemas.openxmlformats.org/drawingml/2006/main" w="0">
+            <a:noFill/>
+          </a:ln>
+        </p:spPr>
+        <p:style>
+          <a:lnRef xmlns:a="http://schemas.openxmlformats.org/drawingml/2006/main" idx="0"/>
+          <a:fillRef xmlns:a="http://schemas.openxmlformats.org/drawingml/2006/main" idx="0"/>
+          <a:effectRef xmlns:a="http://schemas.openxmlformats.org/drawingml/2006/main" idx="0"/>
+          <a:fontRef xmlns:a="http://schemas.openxmlformats.org/drawingml/2006/main" idx="minor"/>
+        </p:style>
+        <p:txBody>
+          <a:bodyPr xmlns:a="http://schemas.openxmlformats.org/drawingml/2006/main" lIns="0" tIns="0" rIns="0" bIns="0" anchor="ctr">
+            <a:noAutofit/>
+          </a:bodyPr>
+          <a:lstStyle xmlns:a="http://schemas.openxmlformats.org/drawingml/2006/main"/>
+          <a:p xmlns:a="http://schemas.openxmlformats.org/drawingml/2006/main">
+            <a:pPr>
+              <a:lnSpc>
+                <a:spcPct val="100000"/>
+              </a:lnSpc>
+              <a:buNone/>
+            </a:pPr>
+            <a:r>
+              <a:rPr sz="3000" b="1" u="none">
+                <a:solidFill>
+                  <a:srgbClr val="EAF0FF"/>
+                </a:solidFill>
+                <a:latin typeface="Cambria"/>
+                <a:ea typeface="Cambria"/>
+                <a:cs typeface="Cambria"/>
+              </a:rPr>
+              <a:t>Mapped mare-proxy TiO₂ remains descriptive and unstable</a:t>
+            </a:r>
+          </a:p>
+        </p:txBody>
+      </p:sp>
+      <p:sp>
+        <p:nvSpPr>
+          <p:cNvPr id="420" name="Shape 30">
+            <a:extLst xmlns:a="http://schemas.openxmlformats.org/drawingml/2006/main">
+              <a:ext uri="{FF2B5EF4-FFF2-40B4-BE49-F238E27FC236}">
+                <a16:creationId xmlns:a16="http://schemas.microsoft.com/office/drawing/2014/main" id="{BD3A7C08-E369-462D-A29B-C666B336C09E}"/>
+              </a:ext>
+            </a:extLst>
+          </p:cNvPr>
+          <p:cNvSpPr>
+            <a:spLocks xmlns:a="http://schemas.openxmlformats.org/drawingml/2006/main" noGrp="1"/>
+          </p:cNvSpPr>
+          <p:nvPr/>
+        </p:nvSpPr>
+        <p:spPr>
+          <a:xfrm xmlns:a="http://schemas.openxmlformats.org/drawingml/2006/main">
+            <a:off x="640080" y="1874520"/>
+            <a:ext cx="4708440" cy="2742480"/>
+          </a:xfrm>
+          <a:prstGeom xmlns:a="http://schemas.openxmlformats.org/drawingml/2006/main" prst="roundRect">
+            <a:avLst>
+              <a:gd name="adj" fmla="val 3333"/>
+            </a:avLst>
+          </a:prstGeom>
+          <a:solidFill xmlns:a="http://schemas.openxmlformats.org/drawingml/2006/main">
+            <a:srgbClr val="18213F"/>
+          </a:solidFill>
+          <a:ln xmlns:a="http://schemas.openxmlformats.org/drawingml/2006/main" w="12700">
+            <a:solidFill>
+              <a:srgbClr val="F2A93B"/>
+            </a:solidFill>
+          </a:ln>
+          <a:effectLst xmlns:a="http://schemas.openxmlformats.org/drawingml/2006/main">
+            <a:outerShdw blurRad="101520" dist="38160" dir="5400000" sx="100000" sy="100000" kx="0" ky="0" algn="bl" rotWithShape="0">
+              <a:srgbClr val="000000">
+                <a:alpha val="35000"/>
+              </a:srgbClr>
+            </a:outerShdw>
+          </a:effectLst>
+        </p:spPr>
+        <p:style>
+          <a:lnRef xmlns:a="http://schemas.openxmlformats.org/drawingml/2006/main" idx="0"/>
+          <a:fillRef xmlns:a="http://schemas.openxmlformats.org/drawingml/2006/main" idx="0"/>
+          <a:effectRef xmlns:a="http://schemas.openxmlformats.org/drawingml/2006/main" idx="0"/>
+          <a:fontRef xmlns:a="http://schemas.openxmlformats.org/drawingml/2006/main" idx="minor"/>
+        </p:style>
+        <p:txBody>
+          <a:bodyPr xmlns:a="http://schemas.openxmlformats.org/drawingml/2006/main" lIns="90000" tIns="45000" rIns="90000" bIns="45000" anchor="t">
+            <a:noAutofit/>
+          </a:bodyPr>
+          <a:lstStyle xmlns:a="http://schemas.openxmlformats.org/drawingml/2006/main"/>
+          <a:p xmlns:a="http://schemas.openxmlformats.org/drawingml/2006/main"/>
+        </p:txBody>
+      </p:sp>
+      <p:sp>
+        <p:nvSpPr>
+          <p:cNvPr id="421" name="Text 31">
+            <a:extLst xmlns:a="http://schemas.openxmlformats.org/drawingml/2006/main">
+              <a:ext uri="{FF2B5EF4-FFF2-40B4-BE49-F238E27FC236}">
+                <a16:creationId xmlns:a16="http://schemas.microsoft.com/office/drawing/2014/main" id="{2CB8E240-CAA4-4B89-A295-30E5C7318F63}"/>
+              </a:ext>
+            </a:extLst>
+          </p:cNvPr>
+          <p:cNvSpPr>
+            <a:spLocks xmlns:a="http://schemas.openxmlformats.org/drawingml/2006/main" noGrp="1"/>
+          </p:cNvSpPr>
+          <p:nvPr/>
+        </p:nvSpPr>
+        <p:spPr>
+          <a:xfrm xmlns:a="http://schemas.openxmlformats.org/drawingml/2006/main">
+            <a:off x="914400" y="2148840"/>
+            <a:ext cx="4159800" cy="365040"/>
+          </a:xfrm>
+          <a:prstGeom xmlns:a="http://schemas.openxmlformats.org/drawingml/2006/main" prst="rect">
+            <a:avLst/>
+          </a:prstGeom>
+          <a:noFill xmlns:a="http://schemas.openxmlformats.org/drawingml/2006/main"/>
+          <a:ln xmlns:a="http://schemas.openxmlformats.org/drawingml/2006/main" w="0">
+            <a:noFill/>
+          </a:ln>
+        </p:spPr>
+        <p:style>
+          <a:lnRef xmlns:a="http://schemas.openxmlformats.org/drawingml/2006/main" idx="0"/>
+          <a:fillRef xmlns:a="http://schemas.openxmlformats.org/drawingml/2006/main" idx="0"/>
+          <a:effectRef xmlns:a="http://schemas.openxmlformats.org/drawingml/2006/main" idx="0"/>
+          <a:fontRef xmlns:a="http://schemas.openxmlformats.org/drawingml/2006/main" idx="minor"/>
+        </p:style>
+        <p:txBody>
+          <a:bodyPr xmlns:a="http://schemas.openxmlformats.org/drawingml/2006/main" lIns="0" tIns="0" rIns="0" bIns="0" anchor="ctr">
+            <a:noAutofit/>
+          </a:bodyPr>
+          <a:lstStyle xmlns:a="http://schemas.openxmlformats.org/drawingml/2006/main"/>
+          <a:p xmlns:a="http://schemas.openxmlformats.org/drawingml/2006/main">
+            <a:pPr>
+              <a:lnSpc>
+                <a:spcPct val="100000"/>
+              </a:lnSpc>
+              <a:buNone/>
+            </a:pPr>
+            <a:r>
+              <a:rPr sz="1400" b="1" u="none">
+                <a:solidFill>
+                  <a:srgbClr val="F2A93B"/>
+                </a:solidFill>
+                <a:latin typeface="Calibri"/>
+                <a:ea typeface="Calibri"/>
+                <a:cs typeface="Calibri"/>
+              </a:rPr>
+              <a:t>Mapped mare-proxy binary</a:t>
+            </a:r>
+          </a:p>
+        </p:txBody>
+      </p:sp>
+      <p:sp>
+        <p:nvSpPr>
+          <p:cNvPr id="422" name="Text 32">
+            <a:extLst xmlns:a="http://schemas.openxmlformats.org/drawingml/2006/main">
+              <a:ext uri="{FF2B5EF4-FFF2-40B4-BE49-F238E27FC236}">
+                <a16:creationId xmlns:a16="http://schemas.microsoft.com/office/drawing/2014/main" id="{B21008C2-D632-4083-90AF-430AB54EA52B}"/>
+              </a:ext>
+            </a:extLst>
+          </p:cNvPr>
+          <p:cNvSpPr>
+            <a:spLocks xmlns:a="http://schemas.openxmlformats.org/drawingml/2006/main" noGrp="1"/>
+          </p:cNvSpPr>
+          <p:nvPr/>
+        </p:nvSpPr>
+        <p:spPr>
+          <a:xfrm xmlns:a="http://schemas.openxmlformats.org/drawingml/2006/main">
+            <a:off x="914400" y="2651760"/>
+            <a:ext cx="4159800" cy="1005120"/>
+          </a:xfrm>
+          <a:prstGeom xmlns:a="http://schemas.openxmlformats.org/drawingml/2006/main" prst="rect">
+            <a:avLst/>
+          </a:prstGeom>
+          <a:noFill xmlns:a="http://schemas.openxmlformats.org/drawingml/2006/main"/>
+          <a:ln xmlns:a="http://schemas.openxmlformats.org/drawingml/2006/main" w="0">
+            <a:noFill/>
+          </a:ln>
+        </p:spPr>
+        <p:style>
+          <a:lnRef xmlns:a="http://schemas.openxmlformats.org/drawingml/2006/main" idx="0"/>
+          <a:fillRef xmlns:a="http://schemas.openxmlformats.org/drawingml/2006/main" idx="0"/>
+          <a:effectRef xmlns:a="http://schemas.openxmlformats.org/drawingml/2006/main" idx="0"/>
+          <a:fontRef xmlns:a="http://schemas.openxmlformats.org/drawingml/2006/main" idx="minor"/>
+        </p:style>
+        <p:txBody>
+          <a:bodyPr xmlns:a="http://schemas.openxmlformats.org/drawingml/2006/main" lIns="0" tIns="0" rIns="0" bIns="0" anchor="ctr">
+            <a:noAutofit/>
+          </a:bodyPr>
+          <a:lstStyle xmlns:a="http://schemas.openxmlformats.org/drawingml/2006/main"/>
+          <a:p xmlns:a="http://schemas.openxmlformats.org/drawingml/2006/main">
+            <a:pPr>
+              <a:lnSpc>
+                <a:spcPct val="115000"/>
+              </a:lnSpc>
+              <a:buNone/>
+            </a:pPr>
+            <a:r>
+              <a:rPr sz="1600" b="0" u="none">
+                <a:solidFill>
+                  <a:srgbClr val="EAF0FF"/>
+                </a:solidFill>
+                <a:latin typeface="Calibri"/>
+                <a:ea typeface="Calibri"/>
+                <a:cs typeface="Calibri"/>
+              </a:rPr>
+              <a:t>ΔPR-AUC +.055306; +TiO₂ .476561 versus controls .421255 (mare descriptive only).</a:t>
+            </a:r>
+          </a:p>
+        </p:txBody>
+      </p:sp>
+      <p:sp>
+        <p:nvSpPr>
+          <p:cNvPr id="423" name="Text 33">
+            <a:extLst xmlns:a="http://schemas.openxmlformats.org/drawingml/2006/main">
+              <a:ext uri="{FF2B5EF4-FFF2-40B4-BE49-F238E27FC236}">
+                <a16:creationId xmlns:a16="http://schemas.microsoft.com/office/drawing/2014/main" id="{2C3966BB-C95F-4A03-A939-6DA4FB11745F}"/>
+              </a:ext>
+            </a:extLst>
+          </p:cNvPr>
+          <p:cNvSpPr>
+            <a:spLocks xmlns:a="http://schemas.openxmlformats.org/drawingml/2006/main" noGrp="1"/>
+          </p:cNvSpPr>
+          <p:nvPr/>
+        </p:nvSpPr>
+        <p:spPr>
+          <a:xfrm xmlns:a="http://schemas.openxmlformats.org/drawingml/2006/main">
+            <a:off x="914400" y="4069080"/>
+            <a:ext cx="4159800" cy="319320"/>
+          </a:xfrm>
+          <a:prstGeom xmlns:a="http://schemas.openxmlformats.org/drawingml/2006/main" prst="rect">
+            <a:avLst/>
+          </a:prstGeom>
+          <a:noFill xmlns:a="http://schemas.openxmlformats.org/drawingml/2006/main"/>
+          <a:ln xmlns:a="http://schemas.openxmlformats.org/drawingml/2006/main" w="0">
+            <a:noFill/>
+          </a:ln>
+        </p:spPr>
+        <p:style>
+          <a:lnRef xmlns:a="http://schemas.openxmlformats.org/drawingml/2006/main" idx="0"/>
+          <a:fillRef xmlns:a="http://schemas.openxmlformats.org/drawingml/2006/main" idx="0"/>
+          <a:effectRef xmlns:a="http://schemas.openxmlformats.org/drawingml/2006/main" idx="0"/>
+          <a:fontRef xmlns:a="http://schemas.openxmlformats.org/drawingml/2006/main" idx="minor"/>
+        </p:style>
+        <p:txBody>
+          <a:bodyPr xmlns:a="http://schemas.openxmlformats.org/drawingml/2006/main" lIns="0" tIns="0" rIns="0" bIns="0" anchor="ctr">
+            <a:noAutofit/>
+          </a:bodyPr>
+          <a:lstStyle xmlns:a="http://schemas.openxmlformats.org/drawingml/2006/main"/>
+          <a:p xmlns:a="http://schemas.openxmlformats.org/drawingml/2006/main">
+            <a:pPr>
+              <a:lnSpc>
+                <a:spcPct val="100000"/>
+              </a:lnSpc>
+              <a:buNone/>
+            </a:pPr>
+            <a:r>
+              <a:rPr sz="1300" b="0" i="1" u="none">
+                <a:solidFill>
+                  <a:srgbClr val="9AA7C7"/>
+                </a:solidFill>
+                <a:latin typeface="Calibri"/>
+                <a:ea typeface="Calibri"/>
+                <a:cs typeface="Calibri"/>
+              </a:rPr>
+              <a:t>n=3,928 · 165 positives</a:t>
+            </a:r>
+          </a:p>
+        </p:txBody>
+      </p:sp>
+      <p:sp>
+        <p:nvSpPr>
+          <p:cNvPr id="424" name="Shape 34">
+            <a:extLst xmlns:a="http://schemas.openxmlformats.org/drawingml/2006/main">
+              <a:ext uri="{FF2B5EF4-FFF2-40B4-BE49-F238E27FC236}">
+                <a16:creationId xmlns:a16="http://schemas.microsoft.com/office/drawing/2014/main" id="{69E46985-FE9E-48C1-A284-EEBF62CD1EF0}"/>
+              </a:ext>
+            </a:extLst>
+          </p:cNvPr>
+          <p:cNvSpPr>
+            <a:spLocks xmlns:a="http://schemas.openxmlformats.org/drawingml/2006/main" noGrp="1"/>
+          </p:cNvSpPr>
+          <p:nvPr/>
+        </p:nvSpPr>
+        <p:spPr>
+          <a:xfrm xmlns:a="http://schemas.openxmlformats.org/drawingml/2006/main">
+            <a:off x="5532120" y="3017520"/>
+            <a:ext cx="1005120" cy="456480"/>
+          </a:xfrm>
+          <a:prstGeom xmlns:a="http://schemas.openxmlformats.org/drawingml/2006/main" prst="rightArrow">
+            <a:avLst>
+              <a:gd name="adj1" fmla="val 50000"/>
+              <a:gd name="adj2" fmla="val 50000"/>
+            </a:avLst>
+          </a:prstGeom>
+          <a:solidFill xmlns:a="http://schemas.openxmlformats.org/drawingml/2006/main">
+            <a:srgbClr val="E8795E"/>
+          </a:solidFill>
+          <a:ln xmlns:a="http://schemas.openxmlformats.org/drawingml/2006/main" w="0">
+            <a:noFill/>
+          </a:ln>
+        </p:spPr>
+        <p:style>
+          <a:lnRef xmlns:a="http://schemas.openxmlformats.org/drawingml/2006/main" idx="0"/>
+          <a:fillRef xmlns:a="http://schemas.openxmlformats.org/drawingml/2006/main" idx="0"/>
+          <a:effectRef xmlns:a="http://schemas.openxmlformats.org/drawingml/2006/main" idx="0"/>
+          <a:fontRef xmlns:a="http://schemas.openxmlformats.org/drawingml/2006/main" idx="minor"/>
+        </p:style>
+        <p:txBody>
+          <a:bodyPr xmlns:a="http://schemas.openxmlformats.org/drawingml/2006/main" lIns="90000" tIns="45000" rIns="90000" bIns="45000" anchor="t">
+            <a:noAutofit/>
+          </a:bodyPr>
+          <a:lstStyle xmlns:a="http://schemas.openxmlformats.org/drawingml/2006/main"/>
+          <a:p xmlns:a="http://schemas.openxmlformats.org/drawingml/2006/main"/>
+        </p:txBody>
+      </p:sp>
+      <p:sp>
+        <p:nvSpPr>
+          <p:cNvPr id="425" name="Text 35">
+            <a:extLst xmlns:a="http://schemas.openxmlformats.org/drawingml/2006/main">
+              <a:ext uri="{FF2B5EF4-FFF2-40B4-BE49-F238E27FC236}">
+                <a16:creationId xmlns:a16="http://schemas.microsoft.com/office/drawing/2014/main" id="{A9526443-18A6-4A80-8AD3-950D2F7C84A1}"/>
+              </a:ext>
+            </a:extLst>
+          </p:cNvPr>
+          <p:cNvSpPr>
+            <a:spLocks xmlns:a="http://schemas.openxmlformats.org/drawingml/2006/main" noGrp="1"/>
+          </p:cNvSpPr>
+          <p:nvPr/>
+        </p:nvSpPr>
+        <p:spPr>
+          <a:xfrm xmlns:a="http://schemas.openxmlformats.org/drawingml/2006/main">
+            <a:off x="5140440" y="1554480"/>
+            <a:ext cx="1599480" cy="822240"/>
+          </a:xfrm>
+          <a:prstGeom xmlns:a="http://schemas.openxmlformats.org/drawingml/2006/main" prst="rect">
+            <a:avLst/>
+          </a:prstGeom>
+          <a:noFill xmlns:a="http://schemas.openxmlformats.org/drawingml/2006/main"/>
+          <a:ln xmlns:a="http://schemas.openxmlformats.org/drawingml/2006/main" w="0">
+            <a:noFill/>
+          </a:ln>
+        </p:spPr>
+        <p:style>
+          <a:lnRef xmlns:a="http://schemas.openxmlformats.org/drawingml/2006/main" idx="0"/>
+          <a:fillRef xmlns:a="http://schemas.openxmlformats.org/drawingml/2006/main" idx="0"/>
+          <a:effectRef xmlns:a="http://schemas.openxmlformats.org/drawingml/2006/main" idx="0"/>
+          <a:fontRef xmlns:a="http://schemas.openxmlformats.org/drawingml/2006/main" idx="minor"/>
+        </p:style>
+        <p:txBody>
+          <a:bodyPr xmlns:a="http://schemas.openxmlformats.org/drawingml/2006/main" lIns="0" tIns="0" rIns="0" bIns="0" anchor="ctr">
+            <a:noAutofit/>
+          </a:bodyPr>
+          <a:lstStyle xmlns:a="http://schemas.openxmlformats.org/drawingml/2006/main"/>
+          <a:p xmlns:a="http://schemas.openxmlformats.org/drawingml/2006/main">
+            <a:pPr algn="ctr">
+              <a:lnSpc>
+                <a:spcPct val="95000"/>
+              </a:lnSpc>
+              <a:buNone/>
+            </a:pPr>
+            <a:r>
+              <a:rPr sz="1300" b="1" u="none">
+                <a:solidFill>
+                  <a:srgbClr val="E8795E"/>
+                </a:solidFill>
+                <a:latin typeface="Calibri"/>
+                <a:ea typeface="Calibri"/>
+                <a:cs typeface="Calibri"/>
+              </a:rPr>
+              <a:t/>
+            </a:r>
+          </a:p>
+        </p:txBody>
+      </p:sp>
+      <p:sp>
+        <p:nvSpPr>
+          <p:cNvPr id="426" name="Shape 36">
+            <a:extLst xmlns:a="http://schemas.openxmlformats.org/drawingml/2006/main">
+              <a:ext uri="{FF2B5EF4-FFF2-40B4-BE49-F238E27FC236}">
+                <a16:creationId xmlns:a16="http://schemas.microsoft.com/office/drawing/2014/main" id="{D41200B4-B821-45CE-9BE7-920B45323E34}"/>
+              </a:ext>
+            </a:extLst>
+          </p:cNvPr>
+          <p:cNvSpPr>
+            <a:spLocks xmlns:a="http://schemas.openxmlformats.org/drawingml/2006/main" noGrp="1"/>
+          </p:cNvSpPr>
+          <p:nvPr/>
+        </p:nvSpPr>
+        <p:spPr>
+          <a:xfrm xmlns:a="http://schemas.openxmlformats.org/drawingml/2006/main">
+            <a:off x="6537960" y="1874520"/>
+            <a:ext cx="4708440" cy="2742480"/>
+          </a:xfrm>
+          <a:prstGeom xmlns:a="http://schemas.openxmlformats.org/drawingml/2006/main" prst="roundRect">
+            <a:avLst>
+              <a:gd name="adj" fmla="val 3333"/>
+            </a:avLst>
+          </a:prstGeom>
+          <a:solidFill xmlns:a="http://schemas.openxmlformats.org/drawingml/2006/main">
+            <a:srgbClr val="18213F"/>
+          </a:solidFill>
+          <a:ln xmlns:a="http://schemas.openxmlformats.org/drawingml/2006/main" w="12700">
+            <a:solidFill>
+              <a:srgbClr val="5AC8E6"/>
+            </a:solidFill>
+          </a:ln>
+          <a:effectLst xmlns:a="http://schemas.openxmlformats.org/drawingml/2006/main">
+            <a:outerShdw blurRad="101520" dist="38160" dir="5400000" sx="100000" sy="100000" kx="0" ky="0" algn="bl" rotWithShape="0">
+              <a:srgbClr val="000000">
+                <a:alpha val="35000"/>
+              </a:srgbClr>
+            </a:outerShdw>
+          </a:effectLst>
+        </p:spPr>
+        <p:style>
+          <a:lnRef xmlns:a="http://schemas.openxmlformats.org/drawingml/2006/main" idx="0"/>
+          <a:fillRef xmlns:a="http://schemas.openxmlformats.org/drawingml/2006/main" idx="0"/>
+          <a:effectRef xmlns:a="http://schemas.openxmlformats.org/drawingml/2006/main" idx="0"/>
+          <a:fontRef xmlns:a="http://schemas.openxmlformats.org/drawingml/2006/main" idx="minor"/>
+        </p:style>
+        <p:txBody>
+          <a:bodyPr xmlns:a="http://schemas.openxmlformats.org/drawingml/2006/main" lIns="90000" tIns="45000" rIns="90000" bIns="45000" anchor="t">
+            <a:noAutofit/>
+          </a:bodyPr>
+          <a:lstStyle xmlns:a="http://schemas.openxmlformats.org/drawingml/2006/main"/>
+          <a:p xmlns:a="http://schemas.openxmlformats.org/drawingml/2006/main"/>
+        </p:txBody>
+      </p:sp>
+      <p:sp>
+        <p:nvSpPr>
+          <p:cNvPr id="427" name="Text 37">
+            <a:extLst xmlns:a="http://schemas.openxmlformats.org/drawingml/2006/main">
+              <a:ext uri="{FF2B5EF4-FFF2-40B4-BE49-F238E27FC236}">
+                <a16:creationId xmlns:a16="http://schemas.microsoft.com/office/drawing/2014/main" id="{93EA2052-FA06-434A-BEE8-288B5ED84302}"/>
+              </a:ext>
+            </a:extLst>
+          </p:cNvPr>
+          <p:cNvSpPr>
+            <a:spLocks xmlns:a="http://schemas.openxmlformats.org/drawingml/2006/main" noGrp="1"/>
+          </p:cNvSpPr>
+          <p:nvPr/>
+        </p:nvSpPr>
+        <p:spPr>
+          <a:xfrm xmlns:a="http://schemas.openxmlformats.org/drawingml/2006/main">
+            <a:off x="6812280" y="2148840"/>
+            <a:ext cx="4159800" cy="365040"/>
+          </a:xfrm>
+          <a:prstGeom xmlns:a="http://schemas.openxmlformats.org/drawingml/2006/main" prst="rect">
+            <a:avLst/>
+          </a:prstGeom>
+          <a:noFill xmlns:a="http://schemas.openxmlformats.org/drawingml/2006/main"/>
+          <a:ln xmlns:a="http://schemas.openxmlformats.org/drawingml/2006/main" w="0">
+            <a:noFill/>
+          </a:ln>
+        </p:spPr>
+        <p:style>
+          <a:lnRef xmlns:a="http://schemas.openxmlformats.org/drawingml/2006/main" idx="0"/>
+          <a:fillRef xmlns:a="http://schemas.openxmlformats.org/drawingml/2006/main" idx="0"/>
+          <a:effectRef xmlns:a="http://schemas.openxmlformats.org/drawingml/2006/main" idx="0"/>
+          <a:fontRef xmlns:a="http://schemas.openxmlformats.org/drawingml/2006/main" idx="minor"/>
+        </p:style>
+        <p:txBody>
+          <a:bodyPr xmlns:a="http://schemas.openxmlformats.org/drawingml/2006/main" lIns="0" tIns="0" rIns="0" bIns="0" anchor="ctr">
+            <a:noAutofit/>
+          </a:bodyPr>
+          <a:lstStyle xmlns:a="http://schemas.openxmlformats.org/drawingml/2006/main"/>
+          <a:p xmlns:a="http://schemas.openxmlformats.org/drawingml/2006/main">
+            <a:pPr>
+              <a:lnSpc>
+                <a:spcPct val="100000"/>
+              </a:lnSpc>
+              <a:buNone/>
+            </a:pPr>
+            <a:r>
+              <a:rPr sz="1400" b="1" u="none">
+                <a:solidFill>
+                  <a:srgbClr val="5AC8E6"/>
+                </a:solidFill>
+                <a:latin typeface="Calibri"/>
+                <a:ea typeface="Calibri"/>
+                <a:cs typeface="Calibri"/>
+              </a:rPr>
+              <a:t>Mapped mare-proxy continuous</a:t>
+            </a:r>
+          </a:p>
+        </p:txBody>
+      </p:sp>
+      <p:sp>
+        <p:nvSpPr>
+          <p:cNvPr id="428" name="Text 38">
+            <a:extLst xmlns:a="http://schemas.openxmlformats.org/drawingml/2006/main">
+              <a:ext uri="{FF2B5EF4-FFF2-40B4-BE49-F238E27FC236}">
+                <a16:creationId xmlns:a16="http://schemas.microsoft.com/office/drawing/2014/main" id="{B87A5EC0-22A0-4C55-8E0B-9C0C934F9268}"/>
+              </a:ext>
+            </a:extLst>
+          </p:cNvPr>
+          <p:cNvSpPr>
+            <a:spLocks xmlns:a="http://schemas.openxmlformats.org/drawingml/2006/main" noGrp="1"/>
+          </p:cNvSpPr>
+          <p:nvPr/>
+        </p:nvSpPr>
+        <p:spPr>
+          <a:xfrm xmlns:a="http://schemas.openxmlformats.org/drawingml/2006/main">
+            <a:off x="6812280" y="2651760"/>
+            <a:ext cx="4159800" cy="1005120"/>
+          </a:xfrm>
+          <a:prstGeom xmlns:a="http://schemas.openxmlformats.org/drawingml/2006/main" prst="rect">
+            <a:avLst/>
+          </a:prstGeom>
+          <a:noFill xmlns:a="http://schemas.openxmlformats.org/drawingml/2006/main"/>
+          <a:ln xmlns:a="http://schemas.openxmlformats.org/drawingml/2006/main" w="0">
+            <a:noFill/>
+          </a:ln>
+        </p:spPr>
+        <p:style>
+          <a:lnRef xmlns:a="http://schemas.openxmlformats.org/drawingml/2006/main" idx="0"/>
+          <a:fillRef xmlns:a="http://schemas.openxmlformats.org/drawingml/2006/main" idx="0"/>
+          <a:effectRef xmlns:a="http://schemas.openxmlformats.org/drawingml/2006/main" idx="0"/>
+          <a:fontRef xmlns:a="http://schemas.openxmlformats.org/drawingml/2006/main" idx="minor"/>
+        </p:style>
+        <p:txBody>
+          <a:bodyPr xmlns:a="http://schemas.openxmlformats.org/drawingml/2006/main" lIns="0" tIns="0" rIns="0" bIns="0" anchor="ctr">
+            <a:noAutofit/>
+          </a:bodyPr>
+          <a:lstStyle xmlns:a="http://schemas.openxmlformats.org/drawingml/2006/main"/>
+          <a:p xmlns:a="http://schemas.openxmlformats.org/drawingml/2006/main">
+            <a:pPr>
+              <a:lnSpc>
+                <a:spcPct val="115000"/>
+              </a:lnSpc>
+              <a:buNone/>
+            </a:pPr>
+            <a:r>
+              <a:rPr sz="1600" b="0" u="none">
+                <a:solidFill>
+                  <a:srgbClr val="EAF0FF"/>
+                </a:solidFill>
+                <a:latin typeface="Calibri"/>
+                <a:ea typeface="Calibri"/>
+                <a:cs typeface="Calibri"/>
+              </a:rPr>
+              <a:t>Primary continuous R² .3649 → .3503; raw-Ti increment +.014559±.012575. Common-fold gain vs full raw-Ti: +.001445.</a:t>
+            </a:r>
+          </a:p>
+        </p:txBody>
+      </p:sp>
+      <p:sp>
+        <p:nvSpPr>
+          <p:cNvPr id="429" name="Text 39">
+            <a:extLst xmlns:a="http://schemas.openxmlformats.org/drawingml/2006/main">
+              <a:ext uri="{FF2B5EF4-FFF2-40B4-BE49-F238E27FC236}">
+                <a16:creationId xmlns:a16="http://schemas.microsoft.com/office/drawing/2014/main" id="{BA1875AA-102A-4908-832F-2E43311770F1}"/>
+              </a:ext>
+            </a:extLst>
+          </p:cNvPr>
+          <p:cNvSpPr>
+            <a:spLocks xmlns:a="http://schemas.openxmlformats.org/drawingml/2006/main" noGrp="1"/>
+          </p:cNvSpPr>
+          <p:nvPr/>
+        </p:nvSpPr>
+        <p:spPr>
+          <a:xfrm xmlns:a="http://schemas.openxmlformats.org/drawingml/2006/main">
+            <a:off x="6812280" y="4069080"/>
+            <a:ext cx="4159800" cy="319320"/>
+          </a:xfrm>
+          <a:prstGeom xmlns:a="http://schemas.openxmlformats.org/drawingml/2006/main" prst="rect">
+            <a:avLst/>
+          </a:prstGeom>
+          <a:noFill xmlns:a="http://schemas.openxmlformats.org/drawingml/2006/main"/>
+          <a:ln xmlns:a="http://schemas.openxmlformats.org/drawingml/2006/main" w="0">
+            <a:noFill/>
+          </a:ln>
+        </p:spPr>
+        <p:style>
+          <a:lnRef xmlns:a="http://schemas.openxmlformats.org/drawingml/2006/main" idx="0"/>
+          <a:fillRef xmlns:a="http://schemas.openxmlformats.org/drawingml/2006/main" idx="0"/>
+          <a:effectRef xmlns:a="http://schemas.openxmlformats.org/drawingml/2006/main" idx="0"/>
+          <a:fontRef xmlns:a="http://schemas.openxmlformats.org/drawingml/2006/main" idx="minor"/>
+        </p:style>
+        <p:txBody>
+          <a:bodyPr xmlns:a="http://schemas.openxmlformats.org/drawingml/2006/main" lIns="0" tIns="0" rIns="0" bIns="0" anchor="ctr">
+            <a:noAutofit/>
+          </a:bodyPr>
+          <a:lstStyle xmlns:a="http://schemas.openxmlformats.org/drawingml/2006/main"/>
+          <a:p xmlns:a="http://schemas.openxmlformats.org/drawingml/2006/main">
+            <a:pPr>
+              <a:lnSpc>
+                <a:spcPct val="100000"/>
+              </a:lnSpc>
+              <a:buNone/>
+            </a:pPr>
+            <a:r>
+              <a:rPr sz="1300" b="0" i="1" u="none">
+                <a:solidFill>
+                  <a:srgbClr val="9AA7C7"/>
+                </a:solidFill>
+                <a:latin typeface="Calibri"/>
+                <a:ea typeface="Calibri"/>
+                <a:cs typeface="Calibri"/>
+              </a:rPr>
+              <a:t>proxy range 3289 km · n_eff=1</a:t>
+            </a:r>
+          </a:p>
+        </p:txBody>
+      </p:sp>
+      <p:sp>
+        <p:nvSpPr>
+          <p:cNvPr id="430" name="Shape 40">
+            <a:extLst xmlns:a="http://schemas.openxmlformats.org/drawingml/2006/main">
+              <a:ext uri="{FF2B5EF4-FFF2-40B4-BE49-F238E27FC236}">
+                <a16:creationId xmlns:a16="http://schemas.microsoft.com/office/drawing/2014/main" id="{D56F3892-EA30-48E5-A85C-0BF6E13FE767}"/>
+              </a:ext>
+            </a:extLst>
+          </p:cNvPr>
+          <p:cNvSpPr>
+            <a:spLocks xmlns:a="http://schemas.openxmlformats.org/drawingml/2006/main" noGrp="1"/>
+          </p:cNvSpPr>
+          <p:nvPr/>
+        </p:nvSpPr>
+        <p:spPr>
+          <a:xfrm xmlns:a="http://schemas.openxmlformats.org/drawingml/2006/main">
+            <a:off x="640080" y="4892040"/>
+            <a:ext cx="10880640" cy="1233720"/>
+          </a:xfrm>
+          <a:prstGeom xmlns:a="http://schemas.openxmlformats.org/drawingml/2006/main" prst="roundRect">
+            <a:avLst>
+              <a:gd name="adj" fmla="val 7407"/>
+            </a:avLst>
+          </a:prstGeom>
+          <a:solidFill xmlns:a="http://schemas.openxmlformats.org/drawingml/2006/main">
+            <a:srgbClr val="1E2A4E"/>
+          </a:solidFill>
+          <a:ln xmlns:a="http://schemas.openxmlformats.org/drawingml/2006/main" w="12700">
+            <a:solidFill>
+              <a:srgbClr val="2E3B66"/>
+            </a:solidFill>
+          </a:ln>
+          <a:effectLst xmlns:a="http://schemas.openxmlformats.org/drawingml/2006/main">
+            <a:outerShdw blurRad="101520" dist="38160" dir="5400000" sx="100000" sy="100000" kx="0" ky="0" algn="bl" rotWithShape="0">
+              <a:srgbClr val="000000">
+                <a:alpha val="35000"/>
+              </a:srgbClr>
+            </a:outerShdw>
+          </a:effectLst>
+        </p:spPr>
+        <p:style>
+          <a:lnRef xmlns:a="http://schemas.openxmlformats.org/drawingml/2006/main" idx="0"/>
+          <a:fillRef xmlns:a="http://schemas.openxmlformats.org/drawingml/2006/main" idx="0"/>
+          <a:effectRef xmlns:a="http://schemas.openxmlformats.org/drawingml/2006/main" idx="0"/>
+          <a:fontRef xmlns:a="http://schemas.openxmlformats.org/drawingml/2006/main" idx="minor"/>
+        </p:style>
+        <p:txBody>
+          <a:bodyPr xmlns:a="http://schemas.openxmlformats.org/drawingml/2006/main" lIns="90000" tIns="45000" rIns="90000" bIns="45000" anchor="t">
+            <a:noAutofit/>
+          </a:bodyPr>
+          <a:lstStyle xmlns:a="http://schemas.openxmlformats.org/drawingml/2006/main"/>
+          <a:p xmlns:a="http://schemas.openxmlformats.org/drawingml/2006/main"/>
+        </p:txBody>
+      </p:sp>
+      <p:sp>
+        <p:nvSpPr>
+          <p:cNvPr id="431" name="Text 41">
+            <a:extLst xmlns:a="http://schemas.openxmlformats.org/drawingml/2006/main">
+              <a:ext uri="{FF2B5EF4-FFF2-40B4-BE49-F238E27FC236}">
+                <a16:creationId xmlns:a16="http://schemas.microsoft.com/office/drawing/2014/main" id="{F47D3051-1714-456F-8037-C834EC7DF6AF}"/>
+              </a:ext>
+            </a:extLst>
+          </p:cNvPr>
+          <p:cNvSpPr>
+            <a:spLocks xmlns:a="http://schemas.openxmlformats.org/drawingml/2006/main" noGrp="1"/>
+          </p:cNvSpPr>
+          <p:nvPr/>
+        </p:nvSpPr>
+        <p:spPr>
+          <a:xfrm xmlns:a="http://schemas.openxmlformats.org/drawingml/2006/main">
+            <a:off x="914400" y="5074920"/>
+            <a:ext cx="10332000" cy="913680"/>
+          </a:xfrm>
+          <a:prstGeom xmlns:a="http://schemas.openxmlformats.org/drawingml/2006/main" prst="rect">
+            <a:avLst/>
+          </a:prstGeom>
+          <a:noFill xmlns:a="http://schemas.openxmlformats.org/drawingml/2006/main"/>
+          <a:ln xmlns:a="http://schemas.openxmlformats.org/drawingml/2006/main" w="0">
+            <a:noFill/>
+          </a:ln>
+        </p:spPr>
+        <p:style>
+          <a:lnRef xmlns:a="http://schemas.openxmlformats.org/drawingml/2006/main" idx="0"/>
+          <a:fillRef xmlns:a="http://schemas.openxmlformats.org/drawingml/2006/main" idx="0"/>
+          <a:effectRef xmlns:a="http://schemas.openxmlformats.org/drawingml/2006/main" idx="0"/>
+          <a:fontRef xmlns:a="http://schemas.openxmlformats.org/drawingml/2006/main" idx="minor"/>
+        </p:style>
+        <p:txBody>
+          <a:bodyPr xmlns:a="http://schemas.openxmlformats.org/drawingml/2006/main" lIns="0" tIns="0" rIns="0" bIns="0" anchor="ctr">
+            <a:noAutofit/>
+          </a:bodyPr>
+          <a:lstStyle xmlns:a="http://schemas.openxmlformats.org/drawingml/2006/main"/>
+          <a:p xmlns:a="http://schemas.openxmlformats.org/drawingml/2006/main">
+            <a:pPr>
+              <a:lnSpc>
+                <a:spcPct val="115000"/>
+              </a:lnSpc>
+              <a:buNone/>
+            </a:pPr>
+            <a:r>
+              <a:rPr sz="1550" b="1" u="none">
+                <a:solidFill>
+                  <a:srgbClr val="F2A93B"/>
+                </a:solidFill>
+                <a:latin typeface="Calibri"/>
+                <a:ea typeface="Calibri"/>
+                <a:cs typeface="Calibri"/>
+              </a:rPr>
+              <a:t>Interpretation:  Report binary and continuous estimands separately. Registered binary mare criterion did not pass; continuous increments stay descriptive. Footprint still supplies ~one dependence-scale unit.</a:t>
+            </a:r>
+            <a:r>
+              <a:rPr sz="1550" b="0" u="none">
+                <a:solidFill>
+                  <a:srgbClr val="EAF0FF"/>
+                </a:solidFill>
+                <a:latin typeface="Calibri"/>
+                <a:ea typeface="Calibri"/>
+                <a:cs typeface="Calibri"/>
+              </a:rPr>
+              <a:t/>
+            </a:r>
+            <a:r>
+              <a:rPr sz="1550" b="1" u="none">
+                <a:solidFill>
+                  <a:srgbClr val="5AC8E6"/>
+                </a:solidFill>
+                <a:latin typeface="Calibri"/>
+                <a:ea typeface="Calibri"/>
+                <a:cs typeface="Calibri"/>
+              </a:rPr>
+              <a:t/>
+            </a:r>
+          </a:p>
+        </p:txBody>
+      </p:sp>
+    </p:spTree>
+    <p:extLst>
+      <p:ext uri="{BB962C8B-B14F-4D97-AF65-F5344CB8AC3E}">
+        <p14:creationId xmlns:p14="http://schemas.microsoft.com/office/powerpoint/2010/main" val="965565036"/>
+      </p:ext>
+    </p:extLst>
+  </p:cSld>
+</p:sld>
+</file>
+
+<file path=ppt/slides/slide11.xml><?xml version="1.0" encoding="utf-8"?>
+<p:sld xmlns:p="http://schemas.openxmlformats.org/presentationml/2006/main">
+  <p:cSld>
+    <p:bg>
+      <p:bgPr>
+        <a:solidFill xmlns:a="http://schemas.openxmlformats.org/drawingml/2006/main">
+          <a:srgbClr val="0B1026"/>
+        </a:solidFill>
+      </p:bgPr>
+    </p:bg>
+    <p:spTree>
+      <p:nvGrpSpPr>
+        <p:cNvPr id="1" name=""/>
+        <p:cNvGrpSpPr/>
+        <p:nvPr/>
+      </p:nvGrpSpPr>
+      <p:grpSpPr>
+        <a:xfrm xmlns:a="http://schemas.openxmlformats.org/drawingml/2006/main"/>
+      </p:grpSpPr>
+      <p:sp>
+        <p:nvSpPr>
           <p:cNvPr id="432" name="Shape 0">
             <a:extLst xmlns:a="http://schemas.openxmlformats.org/drawingml/2006/main">
               <a:ext uri="{FF2B5EF4-FFF2-40B4-BE49-F238E27FC236}">
@@ -4774,7 +6883,7 @@
                 <a:ea typeface="Calibri"/>
                 <a:cs typeface="Calibri"/>
               </a:rPr>
-              <a:t>Full PR-AUC .088972 vs fold-matched null mean .112697, SD .056903 and 95th .225555 (p=.564356); H2 match p=.039604.</a:t>
+              <a:t>Full PR-AUC .394936 vs fold-matched null mean .231862, SD .103869 and 95th .490983 (p=.137931); H2 match p=.172414 (not recovered).</a:t>
             </a:r>
           </a:p>
         </p:txBody>
@@ -5161,7 +7270,7 @@
                 <a:ea typeface="Cambria"/>
                 <a:cs typeface="Cambria"/>
               </a:rPr>
-              <a:t>INCONCLUSIVE</a:t>
+              <a:t>INCONCLUSIVE  ·  failure-to-detect, not disproof</a:t>
             </a:r>
           </a:p>
           <a:p xmlns:a="http://schemas.openxmlformats.org/drawingml/2006/main">
@@ -5254,7 +7363,7 @@
 </p:sld>
 </file>
 
-<file path=ppt/slides/slide11.xml><?xml version="1.0" encoding="utf-8"?>
+<file path=ppt/slides/slide12.xml><?xml version="1.0" encoding="utf-8"?>
 <p:sld xmlns:p="http://schemas.openxmlformats.org/presentationml/2006/main">
   <p:cSld>
     <p:bg>
@@ -7265,7 +9374,8 @@
                 <a:ea typeface="Calibri"/>
                 <a:cs typeface="Calibri"/>
               </a:rPr>
-              <a:t>Thank you  ·  </a:t>
+              <a:t>Thank you  ·  Jack Wu (lemoon01110)  ·  ORCID 0009-0004-1710-9018  ·  v2.0.0
+github.com/lemoon01110/Lunar-Titanium-Magnetism  ·  code MIT · paper CC BY 4.0</a:t>
             </a:r>
             <a:r>
               <a:rPr sz="1500" b="0" u="none">
@@ -7276,7 +9386,7 @@
                 <a:ea typeface="Calibri"/>
                 <a:cs typeface="Calibri"/>
               </a:rPr>
-              <a:t>github.com/lemoon01110/Lunar-Titanium-Magnetism</a:t>
+              <a:t/>
             </a:r>
           </a:p>
         </p:txBody>
@@ -7291,7 +9401,7 @@
 </p:sld>
 </file>
 
-<file path=ppt/slides/slide12.xml><?xml version="1.0" encoding="utf-8"?>
+<file path=ppt/slides/slide2.xml><?xml version="1.0" encoding="utf-8"?>
 <p:sld xmlns:a="http://schemas.openxmlformats.org/drawingml/2006/main" xmlns:p="http://schemas.openxmlformats.org/presentationml/2006/main" xmlns:r="http://schemas.openxmlformats.org/officeDocument/2006/relationships">
   <p:cSld>
     <p:bg>
@@ -8978,7 +11088,7 @@
 </p:sld>
 </file>
 
-<file path=ppt/slides/slide2.xml><?xml version="1.0" encoding="utf-8"?>
+<file path=ppt/slides/slide3.xml><?xml version="1.0" encoding="utf-8"?>
 <p:sld xmlns:p="http://schemas.openxmlformats.org/presentationml/2006/main">
   <p:cSld>
     <p:bg>
@@ -10370,7 +12480,7 @@
                 <a:ea typeface="Cambria"/>
                 <a:cs typeface="Cambria"/>
               </a:rPr>
-              <a:t>A magnetized crust with no magnet behind it</a:t>
+              <a:t>A magnetized crust without a present-day global dynamo</a:t>
             </a:r>
           </a:p>
         </p:txBody>
@@ -11012,7 +13122,7 @@
                 <a:ea typeface="Calibri"/>
                 <a:cs typeface="Calibri"/>
               </a:rPr>
-              <a:t>Unlike Earth, the Moon has no active core dynamo — so it should be magnetically dead.</a:t>
+              <a:t>Unlike Earth, the Moon has no active global core dynamo today.</a:t>
             </a:r>
           </a:p>
         </p:txBody>
@@ -11349,7 +13459,7 @@
 </p:sld>
 </file>
 
-<file path=ppt/slides/slide3.xml><?xml version="1.0" encoding="utf-8"?>
+<file path=ppt/slides/slide4.xml><?xml version="1.0" encoding="utf-8"?>
 <p:sld xmlns:p="http://schemas.openxmlformats.org/presentationml/2006/main">
   <p:cSld>
     <p:bg>
@@ -13015,7 +15125,7 @@
                 <a:ea typeface="Calibri"/>
                 <a:cs typeface="Calibri"/>
               </a:rPr>
-              <a:t>Dated palaeointensity and Ti-bearing samples motivate a time-dependent core–mantle boundary melting and dynamo hypothesis.</a:t>
+              <a:t>Favored mechanism: radiogenic melting of ilmenite-bearing cumulates at the core–mantle boundary after overturn, raising core heat flux (not simply continued sinking of Ti-rich material).</a:t>
             </a:r>
           </a:p>
         </p:txBody>
@@ -13348,7 +15458,7 @@
                 <a:ea typeface="Calibri"/>
                 <a:cs typeface="Calibri"/>
               </a:rPr>
-              <a:t>Fold-matched H2 PR-AUC .110579 vs null mean .031970, SD .026728 and 95th .106832 (p=.039604).</a:t>
+              <a:t>Fold-matched H2 PR-AUC .271820 vs null mean .155877, SD .103869 and 95th .376621 (p=.172414 (not recovered)).</a:t>
             </a:r>
           </a:p>
         </p:txBody>
@@ -13407,7 +15517,7 @@
                 <a:ea typeface="Calibri"/>
                 <a:cs typeface="Calibri"/>
               </a:rPr>
-              <a:t>100 accepted shifts · 5/5 folds evaluable</a:t>
+              <a:t>86 fold-matched shifts · 5/5 folds evaluable</a:t>
             </a:r>
           </a:p>
         </p:txBody>
@@ -13422,7 +15532,7 @@
 </p:sld>
 </file>
 
-<file path=ppt/slides/slide4.xml><?xml version="1.0" encoding="utf-8"?>
+<file path=ppt/slides/slide5.xml><?xml version="1.0" encoding="utf-8"?>
 <p:sld xmlns:p="http://schemas.openxmlformats.org/presentationml/2006/main">
   <p:cSld>
     <p:bg>
@@ -15132,7 +17242,7 @@
                 <a:ea typeface="Calibri"/>
                 <a:cs typeface="Calibri"/>
               </a:rPr>
-              <a:t>Criteria were committed in repository history, but there is no independent external timestamp.</a:t>
+              <a:t>Author-declared analysis plan; timing cannot be independently verified (repo history begins after results). Binding scores use default-config XGBoost; nested tuning is diagnostic only.</a:t>
             </a:r>
           </a:p>
         </p:txBody>
@@ -15695,7 +17805,7 @@
 </p:sld>
 </file>
 
-<file path=ppt/slides/slide5.xml><?xml version="1.0" encoding="utf-8"?>
+<file path=ppt/slides/slide6.xml><?xml version="1.0" encoding="utf-8"?>
 <p:sld xmlns:p="http://schemas.openxmlformats.org/presentationml/2006/main">
   <p:cSld>
     <p:bg>
@@ -17087,7 +19197,7 @@
                 <a:ea typeface="Cambria"/>
                 <a:cs typeface="Cambria"/>
               </a:rPr>
-              <a:t>Five global datasets, plus a mapped mare-proxy mask</a:t>
+              <a:t>Five principal products (22 pinned source files), plus a mapped mare-proxy mask</a:t>
             </a:r>
           </a:p>
         </p:txBody>
@@ -17302,7 +19412,7 @@
                 <a:ea typeface="Calibri"/>
                 <a:cs typeface="Calibri"/>
               </a:rPr>
-              <a:t>Kaguya + Lunar Prospector surface vector map</a:t>
+              <a:t>Tsunakawa et al. 2015 surface SVM via Wieczorek T2015_449 (surface-evaluated |B|; primary threshold 10 nT)</a:t>
             </a:r>
           </a:p>
         </p:txBody>
@@ -17517,7 +19627,7 @@
                 <a:ea typeface="Calibri"/>
                 <a:cs typeface="Calibri"/>
               </a:rPr>
-              <a:t>LROC WAC UV/Vis abundance map; mare-derived calibration</a:t>
+              <a:t>LROC WAC UV/Vis; values &lt;2 wt% are non-quantitative (product floor); primary uses ≥2 wt% only</a:t>
             </a:r>
           </a:p>
         </p:txBody>
@@ -18452,7 +20562,7 @@
                 <a:ea typeface="Calibri"/>
                 <a:cs typeface="Calibri"/>
               </a:rPr>
-              <a:t>pinned data products</a:t>
+              <a:t>pinned source files</a:t>
             </a:r>
           </a:p>
         </p:txBody>
@@ -18703,7 +20813,7 @@
 </p:sld>
 </file>
 
-<file path=ppt/slides/slide6.xml><?xml version="1.0" encoding="utf-8"?>
+<file path=ppt/slides/slide7.xml><?xml version="1.0" encoding="utf-8"?>
 <p:sld xmlns:p="http://schemas.openxmlformats.org/presentationml/2006/main">
   <p:cSld>
     <p:bg>
@@ -21427,7 +23537,7 @@
                 <a:ea typeface="Calibri"/>
                 <a:cs typeface="Calibri"/>
               </a:rPr>
-              <a:t>Why blocking still falls short:  </a:t>
+              <a:t>Why blocking still falls short:  30° (~910 km) and 60° (~1819 km) holdouts remain below the ~3752 km dependence range. Both nulls used the first 100 eligible 5/5-fold unique nonidentity shifts from 125 candidates; 12 four-fold candidates were rejected. Primary prevalence ≈ .0384 (10 nT, quantitative TiO₂).</a:t>
             </a:r>
             <a:r>
               <a:rPr sz="1450" b="0" u="none">
@@ -21438,7 +23548,7 @@
                 <a:ea typeface="Calibri"/>
                 <a:cs typeface="Calibri"/>
               </a:rPr>
-              <a:t>30° (~910 km) and 60° (~1819 km) holdouts remain below the ~3752 km dependence range. Both nulls used the first 100 eligible 5/5-fold unique nonidentity shifts from 125 candidates; 12 four-fold candidates were rejected. Accepted prevalence: .007686–.022767.</a:t>
+              <a:t/>
             </a:r>
           </a:p>
         </p:txBody>
@@ -21453,7 +23563,7 @@
 </p:sld>
 </file>
 
-<file path=ppt/slides/slide7.xml><?xml version="1.0" encoding="utf-8"?>
+<file path=ppt/slides/slide8.xml><?xml version="1.0" encoding="utf-8"?>
 <p:sld xmlns:p="http://schemas.openxmlformats.org/presentationml/2006/main">
   <p:cSld>
     <p:bg>
@@ -23060,7 +25170,7 @@
                 <a:ea typeface="Calibri"/>
                 <a:cs typeface="Calibri"/>
               </a:rPr>
-              <a:t>The plan predates the run in git history, but lacks an independent external timestamp.</a:t>
+              <a:t>Author-declared plan only — not an independently timestamped preregistration. v1.0.0 is superseded.</a:t>
             </a:r>
           </a:p>
         </p:txBody>
@@ -23720,7 +25830,7 @@
 </p:sld>
 </file>
 
-<file path=ppt/slides/slide8.xml><?xml version="1.0" encoding="utf-8"?>
+<file path=ppt/slides/slide9.xml><?xml version="1.0" encoding="utf-8"?>
 <p:sld xmlns:p="http://schemas.openxmlformats.org/presentationml/2006/main">
   <p:cSld>
     <p:bg>
@@ -25354,7 +27464,7 @@
                 <a:ea typeface="Calibri"/>
                 <a:cs typeface="Calibri"/>
               </a:rPr>
-              <a:t>ΔR² +.0121</a:t>
+              <a:t>ΔR² −.0146</a:t>
             </a:r>
           </a:p>
         </p:txBody>
@@ -25413,7 +27523,7 @@
                 <a:ea typeface="Calibri"/>
                 <a:cs typeface="Calibri"/>
               </a:rPr>
-              <a:t>controls .2590 → .2712 with full Ti family; descriptive only</a:t>
+              <a:t>controls .3649 → .3503 with full Ti family; descriptive only</a:t>
             </a:r>
           </a:p>
         </p:txBody>
@@ -25526,7 +27636,7 @@
                 <a:ea typeface="Calibri"/>
                 <a:cs typeface="Calibri"/>
               </a:rPr>
-              <a:t>ΔPR-AUC −.002992</a:t>
+              <a:t>ΔPR-AUC +.042444</a:t>
             </a:r>
           </a:p>
         </p:txBody>
@@ -25585,7 +27695,7 @@
                 <a:ea typeface="Calibri"/>
                 <a:cs typeface="Calibri"/>
               </a:rPr>
-              <a:t>remove raw/buffered Ti + Ti×gravity interactions; p=.78125</a:t>
+              <a:t>remove raw/buffered Ti + Ti×gravity interactions; Wilcoxon p unavailable</a:t>
             </a:r>
           </a:p>
         </p:txBody>
@@ -25870,7 +27980,7 @@
                 <a:ea typeface="Calibri"/>
                 <a:cs typeface="Calibri"/>
               </a:rPr>
-              <a:t>STATUS:  </a:t>
+              <a:t>STATUS:  INCONCLUSIVE_LOW_POWER  ·  failure-to-detect, not disproof</a:t>
             </a:r>
             <a:r>
               <a:rPr sz="1800" b="1" u="none">
@@ -25881,7 +27991,7 @@
                 <a:ea typeface="Calibri"/>
                 <a:cs typeface="Calibri"/>
               </a:rPr>
-              <a:t>INCONCLUSIVE_LOW_POWER</a:t>
+              <a:t/>
             </a:r>
           </a:p>
         </p:txBody>
@@ -25949,2115 +28059,6 @@
     <p:extLst>
       <p:ext uri="{BB962C8B-B14F-4D97-AF65-F5344CB8AC3E}">
         <p14:creationId xmlns:p14="http://schemas.microsoft.com/office/powerpoint/2010/main" val="1583478249"/>
-      </p:ext>
-    </p:extLst>
-  </p:cSld>
-</p:sld>
-</file>
-
-<file path=ppt/slides/slide9.xml><?xml version="1.0" encoding="utf-8"?>
-<p:sld xmlns:p="http://schemas.openxmlformats.org/presentationml/2006/main">
-  <p:cSld>
-    <p:bg>
-      <p:bgPr>
-        <a:solidFill xmlns:a="http://schemas.openxmlformats.org/drawingml/2006/main">
-          <a:srgbClr val="0B1026"/>
-        </a:solidFill>
-      </p:bgPr>
-    </p:bg>
-    <p:spTree>
-      <p:nvGrpSpPr>
-        <p:cNvPr id="1" name=""/>
-        <p:cNvGrpSpPr/>
-        <p:nvPr/>
-      </p:nvGrpSpPr>
-      <p:grpSpPr>
-        <a:xfrm xmlns:a="http://schemas.openxmlformats.org/drawingml/2006/main"/>
-      </p:grpSpPr>
-      <p:sp>
-        <p:nvSpPr>
-          <p:cNvPr id="390" name="Shape 0">
-            <a:extLst xmlns:a="http://schemas.openxmlformats.org/drawingml/2006/main">
-              <a:ext uri="{FF2B5EF4-FFF2-40B4-BE49-F238E27FC236}">
-                <a16:creationId xmlns:a16="http://schemas.microsoft.com/office/drawing/2014/main" id="{B514E457-E824-4DC1-B3B7-F4110259BB72}"/>
-              </a:ext>
-            </a:extLst>
-          </p:cNvPr>
-          <p:cNvSpPr>
-            <a:spLocks xmlns:a="http://schemas.openxmlformats.org/drawingml/2006/main" noGrp="1"/>
-          </p:cNvSpPr>
-          <p:nvPr/>
-        </p:nvSpPr>
-        <p:spPr>
-          <a:xfrm xmlns:a="http://schemas.openxmlformats.org/drawingml/2006/main">
-            <a:off x="548640" y="640080"/>
-            <a:ext cx="45000" cy="45000"/>
-          </a:xfrm>
-          <a:prstGeom xmlns:a="http://schemas.openxmlformats.org/drawingml/2006/main" prst="ellipse">
-            <a:avLst/>
-          </a:prstGeom>
-          <a:solidFill xmlns:a="http://schemas.openxmlformats.org/drawingml/2006/main">
-            <a:srgbClr val="FFFFFF">
-              <a:alpha val="55000"/>
-            </a:srgbClr>
-          </a:solidFill>
-          <a:ln xmlns:a="http://schemas.openxmlformats.org/drawingml/2006/main" w="0">
-            <a:noFill/>
-          </a:ln>
-        </p:spPr>
-        <p:style>
-          <a:lnRef xmlns:a="http://schemas.openxmlformats.org/drawingml/2006/main" idx="0"/>
-          <a:fillRef xmlns:a="http://schemas.openxmlformats.org/drawingml/2006/main" idx="0"/>
-          <a:effectRef xmlns:a="http://schemas.openxmlformats.org/drawingml/2006/main" idx="0"/>
-          <a:fontRef xmlns:a="http://schemas.openxmlformats.org/drawingml/2006/main" idx="minor"/>
-        </p:style>
-        <p:txBody>
-          <a:bodyPr xmlns:a="http://schemas.openxmlformats.org/drawingml/2006/main" lIns="22680" tIns="-12600" rIns="22680" bIns="-12600" anchor="t">
-            <a:noAutofit/>
-          </a:bodyPr>
-          <a:lstStyle xmlns:a="http://schemas.openxmlformats.org/drawingml/2006/main"/>
-          <a:p xmlns:a="http://schemas.openxmlformats.org/drawingml/2006/main"/>
-        </p:txBody>
-      </p:sp>
-      <p:sp>
-        <p:nvSpPr>
-          <p:cNvPr id="391" name="Shape 1">
-            <a:extLst xmlns:a="http://schemas.openxmlformats.org/drawingml/2006/main">
-              <a:ext uri="{FF2B5EF4-FFF2-40B4-BE49-F238E27FC236}">
-                <a16:creationId xmlns:a16="http://schemas.microsoft.com/office/drawing/2014/main" id="{A066E4F9-A6A9-4258-A020-BD560E6A411E}"/>
-              </a:ext>
-            </a:extLst>
-          </p:cNvPr>
-          <p:cNvSpPr>
-            <a:spLocks xmlns:a="http://schemas.openxmlformats.org/drawingml/2006/main" noGrp="1"/>
-          </p:cNvSpPr>
-          <p:nvPr/>
-        </p:nvSpPr>
-        <p:spPr>
-          <a:xfrm xmlns:a="http://schemas.openxmlformats.org/drawingml/2006/main">
-            <a:off x="1280160" y="1188720"/>
-            <a:ext cx="26640" cy="26640"/>
-          </a:xfrm>
-          <a:prstGeom xmlns:a="http://schemas.openxmlformats.org/drawingml/2006/main" prst="ellipse">
-            <a:avLst/>
-          </a:prstGeom>
-          <a:solidFill xmlns:a="http://schemas.openxmlformats.org/drawingml/2006/main">
-            <a:srgbClr val="FFFFFF">
-              <a:alpha val="35000"/>
-            </a:srgbClr>
-          </a:solidFill>
-          <a:ln xmlns:a="http://schemas.openxmlformats.org/drawingml/2006/main" w="0">
-            <a:noFill/>
-          </a:ln>
-        </p:spPr>
-        <p:style>
-          <a:lnRef xmlns:a="http://schemas.openxmlformats.org/drawingml/2006/main" idx="0"/>
-          <a:fillRef xmlns:a="http://schemas.openxmlformats.org/drawingml/2006/main" idx="0"/>
-          <a:effectRef xmlns:a="http://schemas.openxmlformats.org/drawingml/2006/main" idx="0"/>
-          <a:fontRef xmlns:a="http://schemas.openxmlformats.org/drawingml/2006/main" idx="minor"/>
-        </p:style>
-        <p:txBody>
-          <a:bodyPr xmlns:a="http://schemas.openxmlformats.org/drawingml/2006/main" lIns="13320" tIns="-25920" rIns="13320" bIns="-25920" anchor="t">
-            <a:noAutofit/>
-          </a:bodyPr>
-          <a:lstStyle xmlns:a="http://schemas.openxmlformats.org/drawingml/2006/main"/>
-          <a:p xmlns:a="http://schemas.openxmlformats.org/drawingml/2006/main"/>
-        </p:txBody>
-      </p:sp>
-      <p:sp>
-        <p:nvSpPr>
-          <p:cNvPr id="392" name="Shape 2">
-            <a:extLst xmlns:a="http://schemas.openxmlformats.org/drawingml/2006/main">
-              <a:ext uri="{FF2B5EF4-FFF2-40B4-BE49-F238E27FC236}">
-                <a16:creationId xmlns:a16="http://schemas.microsoft.com/office/drawing/2014/main" id="{6E0503B3-060E-44F7-A4D2-AA3A70929140}"/>
-              </a:ext>
-            </a:extLst>
-          </p:cNvPr>
-          <p:cNvSpPr>
-            <a:spLocks xmlns:a="http://schemas.openxmlformats.org/drawingml/2006/main" noGrp="1"/>
-          </p:cNvSpPr>
-          <p:nvPr/>
-        </p:nvSpPr>
-        <p:spPr>
-          <a:xfrm xmlns:a="http://schemas.openxmlformats.org/drawingml/2006/main">
-            <a:off x="1920240" y="457200"/>
-            <a:ext cx="26640" cy="26640"/>
-          </a:xfrm>
-          <a:prstGeom xmlns:a="http://schemas.openxmlformats.org/drawingml/2006/main" prst="ellipse">
-            <a:avLst/>
-          </a:prstGeom>
-          <a:solidFill xmlns:a="http://schemas.openxmlformats.org/drawingml/2006/main">
-            <a:srgbClr val="FFFFFF">
-              <a:alpha val="55000"/>
-            </a:srgbClr>
-          </a:solidFill>
-          <a:ln xmlns:a="http://schemas.openxmlformats.org/drawingml/2006/main" w="0">
-            <a:noFill/>
-          </a:ln>
-        </p:spPr>
-        <p:style>
-          <a:lnRef xmlns:a="http://schemas.openxmlformats.org/drawingml/2006/main" idx="0"/>
-          <a:fillRef xmlns:a="http://schemas.openxmlformats.org/drawingml/2006/main" idx="0"/>
-          <a:effectRef xmlns:a="http://schemas.openxmlformats.org/drawingml/2006/main" idx="0"/>
-          <a:fontRef xmlns:a="http://schemas.openxmlformats.org/drawingml/2006/main" idx="minor"/>
-        </p:style>
-        <p:txBody>
-          <a:bodyPr xmlns:a="http://schemas.openxmlformats.org/drawingml/2006/main" lIns="13320" tIns="-25920" rIns="13320" bIns="-25920" anchor="t">
-            <a:noAutofit/>
-          </a:bodyPr>
-          <a:lstStyle xmlns:a="http://schemas.openxmlformats.org/drawingml/2006/main"/>
-          <a:p xmlns:a="http://schemas.openxmlformats.org/drawingml/2006/main"/>
-        </p:txBody>
-      </p:sp>
-      <p:sp>
-        <p:nvSpPr>
-          <p:cNvPr id="393" name="Shape 3">
-            <a:extLst xmlns:a="http://schemas.openxmlformats.org/drawingml/2006/main">
-              <a:ext uri="{FF2B5EF4-FFF2-40B4-BE49-F238E27FC236}">
-                <a16:creationId xmlns:a16="http://schemas.microsoft.com/office/drawing/2014/main" id="{CE296E31-D0A1-49CA-BA01-16A0C88DCA18}"/>
-              </a:ext>
-            </a:extLst>
-          </p:cNvPr>
-          <p:cNvSpPr>
-            <a:spLocks xmlns:a="http://schemas.openxmlformats.org/drawingml/2006/main" noGrp="1"/>
-          </p:cNvSpPr>
-          <p:nvPr/>
-        </p:nvSpPr>
-        <p:spPr>
-          <a:xfrm xmlns:a="http://schemas.openxmlformats.org/drawingml/2006/main">
-            <a:off x="2926080" y="914400"/>
-            <a:ext cx="45000" cy="45000"/>
-          </a:xfrm>
-          <a:prstGeom xmlns:a="http://schemas.openxmlformats.org/drawingml/2006/main" prst="ellipse">
-            <a:avLst/>
-          </a:prstGeom>
-          <a:solidFill xmlns:a="http://schemas.openxmlformats.org/drawingml/2006/main">
-            <a:srgbClr val="FFFFFF">
-              <a:alpha val="35000"/>
-            </a:srgbClr>
-          </a:solidFill>
-          <a:ln xmlns:a="http://schemas.openxmlformats.org/drawingml/2006/main" w="0">
-            <a:noFill/>
-          </a:ln>
-        </p:spPr>
-        <p:style>
-          <a:lnRef xmlns:a="http://schemas.openxmlformats.org/drawingml/2006/main" idx="0"/>
-          <a:fillRef xmlns:a="http://schemas.openxmlformats.org/drawingml/2006/main" idx="0"/>
-          <a:effectRef xmlns:a="http://schemas.openxmlformats.org/drawingml/2006/main" idx="0"/>
-          <a:fontRef xmlns:a="http://schemas.openxmlformats.org/drawingml/2006/main" idx="minor"/>
-        </p:style>
-        <p:txBody>
-          <a:bodyPr xmlns:a="http://schemas.openxmlformats.org/drawingml/2006/main" lIns="22680" tIns="-12600" rIns="22680" bIns="-12600" anchor="t">
-            <a:noAutofit/>
-          </a:bodyPr>
-          <a:lstStyle xmlns:a="http://schemas.openxmlformats.org/drawingml/2006/main"/>
-          <a:p xmlns:a="http://schemas.openxmlformats.org/drawingml/2006/main"/>
-        </p:txBody>
-      </p:sp>
-      <p:sp>
-        <p:nvSpPr>
-          <p:cNvPr id="394" name="Shape 4">
-            <a:extLst xmlns:a="http://schemas.openxmlformats.org/drawingml/2006/main">
-              <a:ext uri="{FF2B5EF4-FFF2-40B4-BE49-F238E27FC236}">
-                <a16:creationId xmlns:a16="http://schemas.microsoft.com/office/drawing/2014/main" id="{491C7BA0-054E-4A42-A379-FD00F58881DA}"/>
-              </a:ext>
-            </a:extLst>
-          </p:cNvPr>
-          <p:cNvSpPr>
-            <a:spLocks xmlns:a="http://schemas.openxmlformats.org/drawingml/2006/main" noGrp="1"/>
-          </p:cNvSpPr>
-          <p:nvPr/>
-        </p:nvSpPr>
-        <p:spPr>
-          <a:xfrm xmlns:a="http://schemas.openxmlformats.org/drawingml/2006/main">
-            <a:off x="822960" y="2194560"/>
-            <a:ext cx="26640" cy="26640"/>
-          </a:xfrm>
-          <a:prstGeom xmlns:a="http://schemas.openxmlformats.org/drawingml/2006/main" prst="ellipse">
-            <a:avLst/>
-          </a:prstGeom>
-          <a:solidFill xmlns:a="http://schemas.openxmlformats.org/drawingml/2006/main">
-            <a:srgbClr val="FFFFFF">
-              <a:alpha val="55000"/>
-            </a:srgbClr>
-          </a:solidFill>
-          <a:ln xmlns:a="http://schemas.openxmlformats.org/drawingml/2006/main" w="0">
-            <a:noFill/>
-          </a:ln>
-        </p:spPr>
-        <p:style>
-          <a:lnRef xmlns:a="http://schemas.openxmlformats.org/drawingml/2006/main" idx="0"/>
-          <a:fillRef xmlns:a="http://schemas.openxmlformats.org/drawingml/2006/main" idx="0"/>
-          <a:effectRef xmlns:a="http://schemas.openxmlformats.org/drawingml/2006/main" idx="0"/>
-          <a:fontRef xmlns:a="http://schemas.openxmlformats.org/drawingml/2006/main" idx="minor"/>
-        </p:style>
-        <p:txBody>
-          <a:bodyPr xmlns:a="http://schemas.openxmlformats.org/drawingml/2006/main" lIns="13320" tIns="-25920" rIns="13320" bIns="-25920" anchor="t">
-            <a:noAutofit/>
-          </a:bodyPr>
-          <a:lstStyle xmlns:a="http://schemas.openxmlformats.org/drawingml/2006/main"/>
-          <a:p xmlns:a="http://schemas.openxmlformats.org/drawingml/2006/main"/>
-        </p:txBody>
-      </p:sp>
-      <p:sp>
-        <p:nvSpPr>
-          <p:cNvPr id="395" name="Shape 5">
-            <a:extLst xmlns:a="http://schemas.openxmlformats.org/drawingml/2006/main">
-              <a:ext uri="{FF2B5EF4-FFF2-40B4-BE49-F238E27FC236}">
-                <a16:creationId xmlns:a16="http://schemas.microsoft.com/office/drawing/2014/main" id="{F8B3FA18-89DE-4B27-B6FE-10E25AFEF69E}"/>
-              </a:ext>
-            </a:extLst>
-          </p:cNvPr>
-          <p:cNvSpPr>
-            <a:spLocks xmlns:a="http://schemas.openxmlformats.org/drawingml/2006/main" noGrp="1"/>
-          </p:cNvSpPr>
-          <p:nvPr/>
-        </p:nvSpPr>
-        <p:spPr>
-          <a:xfrm xmlns:a="http://schemas.openxmlformats.org/drawingml/2006/main">
-            <a:off x="1645920" y="3017520"/>
-            <a:ext cx="26640" cy="26640"/>
-          </a:xfrm>
-          <a:prstGeom xmlns:a="http://schemas.openxmlformats.org/drawingml/2006/main" prst="ellipse">
-            <a:avLst/>
-          </a:prstGeom>
-          <a:solidFill xmlns:a="http://schemas.openxmlformats.org/drawingml/2006/main">
-            <a:srgbClr val="FFFFFF">
-              <a:alpha val="35000"/>
-            </a:srgbClr>
-          </a:solidFill>
-          <a:ln xmlns:a="http://schemas.openxmlformats.org/drawingml/2006/main" w="0">
-            <a:noFill/>
-          </a:ln>
-        </p:spPr>
-        <p:style>
-          <a:lnRef xmlns:a="http://schemas.openxmlformats.org/drawingml/2006/main" idx="0"/>
-          <a:fillRef xmlns:a="http://schemas.openxmlformats.org/drawingml/2006/main" idx="0"/>
-          <a:effectRef xmlns:a="http://schemas.openxmlformats.org/drawingml/2006/main" idx="0"/>
-          <a:fontRef xmlns:a="http://schemas.openxmlformats.org/drawingml/2006/main" idx="minor"/>
-        </p:style>
-        <p:txBody>
-          <a:bodyPr xmlns:a="http://schemas.openxmlformats.org/drawingml/2006/main" lIns="13320" tIns="-25920" rIns="13320" bIns="-25920" anchor="t">
-            <a:noAutofit/>
-          </a:bodyPr>
-          <a:lstStyle xmlns:a="http://schemas.openxmlformats.org/drawingml/2006/main"/>
-          <a:p xmlns:a="http://schemas.openxmlformats.org/drawingml/2006/main"/>
-        </p:txBody>
-      </p:sp>
-      <p:sp>
-        <p:nvSpPr>
-          <p:cNvPr id="396" name="Shape 6">
-            <a:extLst xmlns:a="http://schemas.openxmlformats.org/drawingml/2006/main">
-              <a:ext uri="{FF2B5EF4-FFF2-40B4-BE49-F238E27FC236}">
-                <a16:creationId xmlns:a16="http://schemas.microsoft.com/office/drawing/2014/main" id="{4053098E-82FB-4426-BB93-B30138C8E4DB}"/>
-              </a:ext>
-            </a:extLst>
-          </p:cNvPr>
-          <p:cNvSpPr>
-            <a:spLocks xmlns:a="http://schemas.openxmlformats.org/drawingml/2006/main" noGrp="1"/>
-          </p:cNvSpPr>
-          <p:nvPr/>
-        </p:nvSpPr>
-        <p:spPr>
-          <a:xfrm xmlns:a="http://schemas.openxmlformats.org/drawingml/2006/main">
-            <a:off x="457200" y="3840480"/>
-            <a:ext cx="45000" cy="45000"/>
-          </a:xfrm>
-          <a:prstGeom xmlns:a="http://schemas.openxmlformats.org/drawingml/2006/main" prst="ellipse">
-            <a:avLst/>
-          </a:prstGeom>
-          <a:solidFill xmlns:a="http://schemas.openxmlformats.org/drawingml/2006/main">
-            <a:srgbClr val="FFFFFF">
-              <a:alpha val="55000"/>
-            </a:srgbClr>
-          </a:solidFill>
-          <a:ln xmlns:a="http://schemas.openxmlformats.org/drawingml/2006/main" w="0">
-            <a:noFill/>
-          </a:ln>
-        </p:spPr>
-        <p:style>
-          <a:lnRef xmlns:a="http://schemas.openxmlformats.org/drawingml/2006/main" idx="0"/>
-          <a:fillRef xmlns:a="http://schemas.openxmlformats.org/drawingml/2006/main" idx="0"/>
-          <a:effectRef xmlns:a="http://schemas.openxmlformats.org/drawingml/2006/main" idx="0"/>
-          <a:fontRef xmlns:a="http://schemas.openxmlformats.org/drawingml/2006/main" idx="minor"/>
-        </p:style>
-        <p:txBody>
-          <a:bodyPr xmlns:a="http://schemas.openxmlformats.org/drawingml/2006/main" lIns="22680" tIns="-12600" rIns="22680" bIns="-12600" anchor="t">
-            <a:noAutofit/>
-          </a:bodyPr>
-          <a:lstStyle xmlns:a="http://schemas.openxmlformats.org/drawingml/2006/main"/>
-          <a:p xmlns:a="http://schemas.openxmlformats.org/drawingml/2006/main"/>
-        </p:txBody>
-      </p:sp>
-      <p:sp>
-        <p:nvSpPr>
-          <p:cNvPr id="397" name="Shape 7">
-            <a:extLst xmlns:a="http://schemas.openxmlformats.org/drawingml/2006/main">
-              <a:ext uri="{FF2B5EF4-FFF2-40B4-BE49-F238E27FC236}">
-                <a16:creationId xmlns:a16="http://schemas.microsoft.com/office/drawing/2014/main" id="{F3144DBA-F608-4CCD-B2CD-996458986E2B}"/>
-              </a:ext>
-            </a:extLst>
-          </p:cNvPr>
-          <p:cNvSpPr>
-            <a:spLocks xmlns:a="http://schemas.openxmlformats.org/drawingml/2006/main" noGrp="1"/>
-          </p:cNvSpPr>
-          <p:nvPr/>
-        </p:nvSpPr>
-        <p:spPr>
-          <a:xfrm xmlns:a="http://schemas.openxmlformats.org/drawingml/2006/main">
-            <a:off x="1097280" y="4663440"/>
-            <a:ext cx="26640" cy="26640"/>
-          </a:xfrm>
-          <a:prstGeom xmlns:a="http://schemas.openxmlformats.org/drawingml/2006/main" prst="ellipse">
-            <a:avLst/>
-          </a:prstGeom>
-          <a:solidFill xmlns:a="http://schemas.openxmlformats.org/drawingml/2006/main">
-            <a:srgbClr val="FFFFFF">
-              <a:alpha val="35000"/>
-            </a:srgbClr>
-          </a:solidFill>
-          <a:ln xmlns:a="http://schemas.openxmlformats.org/drawingml/2006/main" w="0">
-            <a:noFill/>
-          </a:ln>
-        </p:spPr>
-        <p:style>
-          <a:lnRef xmlns:a="http://schemas.openxmlformats.org/drawingml/2006/main" idx="0"/>
-          <a:fillRef xmlns:a="http://schemas.openxmlformats.org/drawingml/2006/main" idx="0"/>
-          <a:effectRef xmlns:a="http://schemas.openxmlformats.org/drawingml/2006/main" idx="0"/>
-          <a:fontRef xmlns:a="http://schemas.openxmlformats.org/drawingml/2006/main" idx="minor"/>
-        </p:style>
-        <p:txBody>
-          <a:bodyPr xmlns:a="http://schemas.openxmlformats.org/drawingml/2006/main" lIns="13320" tIns="-25920" rIns="13320" bIns="-25920" anchor="t">
-            <a:noAutofit/>
-          </a:bodyPr>
-          <a:lstStyle xmlns:a="http://schemas.openxmlformats.org/drawingml/2006/main"/>
-          <a:p xmlns:a="http://schemas.openxmlformats.org/drawingml/2006/main"/>
-        </p:txBody>
-      </p:sp>
-      <p:sp>
-        <p:nvSpPr>
-          <p:cNvPr id="398" name="Shape 8">
-            <a:extLst xmlns:a="http://schemas.openxmlformats.org/drawingml/2006/main">
-              <a:ext uri="{FF2B5EF4-FFF2-40B4-BE49-F238E27FC236}">
-                <a16:creationId xmlns:a16="http://schemas.microsoft.com/office/drawing/2014/main" id="{623DA0CC-7BFB-4ECF-9409-3831F3129947}"/>
-              </a:ext>
-            </a:extLst>
-          </p:cNvPr>
-          <p:cNvSpPr>
-            <a:spLocks xmlns:a="http://schemas.openxmlformats.org/drawingml/2006/main" noGrp="1"/>
-          </p:cNvSpPr>
-          <p:nvPr/>
-        </p:nvSpPr>
-        <p:spPr>
-          <a:xfrm xmlns:a="http://schemas.openxmlformats.org/drawingml/2006/main">
-            <a:off x="731520" y="5669280"/>
-            <a:ext cx="26640" cy="26640"/>
-          </a:xfrm>
-          <a:prstGeom xmlns:a="http://schemas.openxmlformats.org/drawingml/2006/main" prst="ellipse">
-            <a:avLst/>
-          </a:prstGeom>
-          <a:solidFill xmlns:a="http://schemas.openxmlformats.org/drawingml/2006/main">
-            <a:srgbClr val="FFFFFF">
-              <a:alpha val="55000"/>
-            </a:srgbClr>
-          </a:solidFill>
-          <a:ln xmlns:a="http://schemas.openxmlformats.org/drawingml/2006/main" w="0">
-            <a:noFill/>
-          </a:ln>
-        </p:spPr>
-        <p:style>
-          <a:lnRef xmlns:a="http://schemas.openxmlformats.org/drawingml/2006/main" idx="0"/>
-          <a:fillRef xmlns:a="http://schemas.openxmlformats.org/drawingml/2006/main" idx="0"/>
-          <a:effectRef xmlns:a="http://schemas.openxmlformats.org/drawingml/2006/main" idx="0"/>
-          <a:fontRef xmlns:a="http://schemas.openxmlformats.org/drawingml/2006/main" idx="minor"/>
-        </p:style>
-        <p:txBody>
-          <a:bodyPr xmlns:a="http://schemas.openxmlformats.org/drawingml/2006/main" lIns="13320" tIns="-25920" rIns="13320" bIns="-25920" anchor="t">
-            <a:noAutofit/>
-          </a:bodyPr>
-          <a:lstStyle xmlns:a="http://schemas.openxmlformats.org/drawingml/2006/main"/>
-          <a:p xmlns:a="http://schemas.openxmlformats.org/drawingml/2006/main"/>
-        </p:txBody>
-      </p:sp>
-      <p:sp>
-        <p:nvSpPr>
-          <p:cNvPr id="399" name="Shape 9">
-            <a:extLst xmlns:a="http://schemas.openxmlformats.org/drawingml/2006/main">
-              <a:ext uri="{FF2B5EF4-FFF2-40B4-BE49-F238E27FC236}">
-                <a16:creationId xmlns:a16="http://schemas.microsoft.com/office/drawing/2014/main" id="{BBB0BDEA-5923-4DA7-B4B8-DE366A49C23F}"/>
-              </a:ext>
-            </a:extLst>
-          </p:cNvPr>
-          <p:cNvSpPr>
-            <a:spLocks xmlns:a="http://schemas.openxmlformats.org/drawingml/2006/main" noGrp="1"/>
-          </p:cNvSpPr>
-          <p:nvPr/>
-        </p:nvSpPr>
-        <p:spPr>
-          <a:xfrm xmlns:a="http://schemas.openxmlformats.org/drawingml/2006/main">
-            <a:off x="2194560" y="6035040"/>
-            <a:ext cx="45000" cy="45000"/>
-          </a:xfrm>
-          <a:prstGeom xmlns:a="http://schemas.openxmlformats.org/drawingml/2006/main" prst="ellipse">
-            <a:avLst/>
-          </a:prstGeom>
-          <a:solidFill xmlns:a="http://schemas.openxmlformats.org/drawingml/2006/main">
-            <a:srgbClr val="FFFFFF">
-              <a:alpha val="35000"/>
-            </a:srgbClr>
-          </a:solidFill>
-          <a:ln xmlns:a="http://schemas.openxmlformats.org/drawingml/2006/main" w="0">
-            <a:noFill/>
-          </a:ln>
-        </p:spPr>
-        <p:style>
-          <a:lnRef xmlns:a="http://schemas.openxmlformats.org/drawingml/2006/main" idx="0"/>
-          <a:fillRef xmlns:a="http://schemas.openxmlformats.org/drawingml/2006/main" idx="0"/>
-          <a:effectRef xmlns:a="http://schemas.openxmlformats.org/drawingml/2006/main" idx="0"/>
-          <a:fontRef xmlns:a="http://schemas.openxmlformats.org/drawingml/2006/main" idx="minor"/>
-        </p:style>
-        <p:txBody>
-          <a:bodyPr xmlns:a="http://schemas.openxmlformats.org/drawingml/2006/main" lIns="22680" tIns="-12600" rIns="22680" bIns="-12600" anchor="t">
-            <a:noAutofit/>
-          </a:bodyPr>
-          <a:lstStyle xmlns:a="http://schemas.openxmlformats.org/drawingml/2006/main"/>
-          <a:p xmlns:a="http://schemas.openxmlformats.org/drawingml/2006/main"/>
-        </p:txBody>
-      </p:sp>
-      <p:sp>
-        <p:nvSpPr>
-          <p:cNvPr id="400" name="Shape 10">
-            <a:extLst xmlns:a="http://schemas.openxmlformats.org/drawingml/2006/main">
-              <a:ext uri="{FF2B5EF4-FFF2-40B4-BE49-F238E27FC236}">
-                <a16:creationId xmlns:a16="http://schemas.microsoft.com/office/drawing/2014/main" id="{1AC1EE80-79F6-41D6-B230-3F6502122F1A}"/>
-              </a:ext>
-            </a:extLst>
-          </p:cNvPr>
-          <p:cNvSpPr>
-            <a:spLocks xmlns:a="http://schemas.openxmlformats.org/drawingml/2006/main" noGrp="1"/>
-          </p:cNvSpPr>
-          <p:nvPr/>
-        </p:nvSpPr>
-        <p:spPr>
-          <a:xfrm xmlns:a="http://schemas.openxmlformats.org/drawingml/2006/main">
-            <a:off x="11612880" y="548640"/>
-            <a:ext cx="26640" cy="26640"/>
-          </a:xfrm>
-          <a:prstGeom xmlns:a="http://schemas.openxmlformats.org/drawingml/2006/main" prst="ellipse">
-            <a:avLst/>
-          </a:prstGeom>
-          <a:solidFill xmlns:a="http://schemas.openxmlformats.org/drawingml/2006/main">
-            <a:srgbClr val="FFFFFF">
-              <a:alpha val="55000"/>
-            </a:srgbClr>
-          </a:solidFill>
-          <a:ln xmlns:a="http://schemas.openxmlformats.org/drawingml/2006/main" w="0">
-            <a:noFill/>
-          </a:ln>
-        </p:spPr>
-        <p:style>
-          <a:lnRef xmlns:a="http://schemas.openxmlformats.org/drawingml/2006/main" idx="0"/>
-          <a:fillRef xmlns:a="http://schemas.openxmlformats.org/drawingml/2006/main" idx="0"/>
-          <a:effectRef xmlns:a="http://schemas.openxmlformats.org/drawingml/2006/main" idx="0"/>
-          <a:fontRef xmlns:a="http://schemas.openxmlformats.org/drawingml/2006/main" idx="minor"/>
-        </p:style>
-        <p:txBody>
-          <a:bodyPr xmlns:a="http://schemas.openxmlformats.org/drawingml/2006/main" lIns="13320" tIns="-25920" rIns="13320" bIns="-25920" anchor="t">
-            <a:noAutofit/>
-          </a:bodyPr>
-          <a:lstStyle xmlns:a="http://schemas.openxmlformats.org/drawingml/2006/main"/>
-          <a:p xmlns:a="http://schemas.openxmlformats.org/drawingml/2006/main"/>
-        </p:txBody>
-      </p:sp>
-      <p:sp>
-        <p:nvSpPr>
-          <p:cNvPr id="401" name="Shape 11">
-            <a:extLst xmlns:a="http://schemas.openxmlformats.org/drawingml/2006/main">
-              <a:ext uri="{FF2B5EF4-FFF2-40B4-BE49-F238E27FC236}">
-                <a16:creationId xmlns:a16="http://schemas.microsoft.com/office/drawing/2014/main" id="{85CF86A7-BE80-4CBA-AB14-F19D1950C316}"/>
-              </a:ext>
-            </a:extLst>
-          </p:cNvPr>
-          <p:cNvSpPr>
-            <a:spLocks xmlns:a="http://schemas.openxmlformats.org/drawingml/2006/main" noGrp="1"/>
-          </p:cNvSpPr>
-          <p:nvPr/>
-        </p:nvSpPr>
-        <p:spPr>
-          <a:xfrm xmlns:a="http://schemas.openxmlformats.org/drawingml/2006/main">
-            <a:off x="10881360" y="1280160"/>
-            <a:ext cx="26640" cy="26640"/>
-          </a:xfrm>
-          <a:prstGeom xmlns:a="http://schemas.openxmlformats.org/drawingml/2006/main" prst="ellipse">
-            <a:avLst/>
-          </a:prstGeom>
-          <a:solidFill xmlns:a="http://schemas.openxmlformats.org/drawingml/2006/main">
-            <a:srgbClr val="FFFFFF">
-              <a:alpha val="35000"/>
-            </a:srgbClr>
-          </a:solidFill>
-          <a:ln xmlns:a="http://schemas.openxmlformats.org/drawingml/2006/main" w="0">
-            <a:noFill/>
-          </a:ln>
-        </p:spPr>
-        <p:style>
-          <a:lnRef xmlns:a="http://schemas.openxmlformats.org/drawingml/2006/main" idx="0"/>
-          <a:fillRef xmlns:a="http://schemas.openxmlformats.org/drawingml/2006/main" idx="0"/>
-          <a:effectRef xmlns:a="http://schemas.openxmlformats.org/drawingml/2006/main" idx="0"/>
-          <a:fontRef xmlns:a="http://schemas.openxmlformats.org/drawingml/2006/main" idx="minor"/>
-        </p:style>
-        <p:txBody>
-          <a:bodyPr xmlns:a="http://schemas.openxmlformats.org/drawingml/2006/main" lIns="13320" tIns="-25920" rIns="13320" bIns="-25920" anchor="t">
-            <a:noAutofit/>
-          </a:bodyPr>
-          <a:lstStyle xmlns:a="http://schemas.openxmlformats.org/drawingml/2006/main"/>
-          <a:p xmlns:a="http://schemas.openxmlformats.org/drawingml/2006/main"/>
-        </p:txBody>
-      </p:sp>
-      <p:sp>
-        <p:nvSpPr>
-          <p:cNvPr id="402" name="Shape 12">
-            <a:extLst xmlns:a="http://schemas.openxmlformats.org/drawingml/2006/main">
-              <a:ext uri="{FF2B5EF4-FFF2-40B4-BE49-F238E27FC236}">
-                <a16:creationId xmlns:a16="http://schemas.microsoft.com/office/drawing/2014/main" id="{3F72594F-53CA-4499-89AA-1A8E4350A647}"/>
-              </a:ext>
-            </a:extLst>
-          </p:cNvPr>
-          <p:cNvSpPr>
-            <a:spLocks xmlns:a="http://schemas.openxmlformats.org/drawingml/2006/main" noGrp="1"/>
-          </p:cNvSpPr>
-          <p:nvPr/>
-        </p:nvSpPr>
-        <p:spPr>
-          <a:xfrm xmlns:a="http://schemas.openxmlformats.org/drawingml/2006/main">
-            <a:off x="11795760" y="2103120"/>
-            <a:ext cx="45000" cy="45000"/>
-          </a:xfrm>
-          <a:prstGeom xmlns:a="http://schemas.openxmlformats.org/drawingml/2006/main" prst="ellipse">
-            <a:avLst/>
-          </a:prstGeom>
-          <a:solidFill xmlns:a="http://schemas.openxmlformats.org/drawingml/2006/main">
-            <a:srgbClr val="FFFFFF">
-              <a:alpha val="55000"/>
-            </a:srgbClr>
-          </a:solidFill>
-          <a:ln xmlns:a="http://schemas.openxmlformats.org/drawingml/2006/main" w="0">
-            <a:noFill/>
-          </a:ln>
-        </p:spPr>
-        <p:style>
-          <a:lnRef xmlns:a="http://schemas.openxmlformats.org/drawingml/2006/main" idx="0"/>
-          <a:fillRef xmlns:a="http://schemas.openxmlformats.org/drawingml/2006/main" idx="0"/>
-          <a:effectRef xmlns:a="http://schemas.openxmlformats.org/drawingml/2006/main" idx="0"/>
-          <a:fontRef xmlns:a="http://schemas.openxmlformats.org/drawingml/2006/main" idx="minor"/>
-        </p:style>
-        <p:txBody>
-          <a:bodyPr xmlns:a="http://schemas.openxmlformats.org/drawingml/2006/main" lIns="22680" tIns="-12600" rIns="22680" bIns="-12600" anchor="t">
-            <a:noAutofit/>
-          </a:bodyPr>
-          <a:lstStyle xmlns:a="http://schemas.openxmlformats.org/drawingml/2006/main"/>
-          <a:p xmlns:a="http://schemas.openxmlformats.org/drawingml/2006/main"/>
-        </p:txBody>
-      </p:sp>
-      <p:sp>
-        <p:nvSpPr>
-          <p:cNvPr id="403" name="Shape 13">
-            <a:extLst xmlns:a="http://schemas.openxmlformats.org/drawingml/2006/main">
-              <a:ext uri="{FF2B5EF4-FFF2-40B4-BE49-F238E27FC236}">
-                <a16:creationId xmlns:a16="http://schemas.microsoft.com/office/drawing/2014/main" id="{D1E7E4F0-5324-46BD-BD96-8E9CADA62927}"/>
-              </a:ext>
-            </a:extLst>
-          </p:cNvPr>
-          <p:cNvSpPr>
-            <a:spLocks xmlns:a="http://schemas.openxmlformats.org/drawingml/2006/main" noGrp="1"/>
-          </p:cNvSpPr>
-          <p:nvPr/>
-        </p:nvSpPr>
-        <p:spPr>
-          <a:xfrm xmlns:a="http://schemas.openxmlformats.org/drawingml/2006/main">
-            <a:off x="11247120" y="2926080"/>
-            <a:ext cx="26640" cy="26640"/>
-          </a:xfrm>
-          <a:prstGeom xmlns:a="http://schemas.openxmlformats.org/drawingml/2006/main" prst="ellipse">
-            <a:avLst/>
-          </a:prstGeom>
-          <a:solidFill xmlns:a="http://schemas.openxmlformats.org/drawingml/2006/main">
-            <a:srgbClr val="FFFFFF">
-              <a:alpha val="35000"/>
-            </a:srgbClr>
-          </a:solidFill>
-          <a:ln xmlns:a="http://schemas.openxmlformats.org/drawingml/2006/main" w="0">
-            <a:noFill/>
-          </a:ln>
-        </p:spPr>
-        <p:style>
-          <a:lnRef xmlns:a="http://schemas.openxmlformats.org/drawingml/2006/main" idx="0"/>
-          <a:fillRef xmlns:a="http://schemas.openxmlformats.org/drawingml/2006/main" idx="0"/>
-          <a:effectRef xmlns:a="http://schemas.openxmlformats.org/drawingml/2006/main" idx="0"/>
-          <a:fontRef xmlns:a="http://schemas.openxmlformats.org/drawingml/2006/main" idx="minor"/>
-        </p:style>
-        <p:txBody>
-          <a:bodyPr xmlns:a="http://schemas.openxmlformats.org/drawingml/2006/main" lIns="13320" tIns="-25920" rIns="13320" bIns="-25920" anchor="t">
-            <a:noAutofit/>
-          </a:bodyPr>
-          <a:lstStyle xmlns:a="http://schemas.openxmlformats.org/drawingml/2006/main"/>
-          <a:p xmlns:a="http://schemas.openxmlformats.org/drawingml/2006/main"/>
-        </p:txBody>
-      </p:sp>
-      <p:sp>
-        <p:nvSpPr>
-          <p:cNvPr id="404" name="Shape 14">
-            <a:extLst xmlns:a="http://schemas.openxmlformats.org/drawingml/2006/main">
-              <a:ext uri="{FF2B5EF4-FFF2-40B4-BE49-F238E27FC236}">
-                <a16:creationId xmlns:a16="http://schemas.microsoft.com/office/drawing/2014/main" id="{749114D4-15C0-4C68-8F3B-A0835F0BE338}"/>
-              </a:ext>
-            </a:extLst>
-          </p:cNvPr>
-          <p:cNvSpPr>
-            <a:spLocks xmlns:a="http://schemas.openxmlformats.org/drawingml/2006/main" noGrp="1"/>
-          </p:cNvSpPr>
-          <p:nvPr/>
-        </p:nvSpPr>
-        <p:spPr>
-          <a:xfrm xmlns:a="http://schemas.openxmlformats.org/drawingml/2006/main">
-            <a:off x="11704320" y="3749040"/>
-            <a:ext cx="26640" cy="26640"/>
-          </a:xfrm>
-          <a:prstGeom xmlns:a="http://schemas.openxmlformats.org/drawingml/2006/main" prst="ellipse">
-            <a:avLst/>
-          </a:prstGeom>
-          <a:solidFill xmlns:a="http://schemas.openxmlformats.org/drawingml/2006/main">
-            <a:srgbClr val="FFFFFF">
-              <a:alpha val="55000"/>
-            </a:srgbClr>
-          </a:solidFill>
-          <a:ln xmlns:a="http://schemas.openxmlformats.org/drawingml/2006/main" w="0">
-            <a:noFill/>
-          </a:ln>
-        </p:spPr>
-        <p:style>
-          <a:lnRef xmlns:a="http://schemas.openxmlformats.org/drawingml/2006/main" idx="0"/>
-          <a:fillRef xmlns:a="http://schemas.openxmlformats.org/drawingml/2006/main" idx="0"/>
-          <a:effectRef xmlns:a="http://schemas.openxmlformats.org/drawingml/2006/main" idx="0"/>
-          <a:fontRef xmlns:a="http://schemas.openxmlformats.org/drawingml/2006/main" idx="minor"/>
-        </p:style>
-        <p:txBody>
-          <a:bodyPr xmlns:a="http://schemas.openxmlformats.org/drawingml/2006/main" lIns="13320" tIns="-25920" rIns="13320" bIns="-25920" anchor="t">
-            <a:noAutofit/>
-          </a:bodyPr>
-          <a:lstStyle xmlns:a="http://schemas.openxmlformats.org/drawingml/2006/main"/>
-          <a:p xmlns:a="http://schemas.openxmlformats.org/drawingml/2006/main"/>
-        </p:txBody>
-      </p:sp>
-      <p:sp>
-        <p:nvSpPr>
-          <p:cNvPr id="405" name="Shape 15">
-            <a:extLst xmlns:a="http://schemas.openxmlformats.org/drawingml/2006/main">
-              <a:ext uri="{FF2B5EF4-FFF2-40B4-BE49-F238E27FC236}">
-                <a16:creationId xmlns:a16="http://schemas.microsoft.com/office/drawing/2014/main" id="{7D6021B1-DB58-4779-8E37-021FD32E2062}"/>
-              </a:ext>
-            </a:extLst>
-          </p:cNvPr>
-          <p:cNvSpPr>
-            <a:spLocks xmlns:a="http://schemas.openxmlformats.org/drawingml/2006/main" noGrp="1"/>
-          </p:cNvSpPr>
-          <p:nvPr/>
-        </p:nvSpPr>
-        <p:spPr>
-          <a:xfrm xmlns:a="http://schemas.openxmlformats.org/drawingml/2006/main">
-            <a:off x="11064240" y="4572000"/>
-            <a:ext cx="45000" cy="45000"/>
-          </a:xfrm>
-          <a:prstGeom xmlns:a="http://schemas.openxmlformats.org/drawingml/2006/main" prst="ellipse">
-            <a:avLst/>
-          </a:prstGeom>
-          <a:solidFill xmlns:a="http://schemas.openxmlformats.org/drawingml/2006/main">
-            <a:srgbClr val="FFFFFF">
-              <a:alpha val="35000"/>
-            </a:srgbClr>
-          </a:solidFill>
-          <a:ln xmlns:a="http://schemas.openxmlformats.org/drawingml/2006/main" w="0">
-            <a:noFill/>
-          </a:ln>
-        </p:spPr>
-        <p:style>
-          <a:lnRef xmlns:a="http://schemas.openxmlformats.org/drawingml/2006/main" idx="0"/>
-          <a:fillRef xmlns:a="http://schemas.openxmlformats.org/drawingml/2006/main" idx="0"/>
-          <a:effectRef xmlns:a="http://schemas.openxmlformats.org/drawingml/2006/main" idx="0"/>
-          <a:fontRef xmlns:a="http://schemas.openxmlformats.org/drawingml/2006/main" idx="minor"/>
-        </p:style>
-        <p:txBody>
-          <a:bodyPr xmlns:a="http://schemas.openxmlformats.org/drawingml/2006/main" lIns="22680" tIns="-12600" rIns="22680" bIns="-12600" anchor="t">
-            <a:noAutofit/>
-          </a:bodyPr>
-          <a:lstStyle xmlns:a="http://schemas.openxmlformats.org/drawingml/2006/main"/>
-          <a:p xmlns:a="http://schemas.openxmlformats.org/drawingml/2006/main"/>
-        </p:txBody>
-      </p:sp>
-      <p:sp>
-        <p:nvSpPr>
-          <p:cNvPr id="406" name="Shape 16">
-            <a:extLst xmlns:a="http://schemas.openxmlformats.org/drawingml/2006/main">
-              <a:ext uri="{FF2B5EF4-FFF2-40B4-BE49-F238E27FC236}">
-                <a16:creationId xmlns:a16="http://schemas.microsoft.com/office/drawing/2014/main" id="{29AC4662-131E-4ABC-9F4B-81BB9126BA60}"/>
-              </a:ext>
-            </a:extLst>
-          </p:cNvPr>
-          <p:cNvSpPr>
-            <a:spLocks xmlns:a="http://schemas.openxmlformats.org/drawingml/2006/main" noGrp="1"/>
-          </p:cNvSpPr>
-          <p:nvPr/>
-        </p:nvSpPr>
-        <p:spPr>
-          <a:xfrm xmlns:a="http://schemas.openxmlformats.org/drawingml/2006/main">
-            <a:off x="11521440" y="5394960"/>
-            <a:ext cx="26640" cy="26640"/>
-          </a:xfrm>
-          <a:prstGeom xmlns:a="http://schemas.openxmlformats.org/drawingml/2006/main" prst="ellipse">
-            <a:avLst/>
-          </a:prstGeom>
-          <a:solidFill xmlns:a="http://schemas.openxmlformats.org/drawingml/2006/main">
-            <a:srgbClr val="FFFFFF">
-              <a:alpha val="55000"/>
-            </a:srgbClr>
-          </a:solidFill>
-          <a:ln xmlns:a="http://schemas.openxmlformats.org/drawingml/2006/main" w="0">
-            <a:noFill/>
-          </a:ln>
-        </p:spPr>
-        <p:style>
-          <a:lnRef xmlns:a="http://schemas.openxmlformats.org/drawingml/2006/main" idx="0"/>
-          <a:fillRef xmlns:a="http://schemas.openxmlformats.org/drawingml/2006/main" idx="0"/>
-          <a:effectRef xmlns:a="http://schemas.openxmlformats.org/drawingml/2006/main" idx="0"/>
-          <a:fontRef xmlns:a="http://schemas.openxmlformats.org/drawingml/2006/main" idx="minor"/>
-        </p:style>
-        <p:txBody>
-          <a:bodyPr xmlns:a="http://schemas.openxmlformats.org/drawingml/2006/main" lIns="13320" tIns="-25920" rIns="13320" bIns="-25920" anchor="t">
-            <a:noAutofit/>
-          </a:bodyPr>
-          <a:lstStyle xmlns:a="http://schemas.openxmlformats.org/drawingml/2006/main"/>
-          <a:p xmlns:a="http://schemas.openxmlformats.org/drawingml/2006/main"/>
-        </p:txBody>
-      </p:sp>
-      <p:sp>
-        <p:nvSpPr>
-          <p:cNvPr id="407" name="Shape 17">
-            <a:extLst xmlns:a="http://schemas.openxmlformats.org/drawingml/2006/main">
-              <a:ext uri="{FF2B5EF4-FFF2-40B4-BE49-F238E27FC236}">
-                <a16:creationId xmlns:a16="http://schemas.microsoft.com/office/drawing/2014/main" id="{4A22F7C8-2691-4C03-9CB6-8CDEDB4C030E}"/>
-              </a:ext>
-            </a:extLst>
-          </p:cNvPr>
-          <p:cNvSpPr>
-            <a:spLocks xmlns:a="http://schemas.openxmlformats.org/drawingml/2006/main" noGrp="1"/>
-          </p:cNvSpPr>
-          <p:nvPr/>
-        </p:nvSpPr>
-        <p:spPr>
-          <a:xfrm xmlns:a="http://schemas.openxmlformats.org/drawingml/2006/main">
-            <a:off x="10607040" y="5943600"/>
-            <a:ext cx="26640" cy="26640"/>
-          </a:xfrm>
-          <a:prstGeom xmlns:a="http://schemas.openxmlformats.org/drawingml/2006/main" prst="ellipse">
-            <a:avLst/>
-          </a:prstGeom>
-          <a:solidFill xmlns:a="http://schemas.openxmlformats.org/drawingml/2006/main">
-            <a:srgbClr val="FFFFFF">
-              <a:alpha val="35000"/>
-            </a:srgbClr>
-          </a:solidFill>
-          <a:ln xmlns:a="http://schemas.openxmlformats.org/drawingml/2006/main" w="0">
-            <a:noFill/>
-          </a:ln>
-        </p:spPr>
-        <p:style>
-          <a:lnRef xmlns:a="http://schemas.openxmlformats.org/drawingml/2006/main" idx="0"/>
-          <a:fillRef xmlns:a="http://schemas.openxmlformats.org/drawingml/2006/main" idx="0"/>
-          <a:effectRef xmlns:a="http://schemas.openxmlformats.org/drawingml/2006/main" idx="0"/>
-          <a:fontRef xmlns:a="http://schemas.openxmlformats.org/drawingml/2006/main" idx="minor"/>
-        </p:style>
-        <p:txBody>
-          <a:bodyPr xmlns:a="http://schemas.openxmlformats.org/drawingml/2006/main" lIns="13320" tIns="-25920" rIns="13320" bIns="-25920" anchor="t">
-            <a:noAutofit/>
-          </a:bodyPr>
-          <a:lstStyle xmlns:a="http://schemas.openxmlformats.org/drawingml/2006/main"/>
-          <a:p xmlns:a="http://schemas.openxmlformats.org/drawingml/2006/main"/>
-        </p:txBody>
-      </p:sp>
-      <p:sp>
-        <p:nvSpPr>
-          <p:cNvPr id="408" name="Shape 18">
-            <a:extLst xmlns:a="http://schemas.openxmlformats.org/drawingml/2006/main">
-              <a:ext uri="{FF2B5EF4-FFF2-40B4-BE49-F238E27FC236}">
-                <a16:creationId xmlns:a16="http://schemas.microsoft.com/office/drawing/2014/main" id="{A2E9BDEF-37F9-4698-94E9-158BA351D153}"/>
-              </a:ext>
-            </a:extLst>
-          </p:cNvPr>
-          <p:cNvSpPr>
-            <a:spLocks xmlns:a="http://schemas.openxmlformats.org/drawingml/2006/main" noGrp="1"/>
-          </p:cNvSpPr>
-          <p:nvPr/>
-        </p:nvSpPr>
-        <p:spPr>
-          <a:xfrm xmlns:a="http://schemas.openxmlformats.org/drawingml/2006/main">
-            <a:off x="9875520" y="457200"/>
-            <a:ext cx="45000" cy="45000"/>
-          </a:xfrm>
-          <a:prstGeom xmlns:a="http://schemas.openxmlformats.org/drawingml/2006/main" prst="ellipse">
-            <a:avLst/>
-          </a:prstGeom>
-          <a:solidFill xmlns:a="http://schemas.openxmlformats.org/drawingml/2006/main">
-            <a:srgbClr val="FFFFFF">
-              <a:alpha val="55000"/>
-            </a:srgbClr>
-          </a:solidFill>
-          <a:ln xmlns:a="http://schemas.openxmlformats.org/drawingml/2006/main" w="0">
-            <a:noFill/>
-          </a:ln>
-        </p:spPr>
-        <p:style>
-          <a:lnRef xmlns:a="http://schemas.openxmlformats.org/drawingml/2006/main" idx="0"/>
-          <a:fillRef xmlns:a="http://schemas.openxmlformats.org/drawingml/2006/main" idx="0"/>
-          <a:effectRef xmlns:a="http://schemas.openxmlformats.org/drawingml/2006/main" idx="0"/>
-          <a:fontRef xmlns:a="http://schemas.openxmlformats.org/drawingml/2006/main" idx="minor"/>
-        </p:style>
-        <p:txBody>
-          <a:bodyPr xmlns:a="http://schemas.openxmlformats.org/drawingml/2006/main" lIns="22680" tIns="-12600" rIns="22680" bIns="-12600" anchor="t">
-            <a:noAutofit/>
-          </a:bodyPr>
-          <a:lstStyle xmlns:a="http://schemas.openxmlformats.org/drawingml/2006/main"/>
-          <a:p xmlns:a="http://schemas.openxmlformats.org/drawingml/2006/main"/>
-        </p:txBody>
-      </p:sp>
-      <p:sp>
-        <p:nvSpPr>
-          <p:cNvPr id="409" name="Shape 19">
-            <a:extLst xmlns:a="http://schemas.openxmlformats.org/drawingml/2006/main">
-              <a:ext uri="{FF2B5EF4-FFF2-40B4-BE49-F238E27FC236}">
-                <a16:creationId xmlns:a16="http://schemas.microsoft.com/office/drawing/2014/main" id="{5BF83A0D-27F0-46C2-B1DF-FCDDCC4738EC}"/>
-              </a:ext>
-            </a:extLst>
-          </p:cNvPr>
-          <p:cNvSpPr>
-            <a:spLocks xmlns:a="http://schemas.openxmlformats.org/drawingml/2006/main" noGrp="1"/>
-          </p:cNvSpPr>
-          <p:nvPr/>
-        </p:nvSpPr>
-        <p:spPr>
-          <a:xfrm xmlns:a="http://schemas.openxmlformats.org/drawingml/2006/main">
-            <a:off x="9052560" y="731520"/>
-            <a:ext cx="26640" cy="26640"/>
-          </a:xfrm>
-          <a:prstGeom xmlns:a="http://schemas.openxmlformats.org/drawingml/2006/main" prst="ellipse">
-            <a:avLst/>
-          </a:prstGeom>
-          <a:solidFill xmlns:a="http://schemas.openxmlformats.org/drawingml/2006/main">
-            <a:srgbClr val="FFFFFF">
-              <a:alpha val="35000"/>
-            </a:srgbClr>
-          </a:solidFill>
-          <a:ln xmlns:a="http://schemas.openxmlformats.org/drawingml/2006/main" w="0">
-            <a:noFill/>
-          </a:ln>
-        </p:spPr>
-        <p:style>
-          <a:lnRef xmlns:a="http://schemas.openxmlformats.org/drawingml/2006/main" idx="0"/>
-          <a:fillRef xmlns:a="http://schemas.openxmlformats.org/drawingml/2006/main" idx="0"/>
-          <a:effectRef xmlns:a="http://schemas.openxmlformats.org/drawingml/2006/main" idx="0"/>
-          <a:fontRef xmlns:a="http://schemas.openxmlformats.org/drawingml/2006/main" idx="minor"/>
-        </p:style>
-        <p:txBody>
-          <a:bodyPr xmlns:a="http://schemas.openxmlformats.org/drawingml/2006/main" lIns="13320" tIns="-25920" rIns="13320" bIns="-25920" anchor="t">
-            <a:noAutofit/>
-          </a:bodyPr>
-          <a:lstStyle xmlns:a="http://schemas.openxmlformats.org/drawingml/2006/main"/>
-          <a:p xmlns:a="http://schemas.openxmlformats.org/drawingml/2006/main"/>
-        </p:txBody>
-      </p:sp>
-      <p:sp>
-        <p:nvSpPr>
-          <p:cNvPr id="410" name="Shape 20">
-            <a:extLst xmlns:a="http://schemas.openxmlformats.org/drawingml/2006/main">
-              <a:ext uri="{FF2B5EF4-FFF2-40B4-BE49-F238E27FC236}">
-                <a16:creationId xmlns:a16="http://schemas.microsoft.com/office/drawing/2014/main" id="{66C77E29-F312-4F2E-BA4D-1B5C992C2769}"/>
-              </a:ext>
-            </a:extLst>
-          </p:cNvPr>
-          <p:cNvSpPr>
-            <a:spLocks xmlns:a="http://schemas.openxmlformats.org/drawingml/2006/main" noGrp="1"/>
-          </p:cNvSpPr>
-          <p:nvPr/>
-        </p:nvSpPr>
-        <p:spPr>
-          <a:xfrm xmlns:a="http://schemas.openxmlformats.org/drawingml/2006/main">
-            <a:off x="6126480" y="365760"/>
-            <a:ext cx="26640" cy="26640"/>
-          </a:xfrm>
-          <a:prstGeom xmlns:a="http://schemas.openxmlformats.org/drawingml/2006/main" prst="ellipse">
-            <a:avLst/>
-          </a:prstGeom>
-          <a:solidFill xmlns:a="http://schemas.openxmlformats.org/drawingml/2006/main">
-            <a:srgbClr val="FFFFFF">
-              <a:alpha val="55000"/>
-            </a:srgbClr>
-          </a:solidFill>
-          <a:ln xmlns:a="http://schemas.openxmlformats.org/drawingml/2006/main" w="0">
-            <a:noFill/>
-          </a:ln>
-        </p:spPr>
-        <p:style>
-          <a:lnRef xmlns:a="http://schemas.openxmlformats.org/drawingml/2006/main" idx="0"/>
-          <a:fillRef xmlns:a="http://schemas.openxmlformats.org/drawingml/2006/main" idx="0"/>
-          <a:effectRef xmlns:a="http://schemas.openxmlformats.org/drawingml/2006/main" idx="0"/>
-          <a:fontRef xmlns:a="http://schemas.openxmlformats.org/drawingml/2006/main" idx="minor"/>
-        </p:style>
-        <p:txBody>
-          <a:bodyPr xmlns:a="http://schemas.openxmlformats.org/drawingml/2006/main" lIns="13320" tIns="-25920" rIns="13320" bIns="-25920" anchor="t">
-            <a:noAutofit/>
-          </a:bodyPr>
-          <a:lstStyle xmlns:a="http://schemas.openxmlformats.org/drawingml/2006/main"/>
-          <a:p xmlns:a="http://schemas.openxmlformats.org/drawingml/2006/main"/>
-        </p:txBody>
-      </p:sp>
-      <p:sp>
-        <p:nvSpPr>
-          <p:cNvPr id="411" name="Shape 21">
-            <a:extLst xmlns:a="http://schemas.openxmlformats.org/drawingml/2006/main">
-              <a:ext uri="{FF2B5EF4-FFF2-40B4-BE49-F238E27FC236}">
-                <a16:creationId xmlns:a16="http://schemas.microsoft.com/office/drawing/2014/main" id="{4F8D3981-4C68-4C2C-BE24-7263DA1EC162}"/>
-              </a:ext>
-            </a:extLst>
-          </p:cNvPr>
-          <p:cNvSpPr>
-            <a:spLocks xmlns:a="http://schemas.openxmlformats.org/drawingml/2006/main" noGrp="1"/>
-          </p:cNvSpPr>
-          <p:nvPr/>
-        </p:nvSpPr>
-        <p:spPr>
-          <a:xfrm xmlns:a="http://schemas.openxmlformats.org/drawingml/2006/main">
-            <a:off x="4206240" y="548640"/>
-            <a:ext cx="45000" cy="45000"/>
-          </a:xfrm>
-          <a:prstGeom xmlns:a="http://schemas.openxmlformats.org/drawingml/2006/main" prst="ellipse">
-            <a:avLst/>
-          </a:prstGeom>
-          <a:solidFill xmlns:a="http://schemas.openxmlformats.org/drawingml/2006/main">
-            <a:srgbClr val="FFFFFF">
-              <a:alpha val="35000"/>
-            </a:srgbClr>
-          </a:solidFill>
-          <a:ln xmlns:a="http://schemas.openxmlformats.org/drawingml/2006/main" w="0">
-            <a:noFill/>
-          </a:ln>
-        </p:spPr>
-        <p:style>
-          <a:lnRef xmlns:a="http://schemas.openxmlformats.org/drawingml/2006/main" idx="0"/>
-          <a:fillRef xmlns:a="http://schemas.openxmlformats.org/drawingml/2006/main" idx="0"/>
-          <a:effectRef xmlns:a="http://schemas.openxmlformats.org/drawingml/2006/main" idx="0"/>
-          <a:fontRef xmlns:a="http://schemas.openxmlformats.org/drawingml/2006/main" idx="minor"/>
-        </p:style>
-        <p:txBody>
-          <a:bodyPr xmlns:a="http://schemas.openxmlformats.org/drawingml/2006/main" lIns="22680" tIns="-12600" rIns="22680" bIns="-12600" anchor="t">
-            <a:noAutofit/>
-          </a:bodyPr>
-          <a:lstStyle xmlns:a="http://schemas.openxmlformats.org/drawingml/2006/main"/>
-          <a:p xmlns:a="http://schemas.openxmlformats.org/drawingml/2006/main"/>
-        </p:txBody>
-      </p:sp>
-      <p:sp>
-        <p:nvSpPr>
-          <p:cNvPr id="412" name="Shape 22">
-            <a:extLst xmlns:a="http://schemas.openxmlformats.org/drawingml/2006/main">
-              <a:ext uri="{FF2B5EF4-FFF2-40B4-BE49-F238E27FC236}">
-                <a16:creationId xmlns:a16="http://schemas.microsoft.com/office/drawing/2014/main" id="{2FA917AD-58D6-4687-9BA9-21F7DC5660B0}"/>
-              </a:ext>
-            </a:extLst>
-          </p:cNvPr>
-          <p:cNvSpPr>
-            <a:spLocks xmlns:a="http://schemas.openxmlformats.org/drawingml/2006/main" noGrp="1"/>
-          </p:cNvSpPr>
-          <p:nvPr/>
-        </p:nvSpPr>
-        <p:spPr>
-          <a:xfrm xmlns:a="http://schemas.openxmlformats.org/drawingml/2006/main">
-            <a:off x="7406640" y="640080"/>
-            <a:ext cx="26640" cy="26640"/>
-          </a:xfrm>
-          <a:prstGeom xmlns:a="http://schemas.openxmlformats.org/drawingml/2006/main" prst="ellipse">
-            <a:avLst/>
-          </a:prstGeom>
-          <a:solidFill xmlns:a="http://schemas.openxmlformats.org/drawingml/2006/main">
-            <a:srgbClr val="FFFFFF">
-              <a:alpha val="55000"/>
-            </a:srgbClr>
-          </a:solidFill>
-          <a:ln xmlns:a="http://schemas.openxmlformats.org/drawingml/2006/main" w="0">
-            <a:noFill/>
-          </a:ln>
-        </p:spPr>
-        <p:style>
-          <a:lnRef xmlns:a="http://schemas.openxmlformats.org/drawingml/2006/main" idx="0"/>
-          <a:fillRef xmlns:a="http://schemas.openxmlformats.org/drawingml/2006/main" idx="0"/>
-          <a:effectRef xmlns:a="http://schemas.openxmlformats.org/drawingml/2006/main" idx="0"/>
-          <a:fontRef xmlns:a="http://schemas.openxmlformats.org/drawingml/2006/main" idx="minor"/>
-        </p:style>
-        <p:txBody>
-          <a:bodyPr xmlns:a="http://schemas.openxmlformats.org/drawingml/2006/main" lIns="13320" tIns="-25920" rIns="13320" bIns="-25920" anchor="t">
-            <a:noAutofit/>
-          </a:bodyPr>
-          <a:lstStyle xmlns:a="http://schemas.openxmlformats.org/drawingml/2006/main"/>
-          <a:p xmlns:a="http://schemas.openxmlformats.org/drawingml/2006/main"/>
-        </p:txBody>
-      </p:sp>
-      <p:sp>
-        <p:nvSpPr>
-          <p:cNvPr id="413" name="Shape 23">
-            <a:extLst xmlns:a="http://schemas.openxmlformats.org/drawingml/2006/main">
-              <a:ext uri="{FF2B5EF4-FFF2-40B4-BE49-F238E27FC236}">
-                <a16:creationId xmlns:a16="http://schemas.microsoft.com/office/drawing/2014/main" id="{9F2BE04A-96DB-4DAF-8594-EE0425A3B091}"/>
-              </a:ext>
-            </a:extLst>
-          </p:cNvPr>
-          <p:cNvSpPr>
-            <a:spLocks xmlns:a="http://schemas.openxmlformats.org/drawingml/2006/main" noGrp="1"/>
-          </p:cNvSpPr>
-          <p:nvPr/>
-        </p:nvSpPr>
-        <p:spPr>
-          <a:xfrm xmlns:a="http://schemas.openxmlformats.org/drawingml/2006/main">
-            <a:off x="3566160" y="6126480"/>
-            <a:ext cx="26640" cy="26640"/>
-          </a:xfrm>
-          <a:prstGeom xmlns:a="http://schemas.openxmlformats.org/drawingml/2006/main" prst="ellipse">
-            <a:avLst/>
-          </a:prstGeom>
-          <a:solidFill xmlns:a="http://schemas.openxmlformats.org/drawingml/2006/main">
-            <a:srgbClr val="FFFFFF">
-              <a:alpha val="35000"/>
-            </a:srgbClr>
-          </a:solidFill>
-          <a:ln xmlns:a="http://schemas.openxmlformats.org/drawingml/2006/main" w="0">
-            <a:noFill/>
-          </a:ln>
-        </p:spPr>
-        <p:style>
-          <a:lnRef xmlns:a="http://schemas.openxmlformats.org/drawingml/2006/main" idx="0"/>
-          <a:fillRef xmlns:a="http://schemas.openxmlformats.org/drawingml/2006/main" idx="0"/>
-          <a:effectRef xmlns:a="http://schemas.openxmlformats.org/drawingml/2006/main" idx="0"/>
-          <a:fontRef xmlns:a="http://schemas.openxmlformats.org/drawingml/2006/main" idx="minor"/>
-        </p:style>
-        <p:txBody>
-          <a:bodyPr xmlns:a="http://schemas.openxmlformats.org/drawingml/2006/main" lIns="13320" tIns="-25920" rIns="13320" bIns="-25920" anchor="t">
-            <a:noAutofit/>
-          </a:bodyPr>
-          <a:lstStyle xmlns:a="http://schemas.openxmlformats.org/drawingml/2006/main"/>
-          <a:p xmlns:a="http://schemas.openxmlformats.org/drawingml/2006/main"/>
-        </p:txBody>
-      </p:sp>
-      <p:sp>
-        <p:nvSpPr>
-          <p:cNvPr id="414" name="Shape 24">
-            <a:extLst xmlns:a="http://schemas.openxmlformats.org/drawingml/2006/main">
-              <a:ext uri="{FF2B5EF4-FFF2-40B4-BE49-F238E27FC236}">
-                <a16:creationId xmlns:a16="http://schemas.microsoft.com/office/drawing/2014/main" id="{59F7FFA8-2B65-441E-972F-FABB0044076D}"/>
-              </a:ext>
-            </a:extLst>
-          </p:cNvPr>
-          <p:cNvSpPr>
-            <a:spLocks xmlns:a="http://schemas.openxmlformats.org/drawingml/2006/main" noGrp="1"/>
-          </p:cNvSpPr>
-          <p:nvPr/>
-        </p:nvSpPr>
-        <p:spPr>
-          <a:xfrm xmlns:a="http://schemas.openxmlformats.org/drawingml/2006/main">
-            <a:off x="5120640" y="6217920"/>
-            <a:ext cx="45000" cy="45000"/>
-          </a:xfrm>
-          <a:prstGeom xmlns:a="http://schemas.openxmlformats.org/drawingml/2006/main" prst="ellipse">
-            <a:avLst/>
-          </a:prstGeom>
-          <a:solidFill xmlns:a="http://schemas.openxmlformats.org/drawingml/2006/main">
-            <a:srgbClr val="FFFFFF">
-              <a:alpha val="55000"/>
-            </a:srgbClr>
-          </a:solidFill>
-          <a:ln xmlns:a="http://schemas.openxmlformats.org/drawingml/2006/main" w="0">
-            <a:noFill/>
-          </a:ln>
-        </p:spPr>
-        <p:style>
-          <a:lnRef xmlns:a="http://schemas.openxmlformats.org/drawingml/2006/main" idx="0"/>
-          <a:fillRef xmlns:a="http://schemas.openxmlformats.org/drawingml/2006/main" idx="0"/>
-          <a:effectRef xmlns:a="http://schemas.openxmlformats.org/drawingml/2006/main" idx="0"/>
-          <a:fontRef xmlns:a="http://schemas.openxmlformats.org/drawingml/2006/main" idx="minor"/>
-        </p:style>
-        <p:txBody>
-          <a:bodyPr xmlns:a="http://schemas.openxmlformats.org/drawingml/2006/main" lIns="22680" tIns="-12600" rIns="22680" bIns="-12600" anchor="t">
-            <a:noAutofit/>
-          </a:bodyPr>
-          <a:lstStyle xmlns:a="http://schemas.openxmlformats.org/drawingml/2006/main"/>
-          <a:p xmlns:a="http://schemas.openxmlformats.org/drawingml/2006/main"/>
-        </p:txBody>
-      </p:sp>
-      <p:sp>
-        <p:nvSpPr>
-          <p:cNvPr id="415" name="Shape 25">
-            <a:extLst xmlns:a="http://schemas.openxmlformats.org/drawingml/2006/main">
-              <a:ext uri="{FF2B5EF4-FFF2-40B4-BE49-F238E27FC236}">
-                <a16:creationId xmlns:a16="http://schemas.microsoft.com/office/drawing/2014/main" id="{E1F3D0F3-7737-462F-93CC-E98425C6A371}"/>
-              </a:ext>
-            </a:extLst>
-          </p:cNvPr>
-          <p:cNvSpPr>
-            <a:spLocks xmlns:a="http://schemas.openxmlformats.org/drawingml/2006/main" noGrp="1"/>
-          </p:cNvSpPr>
-          <p:nvPr/>
-        </p:nvSpPr>
-        <p:spPr>
-          <a:xfrm xmlns:a="http://schemas.openxmlformats.org/drawingml/2006/main">
-            <a:off x="6675120" y="6035040"/>
-            <a:ext cx="26640" cy="26640"/>
-          </a:xfrm>
-          <a:prstGeom xmlns:a="http://schemas.openxmlformats.org/drawingml/2006/main" prst="ellipse">
-            <a:avLst/>
-          </a:prstGeom>
-          <a:solidFill xmlns:a="http://schemas.openxmlformats.org/drawingml/2006/main">
-            <a:srgbClr val="FFFFFF">
-              <a:alpha val="35000"/>
-            </a:srgbClr>
-          </a:solidFill>
-          <a:ln xmlns:a="http://schemas.openxmlformats.org/drawingml/2006/main" w="0">
-            <a:noFill/>
-          </a:ln>
-        </p:spPr>
-        <p:style>
-          <a:lnRef xmlns:a="http://schemas.openxmlformats.org/drawingml/2006/main" idx="0"/>
-          <a:fillRef xmlns:a="http://schemas.openxmlformats.org/drawingml/2006/main" idx="0"/>
-          <a:effectRef xmlns:a="http://schemas.openxmlformats.org/drawingml/2006/main" idx="0"/>
-          <a:fontRef xmlns:a="http://schemas.openxmlformats.org/drawingml/2006/main" idx="minor"/>
-        </p:style>
-        <p:txBody>
-          <a:bodyPr xmlns:a="http://schemas.openxmlformats.org/drawingml/2006/main" lIns="13320" tIns="-25920" rIns="13320" bIns="-25920" anchor="t">
-            <a:noAutofit/>
-          </a:bodyPr>
-          <a:lstStyle xmlns:a="http://schemas.openxmlformats.org/drawingml/2006/main"/>
-          <a:p xmlns:a="http://schemas.openxmlformats.org/drawingml/2006/main"/>
-        </p:txBody>
-      </p:sp>
-      <p:sp>
-        <p:nvSpPr>
-          <p:cNvPr id="416" name="Shape 26">
-            <a:extLst xmlns:a="http://schemas.openxmlformats.org/drawingml/2006/main">
-              <a:ext uri="{FF2B5EF4-FFF2-40B4-BE49-F238E27FC236}">
-                <a16:creationId xmlns:a16="http://schemas.microsoft.com/office/drawing/2014/main" id="{CB4AC790-0968-482C-B592-C01A8F5327D9}"/>
-              </a:ext>
-            </a:extLst>
-          </p:cNvPr>
-          <p:cNvSpPr>
-            <a:spLocks xmlns:a="http://schemas.openxmlformats.org/drawingml/2006/main" noGrp="1"/>
-          </p:cNvSpPr>
-          <p:nvPr/>
-        </p:nvSpPr>
-        <p:spPr>
-          <a:xfrm xmlns:a="http://schemas.openxmlformats.org/drawingml/2006/main">
-            <a:off x="8321040" y="6126480"/>
-            <a:ext cx="26640" cy="26640"/>
-          </a:xfrm>
-          <a:prstGeom xmlns:a="http://schemas.openxmlformats.org/drawingml/2006/main" prst="ellipse">
-            <a:avLst/>
-          </a:prstGeom>
-          <a:solidFill xmlns:a="http://schemas.openxmlformats.org/drawingml/2006/main">
-            <a:srgbClr val="FFFFFF">
-              <a:alpha val="55000"/>
-            </a:srgbClr>
-          </a:solidFill>
-          <a:ln xmlns:a="http://schemas.openxmlformats.org/drawingml/2006/main" w="0">
-            <a:noFill/>
-          </a:ln>
-        </p:spPr>
-        <p:style>
-          <a:lnRef xmlns:a="http://schemas.openxmlformats.org/drawingml/2006/main" idx="0"/>
-          <a:fillRef xmlns:a="http://schemas.openxmlformats.org/drawingml/2006/main" idx="0"/>
-          <a:effectRef xmlns:a="http://schemas.openxmlformats.org/drawingml/2006/main" idx="0"/>
-          <a:fontRef xmlns:a="http://schemas.openxmlformats.org/drawingml/2006/main" idx="minor"/>
-        </p:style>
-        <p:txBody>
-          <a:bodyPr xmlns:a="http://schemas.openxmlformats.org/drawingml/2006/main" lIns="13320" tIns="-25920" rIns="13320" bIns="-25920" anchor="t">
-            <a:noAutofit/>
-          </a:bodyPr>
-          <a:lstStyle xmlns:a="http://schemas.openxmlformats.org/drawingml/2006/main"/>
-          <a:p xmlns:a="http://schemas.openxmlformats.org/drawingml/2006/main"/>
-        </p:txBody>
-      </p:sp>
-      <p:sp>
-        <p:nvSpPr>
-          <p:cNvPr id="417" name="Shape 27">
-            <a:extLst xmlns:a="http://schemas.openxmlformats.org/drawingml/2006/main">
-              <a:ext uri="{FF2B5EF4-FFF2-40B4-BE49-F238E27FC236}">
-                <a16:creationId xmlns:a16="http://schemas.microsoft.com/office/drawing/2014/main" id="{56B22B23-B8FC-43D0-B156-4C91274FE65F}"/>
-              </a:ext>
-            </a:extLst>
-          </p:cNvPr>
-          <p:cNvSpPr>
-            <a:spLocks xmlns:a="http://schemas.openxmlformats.org/drawingml/2006/main" noGrp="1"/>
-          </p:cNvSpPr>
-          <p:nvPr/>
-        </p:nvSpPr>
-        <p:spPr>
-          <a:xfrm xmlns:a="http://schemas.openxmlformats.org/drawingml/2006/main">
-            <a:off x="9692640" y="5943600"/>
-            <a:ext cx="45000" cy="45000"/>
-          </a:xfrm>
-          <a:prstGeom xmlns:a="http://schemas.openxmlformats.org/drawingml/2006/main" prst="ellipse">
-            <a:avLst/>
-          </a:prstGeom>
-          <a:solidFill xmlns:a="http://schemas.openxmlformats.org/drawingml/2006/main">
-            <a:srgbClr val="FFFFFF">
-              <a:alpha val="35000"/>
-            </a:srgbClr>
-          </a:solidFill>
-          <a:ln xmlns:a="http://schemas.openxmlformats.org/drawingml/2006/main" w="0">
-            <a:noFill/>
-          </a:ln>
-        </p:spPr>
-        <p:style>
-          <a:lnRef xmlns:a="http://schemas.openxmlformats.org/drawingml/2006/main" idx="0"/>
-          <a:fillRef xmlns:a="http://schemas.openxmlformats.org/drawingml/2006/main" idx="0"/>
-          <a:effectRef xmlns:a="http://schemas.openxmlformats.org/drawingml/2006/main" idx="0"/>
-          <a:fontRef xmlns:a="http://schemas.openxmlformats.org/drawingml/2006/main" idx="minor"/>
-        </p:style>
-        <p:txBody>
-          <a:bodyPr xmlns:a="http://schemas.openxmlformats.org/drawingml/2006/main" lIns="22680" tIns="-12600" rIns="22680" bIns="-12600" anchor="t">
-            <a:noAutofit/>
-          </a:bodyPr>
-          <a:lstStyle xmlns:a="http://schemas.openxmlformats.org/drawingml/2006/main"/>
-          <a:p xmlns:a="http://schemas.openxmlformats.org/drawingml/2006/main"/>
-        </p:txBody>
-      </p:sp>
-      <p:sp>
-        <p:nvSpPr>
-          <p:cNvPr id="418" name="Text 28">
-            <a:extLst xmlns:a="http://schemas.openxmlformats.org/drawingml/2006/main">
-              <a:ext uri="{FF2B5EF4-FFF2-40B4-BE49-F238E27FC236}">
-                <a16:creationId xmlns:a16="http://schemas.microsoft.com/office/drawing/2014/main" id="{2354D53E-2939-493D-8E79-C6C43324AFDD}"/>
-              </a:ext>
-            </a:extLst>
-          </p:cNvPr>
-          <p:cNvSpPr>
-            <a:spLocks xmlns:a="http://schemas.openxmlformats.org/drawingml/2006/main" noGrp="1"/>
-          </p:cNvSpPr>
-          <p:nvPr/>
-        </p:nvSpPr>
-        <p:spPr>
-          <a:xfrm xmlns:a="http://schemas.openxmlformats.org/drawingml/2006/main">
-            <a:off x="640080" y="457200"/>
-            <a:ext cx="8228880" cy="319320"/>
-          </a:xfrm>
-          <a:prstGeom xmlns:a="http://schemas.openxmlformats.org/drawingml/2006/main" prst="rect">
-            <a:avLst/>
-          </a:prstGeom>
-          <a:noFill xmlns:a="http://schemas.openxmlformats.org/drawingml/2006/main"/>
-          <a:ln xmlns:a="http://schemas.openxmlformats.org/drawingml/2006/main" w="0">
-            <a:noFill/>
-          </a:ln>
-        </p:spPr>
-        <p:style>
-          <a:lnRef xmlns:a="http://schemas.openxmlformats.org/drawingml/2006/main" idx="0"/>
-          <a:fillRef xmlns:a="http://schemas.openxmlformats.org/drawingml/2006/main" idx="0"/>
-          <a:effectRef xmlns:a="http://schemas.openxmlformats.org/drawingml/2006/main" idx="0"/>
-          <a:fontRef xmlns:a="http://schemas.openxmlformats.org/drawingml/2006/main" idx="minor"/>
-        </p:style>
-        <p:txBody>
-          <a:bodyPr xmlns:a="http://schemas.openxmlformats.org/drawingml/2006/main" lIns="0" tIns="0" rIns="0" bIns="0" anchor="ctr">
-            <a:noAutofit/>
-          </a:bodyPr>
-          <a:lstStyle xmlns:a="http://schemas.openxmlformats.org/drawingml/2006/main"/>
-          <a:p xmlns:a="http://schemas.openxmlformats.org/drawingml/2006/main">
-            <a:pPr>
-              <a:lnSpc>
-                <a:spcPct val="100000"/>
-              </a:lnSpc>
-              <a:buNone/>
-            </a:pPr>
-            <a:r>
-              <a:rPr sz="1300" b="1" u="none">
-                <a:solidFill>
-                  <a:srgbClr val="F2A93B"/>
-                </a:solidFill>
-                <a:latin typeface="Calibri"/>
-                <a:ea typeface="Calibri"/>
-                <a:cs typeface="Calibri"/>
-              </a:rPr>
-              <a:t>TERRAIN VALIDITY</a:t>
-            </a:r>
-          </a:p>
-        </p:txBody>
-      </p:sp>
-      <p:sp>
-        <p:nvSpPr>
-          <p:cNvPr id="419" name="Text 29">
-            <a:extLst xmlns:a="http://schemas.openxmlformats.org/drawingml/2006/main">
-              <a:ext uri="{FF2B5EF4-FFF2-40B4-BE49-F238E27FC236}">
-                <a16:creationId xmlns:a16="http://schemas.microsoft.com/office/drawing/2014/main" id="{3E3BF542-CB4C-4F09-945C-934331A16328}"/>
-              </a:ext>
-            </a:extLst>
-          </p:cNvPr>
-          <p:cNvSpPr>
-            <a:spLocks xmlns:a="http://schemas.openxmlformats.org/drawingml/2006/main" noGrp="1"/>
-          </p:cNvSpPr>
-          <p:nvPr/>
-        </p:nvSpPr>
-        <p:spPr>
-          <a:xfrm xmlns:a="http://schemas.openxmlformats.org/drawingml/2006/main">
-            <a:off x="640080" y="868680"/>
-            <a:ext cx="10972080" cy="639360"/>
-          </a:xfrm>
-          <a:prstGeom xmlns:a="http://schemas.openxmlformats.org/drawingml/2006/main" prst="rect">
-            <a:avLst/>
-          </a:prstGeom>
-          <a:noFill xmlns:a="http://schemas.openxmlformats.org/drawingml/2006/main"/>
-          <a:ln xmlns:a="http://schemas.openxmlformats.org/drawingml/2006/main" w="0">
-            <a:noFill/>
-          </a:ln>
-        </p:spPr>
-        <p:style>
-          <a:lnRef xmlns:a="http://schemas.openxmlformats.org/drawingml/2006/main" idx="0"/>
-          <a:fillRef xmlns:a="http://schemas.openxmlformats.org/drawingml/2006/main" idx="0"/>
-          <a:effectRef xmlns:a="http://schemas.openxmlformats.org/drawingml/2006/main" idx="0"/>
-          <a:fontRef xmlns:a="http://schemas.openxmlformats.org/drawingml/2006/main" idx="minor"/>
-        </p:style>
-        <p:txBody>
-          <a:bodyPr xmlns:a="http://schemas.openxmlformats.org/drawingml/2006/main" lIns="0" tIns="0" rIns="0" bIns="0" anchor="ctr">
-            <a:noAutofit/>
-          </a:bodyPr>
-          <a:lstStyle xmlns:a="http://schemas.openxmlformats.org/drawingml/2006/main"/>
-          <a:p xmlns:a="http://schemas.openxmlformats.org/drawingml/2006/main">
-            <a:pPr>
-              <a:lnSpc>
-                <a:spcPct val="100000"/>
-              </a:lnSpc>
-              <a:buNone/>
-            </a:pPr>
-            <a:r>
-              <a:rPr sz="3000" b="1" u="none">
-                <a:solidFill>
-                  <a:srgbClr val="EAF0FF"/>
-                </a:solidFill>
-                <a:latin typeface="Cambria"/>
-                <a:ea typeface="Cambria"/>
-                <a:cs typeface="Cambria"/>
-              </a:rPr>
-              <a:t>Mapped mare-proxy TiO₂ is suggestive but unstable</a:t>
-            </a:r>
-          </a:p>
-        </p:txBody>
-      </p:sp>
-      <p:sp>
-        <p:nvSpPr>
-          <p:cNvPr id="420" name="Shape 30">
-            <a:extLst xmlns:a="http://schemas.openxmlformats.org/drawingml/2006/main">
-              <a:ext uri="{FF2B5EF4-FFF2-40B4-BE49-F238E27FC236}">
-                <a16:creationId xmlns:a16="http://schemas.microsoft.com/office/drawing/2014/main" id="{BD3A7C08-E369-462D-A29B-C666B336C09E}"/>
-              </a:ext>
-            </a:extLst>
-          </p:cNvPr>
-          <p:cNvSpPr>
-            <a:spLocks xmlns:a="http://schemas.openxmlformats.org/drawingml/2006/main" noGrp="1"/>
-          </p:cNvSpPr>
-          <p:nvPr/>
-        </p:nvSpPr>
-        <p:spPr>
-          <a:xfrm xmlns:a="http://schemas.openxmlformats.org/drawingml/2006/main">
-            <a:off x="640080" y="1874520"/>
-            <a:ext cx="4708440" cy="2742480"/>
-          </a:xfrm>
-          <a:prstGeom xmlns:a="http://schemas.openxmlformats.org/drawingml/2006/main" prst="roundRect">
-            <a:avLst>
-              <a:gd name="adj" fmla="val 3333"/>
-            </a:avLst>
-          </a:prstGeom>
-          <a:solidFill xmlns:a="http://schemas.openxmlformats.org/drawingml/2006/main">
-            <a:srgbClr val="18213F"/>
-          </a:solidFill>
-          <a:ln xmlns:a="http://schemas.openxmlformats.org/drawingml/2006/main" w="12700">
-            <a:solidFill>
-              <a:srgbClr val="F2A93B"/>
-            </a:solidFill>
-          </a:ln>
-          <a:effectLst xmlns:a="http://schemas.openxmlformats.org/drawingml/2006/main">
-            <a:outerShdw blurRad="101520" dist="38160" dir="5400000" sx="100000" sy="100000" kx="0" ky="0" algn="bl" rotWithShape="0">
-              <a:srgbClr val="000000">
-                <a:alpha val="35000"/>
-              </a:srgbClr>
-            </a:outerShdw>
-          </a:effectLst>
-        </p:spPr>
-        <p:style>
-          <a:lnRef xmlns:a="http://schemas.openxmlformats.org/drawingml/2006/main" idx="0"/>
-          <a:fillRef xmlns:a="http://schemas.openxmlformats.org/drawingml/2006/main" idx="0"/>
-          <a:effectRef xmlns:a="http://schemas.openxmlformats.org/drawingml/2006/main" idx="0"/>
-          <a:fontRef xmlns:a="http://schemas.openxmlformats.org/drawingml/2006/main" idx="minor"/>
-        </p:style>
-        <p:txBody>
-          <a:bodyPr xmlns:a="http://schemas.openxmlformats.org/drawingml/2006/main" lIns="90000" tIns="45000" rIns="90000" bIns="45000" anchor="t">
-            <a:noAutofit/>
-          </a:bodyPr>
-          <a:lstStyle xmlns:a="http://schemas.openxmlformats.org/drawingml/2006/main"/>
-          <a:p xmlns:a="http://schemas.openxmlformats.org/drawingml/2006/main"/>
-        </p:txBody>
-      </p:sp>
-      <p:sp>
-        <p:nvSpPr>
-          <p:cNvPr id="421" name="Text 31">
-            <a:extLst xmlns:a="http://schemas.openxmlformats.org/drawingml/2006/main">
-              <a:ext uri="{FF2B5EF4-FFF2-40B4-BE49-F238E27FC236}">
-                <a16:creationId xmlns:a16="http://schemas.microsoft.com/office/drawing/2014/main" id="{2CB8E240-CAA4-4B89-A295-30E5C7318F63}"/>
-              </a:ext>
-            </a:extLst>
-          </p:cNvPr>
-          <p:cNvSpPr>
-            <a:spLocks xmlns:a="http://schemas.openxmlformats.org/drawingml/2006/main" noGrp="1"/>
-          </p:cNvSpPr>
-          <p:nvPr/>
-        </p:nvSpPr>
-        <p:spPr>
-          <a:xfrm xmlns:a="http://schemas.openxmlformats.org/drawingml/2006/main">
-            <a:off x="914400" y="2148840"/>
-            <a:ext cx="4159800" cy="365040"/>
-          </a:xfrm>
-          <a:prstGeom xmlns:a="http://schemas.openxmlformats.org/drawingml/2006/main" prst="rect">
-            <a:avLst/>
-          </a:prstGeom>
-          <a:noFill xmlns:a="http://schemas.openxmlformats.org/drawingml/2006/main"/>
-          <a:ln xmlns:a="http://schemas.openxmlformats.org/drawingml/2006/main" w="0">
-            <a:noFill/>
-          </a:ln>
-        </p:spPr>
-        <p:style>
-          <a:lnRef xmlns:a="http://schemas.openxmlformats.org/drawingml/2006/main" idx="0"/>
-          <a:fillRef xmlns:a="http://schemas.openxmlformats.org/drawingml/2006/main" idx="0"/>
-          <a:effectRef xmlns:a="http://schemas.openxmlformats.org/drawingml/2006/main" idx="0"/>
-          <a:fontRef xmlns:a="http://schemas.openxmlformats.org/drawingml/2006/main" idx="minor"/>
-        </p:style>
-        <p:txBody>
-          <a:bodyPr xmlns:a="http://schemas.openxmlformats.org/drawingml/2006/main" lIns="0" tIns="0" rIns="0" bIns="0" anchor="ctr">
-            <a:noAutofit/>
-          </a:bodyPr>
-          <a:lstStyle xmlns:a="http://schemas.openxmlformats.org/drawingml/2006/main"/>
-          <a:p xmlns:a="http://schemas.openxmlformats.org/drawingml/2006/main">
-            <a:pPr>
-              <a:lnSpc>
-                <a:spcPct val="100000"/>
-              </a:lnSpc>
-              <a:buNone/>
-            </a:pPr>
-            <a:r>
-              <a:rPr sz="1400" b="1" u="none">
-                <a:solidFill>
-                  <a:srgbClr val="F2A93B"/>
-                </a:solidFill>
-                <a:latin typeface="Calibri"/>
-                <a:ea typeface="Calibri"/>
-                <a:cs typeface="Calibri"/>
-              </a:rPr>
-              <a:t>Mapped mare-proxy binary</a:t>
-            </a:r>
-          </a:p>
-        </p:txBody>
-      </p:sp>
-      <p:sp>
-        <p:nvSpPr>
-          <p:cNvPr id="422" name="Text 32">
-            <a:extLst xmlns:a="http://schemas.openxmlformats.org/drawingml/2006/main">
-              <a:ext uri="{FF2B5EF4-FFF2-40B4-BE49-F238E27FC236}">
-                <a16:creationId xmlns:a16="http://schemas.microsoft.com/office/drawing/2014/main" id="{B21008C2-D632-4083-90AF-430AB54EA52B}"/>
-              </a:ext>
-            </a:extLst>
-          </p:cNvPr>
-          <p:cNvSpPr>
-            <a:spLocks xmlns:a="http://schemas.openxmlformats.org/drawingml/2006/main" noGrp="1"/>
-          </p:cNvSpPr>
-          <p:nvPr/>
-        </p:nvSpPr>
-        <p:spPr>
-          <a:xfrm xmlns:a="http://schemas.openxmlformats.org/drawingml/2006/main">
-            <a:off x="914400" y="2651760"/>
-            <a:ext cx="4159800" cy="1005120"/>
-          </a:xfrm>
-          <a:prstGeom xmlns:a="http://schemas.openxmlformats.org/drawingml/2006/main" prst="rect">
-            <a:avLst/>
-          </a:prstGeom>
-          <a:noFill xmlns:a="http://schemas.openxmlformats.org/drawingml/2006/main"/>
-          <a:ln xmlns:a="http://schemas.openxmlformats.org/drawingml/2006/main" w="0">
-            <a:noFill/>
-          </a:ln>
-        </p:spPr>
-        <p:style>
-          <a:lnRef xmlns:a="http://schemas.openxmlformats.org/drawingml/2006/main" idx="0"/>
-          <a:fillRef xmlns:a="http://schemas.openxmlformats.org/drawingml/2006/main" idx="0"/>
-          <a:effectRef xmlns:a="http://schemas.openxmlformats.org/drawingml/2006/main" idx="0"/>
-          <a:fontRef xmlns:a="http://schemas.openxmlformats.org/drawingml/2006/main" idx="minor"/>
-        </p:style>
-        <p:txBody>
-          <a:bodyPr xmlns:a="http://schemas.openxmlformats.org/drawingml/2006/main" lIns="0" tIns="0" rIns="0" bIns="0" anchor="ctr">
-            <a:noAutofit/>
-          </a:bodyPr>
-          <a:lstStyle xmlns:a="http://schemas.openxmlformats.org/drawingml/2006/main"/>
-          <a:p xmlns:a="http://schemas.openxmlformats.org/drawingml/2006/main">
-            <a:pPr>
-              <a:lnSpc>
-                <a:spcPct val="115000"/>
-              </a:lnSpc>
-              <a:buNone/>
-            </a:pPr>
-            <a:r>
-              <a:rPr sz="1600" b="0" u="none">
-                <a:solidFill>
-                  <a:srgbClr val="EAF0FF"/>
-                </a:solidFill>
-                <a:latin typeface="Calibri"/>
-                <a:ea typeface="Calibri"/>
-                <a:cs typeface="Calibri"/>
-              </a:rPr>
-              <a:t>ΔPR-AUC +.067614; +TiO₂ .125209 versus controls .057595 (p=.21875).</a:t>
-            </a:r>
-          </a:p>
-        </p:txBody>
-      </p:sp>
-      <p:sp>
-        <p:nvSpPr>
-          <p:cNvPr id="423" name="Text 33">
-            <a:extLst xmlns:a="http://schemas.openxmlformats.org/drawingml/2006/main">
-              <a:ext uri="{FF2B5EF4-FFF2-40B4-BE49-F238E27FC236}">
-                <a16:creationId xmlns:a16="http://schemas.microsoft.com/office/drawing/2014/main" id="{2C3966BB-C95F-4A03-A939-6DA4FB11745F}"/>
-              </a:ext>
-            </a:extLst>
-          </p:cNvPr>
-          <p:cNvSpPr>
-            <a:spLocks xmlns:a="http://schemas.openxmlformats.org/drawingml/2006/main" noGrp="1"/>
-          </p:cNvSpPr>
-          <p:nvPr/>
-        </p:nvSpPr>
-        <p:spPr>
-          <a:xfrm xmlns:a="http://schemas.openxmlformats.org/drawingml/2006/main">
-            <a:off x="914400" y="4069080"/>
-            <a:ext cx="4159800" cy="319320"/>
-          </a:xfrm>
-          <a:prstGeom xmlns:a="http://schemas.openxmlformats.org/drawingml/2006/main" prst="rect">
-            <a:avLst/>
-          </a:prstGeom>
-          <a:noFill xmlns:a="http://schemas.openxmlformats.org/drawingml/2006/main"/>
-          <a:ln xmlns:a="http://schemas.openxmlformats.org/drawingml/2006/main" w="0">
-            <a:noFill/>
-          </a:ln>
-        </p:spPr>
-        <p:style>
-          <a:lnRef xmlns:a="http://schemas.openxmlformats.org/drawingml/2006/main" idx="0"/>
-          <a:fillRef xmlns:a="http://schemas.openxmlformats.org/drawingml/2006/main" idx="0"/>
-          <a:effectRef xmlns:a="http://schemas.openxmlformats.org/drawingml/2006/main" idx="0"/>
-          <a:fontRef xmlns:a="http://schemas.openxmlformats.org/drawingml/2006/main" idx="minor"/>
-        </p:style>
-        <p:txBody>
-          <a:bodyPr xmlns:a="http://schemas.openxmlformats.org/drawingml/2006/main" lIns="0" tIns="0" rIns="0" bIns="0" anchor="ctr">
-            <a:noAutofit/>
-          </a:bodyPr>
-          <a:lstStyle xmlns:a="http://schemas.openxmlformats.org/drawingml/2006/main"/>
-          <a:p xmlns:a="http://schemas.openxmlformats.org/drawingml/2006/main">
-            <a:pPr>
-              <a:lnSpc>
-                <a:spcPct val="100000"/>
-              </a:lnSpc>
-              <a:buNone/>
-            </a:pPr>
-            <a:r>
-              <a:rPr sz="1300" b="0" i="1" u="none">
-                <a:solidFill>
-                  <a:srgbClr val="9AA7C7"/>
-                </a:solidFill>
-                <a:latin typeface="Calibri"/>
-                <a:ea typeface="Calibri"/>
-                <a:cs typeface="Calibri"/>
-              </a:rPr>
-              <a:t>n=6,232 · 58 positives</a:t>
-            </a:r>
-          </a:p>
-        </p:txBody>
-      </p:sp>
-      <p:sp>
-        <p:nvSpPr>
-          <p:cNvPr id="424" name="Shape 34">
-            <a:extLst xmlns:a="http://schemas.openxmlformats.org/drawingml/2006/main">
-              <a:ext uri="{FF2B5EF4-FFF2-40B4-BE49-F238E27FC236}">
-                <a16:creationId xmlns:a16="http://schemas.microsoft.com/office/drawing/2014/main" id="{69E46985-FE9E-48C1-A284-EEBF62CD1EF0}"/>
-              </a:ext>
-            </a:extLst>
-          </p:cNvPr>
-          <p:cNvSpPr>
-            <a:spLocks xmlns:a="http://schemas.openxmlformats.org/drawingml/2006/main" noGrp="1"/>
-          </p:cNvSpPr>
-          <p:nvPr/>
-        </p:nvSpPr>
-        <p:spPr>
-          <a:xfrm xmlns:a="http://schemas.openxmlformats.org/drawingml/2006/main">
-            <a:off x="5532120" y="3017520"/>
-            <a:ext cx="1005120" cy="456480"/>
-          </a:xfrm>
-          <a:prstGeom xmlns:a="http://schemas.openxmlformats.org/drawingml/2006/main" prst="rightArrow">
-            <a:avLst>
-              <a:gd name="adj1" fmla="val 50000"/>
-              <a:gd name="adj2" fmla="val 50000"/>
-            </a:avLst>
-          </a:prstGeom>
-          <a:solidFill xmlns:a="http://schemas.openxmlformats.org/drawingml/2006/main">
-            <a:srgbClr val="E8795E"/>
-          </a:solidFill>
-          <a:ln xmlns:a="http://schemas.openxmlformats.org/drawingml/2006/main" w="0">
-            <a:noFill/>
-          </a:ln>
-        </p:spPr>
-        <p:style>
-          <a:lnRef xmlns:a="http://schemas.openxmlformats.org/drawingml/2006/main" idx="0"/>
-          <a:fillRef xmlns:a="http://schemas.openxmlformats.org/drawingml/2006/main" idx="0"/>
-          <a:effectRef xmlns:a="http://schemas.openxmlformats.org/drawingml/2006/main" idx="0"/>
-          <a:fontRef xmlns:a="http://schemas.openxmlformats.org/drawingml/2006/main" idx="minor"/>
-        </p:style>
-        <p:txBody>
-          <a:bodyPr xmlns:a="http://schemas.openxmlformats.org/drawingml/2006/main" lIns="90000" tIns="45000" rIns="90000" bIns="45000" anchor="t">
-            <a:noAutofit/>
-          </a:bodyPr>
-          <a:lstStyle xmlns:a="http://schemas.openxmlformats.org/drawingml/2006/main"/>
-          <a:p xmlns:a="http://schemas.openxmlformats.org/drawingml/2006/main"/>
-        </p:txBody>
-      </p:sp>
-      <p:sp>
-        <p:nvSpPr>
-          <p:cNvPr id="425" name="Text 35">
-            <a:extLst xmlns:a="http://schemas.openxmlformats.org/drawingml/2006/main">
-              <a:ext uri="{FF2B5EF4-FFF2-40B4-BE49-F238E27FC236}">
-                <a16:creationId xmlns:a16="http://schemas.microsoft.com/office/drawing/2014/main" id="{A9526443-18A6-4A80-8AD3-950D2F7C84A1}"/>
-              </a:ext>
-            </a:extLst>
-          </p:cNvPr>
-          <p:cNvSpPr>
-            <a:spLocks xmlns:a="http://schemas.openxmlformats.org/drawingml/2006/main" noGrp="1"/>
-          </p:cNvSpPr>
-          <p:nvPr/>
-        </p:nvSpPr>
-        <p:spPr>
-          <a:xfrm xmlns:a="http://schemas.openxmlformats.org/drawingml/2006/main">
-            <a:off x="5140440" y="1554480"/>
-            <a:ext cx="1599480" cy="822240"/>
-          </a:xfrm>
-          <a:prstGeom xmlns:a="http://schemas.openxmlformats.org/drawingml/2006/main" prst="rect">
-            <a:avLst/>
-          </a:prstGeom>
-          <a:noFill xmlns:a="http://schemas.openxmlformats.org/drawingml/2006/main"/>
-          <a:ln xmlns:a="http://schemas.openxmlformats.org/drawingml/2006/main" w="0">
-            <a:noFill/>
-          </a:ln>
-        </p:spPr>
-        <p:style>
-          <a:lnRef xmlns:a="http://schemas.openxmlformats.org/drawingml/2006/main" idx="0"/>
-          <a:fillRef xmlns:a="http://schemas.openxmlformats.org/drawingml/2006/main" idx="0"/>
-          <a:effectRef xmlns:a="http://schemas.openxmlformats.org/drawingml/2006/main" idx="0"/>
-          <a:fontRef xmlns:a="http://schemas.openxmlformats.org/drawingml/2006/main" idx="minor"/>
-        </p:style>
-        <p:txBody>
-          <a:bodyPr xmlns:a="http://schemas.openxmlformats.org/drawingml/2006/main" lIns="0" tIns="0" rIns="0" bIns="0" anchor="ctr">
-            <a:noAutofit/>
-          </a:bodyPr>
-          <a:lstStyle xmlns:a="http://schemas.openxmlformats.org/drawingml/2006/main"/>
-          <a:p xmlns:a="http://schemas.openxmlformats.org/drawingml/2006/main">
-            <a:pPr algn="ctr">
-              <a:lnSpc>
-                <a:spcPct val="95000"/>
-              </a:lnSpc>
-              <a:buNone/>
-            </a:pPr>
-            <a:r>
-              <a:rPr sz="1300" b="1" u="none">
-                <a:solidFill>
-                  <a:srgbClr val="E8795E"/>
-                </a:solidFill>
-                <a:latin typeface="Calibri"/>
-                <a:ea typeface="Calibri"/>
-                <a:cs typeface="Calibri"/>
-              </a:rPr>
-              <a:t/>
-            </a:r>
-          </a:p>
-        </p:txBody>
-      </p:sp>
-      <p:sp>
-        <p:nvSpPr>
-          <p:cNvPr id="426" name="Shape 36">
-            <a:extLst xmlns:a="http://schemas.openxmlformats.org/drawingml/2006/main">
-              <a:ext uri="{FF2B5EF4-FFF2-40B4-BE49-F238E27FC236}">
-                <a16:creationId xmlns:a16="http://schemas.microsoft.com/office/drawing/2014/main" id="{D41200B4-B821-45CE-9BE7-920B45323E34}"/>
-              </a:ext>
-            </a:extLst>
-          </p:cNvPr>
-          <p:cNvSpPr>
-            <a:spLocks xmlns:a="http://schemas.openxmlformats.org/drawingml/2006/main" noGrp="1"/>
-          </p:cNvSpPr>
-          <p:nvPr/>
-        </p:nvSpPr>
-        <p:spPr>
-          <a:xfrm xmlns:a="http://schemas.openxmlformats.org/drawingml/2006/main">
-            <a:off x="6537960" y="1874520"/>
-            <a:ext cx="4708440" cy="2742480"/>
-          </a:xfrm>
-          <a:prstGeom xmlns:a="http://schemas.openxmlformats.org/drawingml/2006/main" prst="roundRect">
-            <a:avLst>
-              <a:gd name="adj" fmla="val 3333"/>
-            </a:avLst>
-          </a:prstGeom>
-          <a:solidFill xmlns:a="http://schemas.openxmlformats.org/drawingml/2006/main">
-            <a:srgbClr val="18213F"/>
-          </a:solidFill>
-          <a:ln xmlns:a="http://schemas.openxmlformats.org/drawingml/2006/main" w="12700">
-            <a:solidFill>
-              <a:srgbClr val="5AC8E6"/>
-            </a:solidFill>
-          </a:ln>
-          <a:effectLst xmlns:a="http://schemas.openxmlformats.org/drawingml/2006/main">
-            <a:outerShdw blurRad="101520" dist="38160" dir="5400000" sx="100000" sy="100000" kx="0" ky="0" algn="bl" rotWithShape="0">
-              <a:srgbClr val="000000">
-                <a:alpha val="35000"/>
-              </a:srgbClr>
-            </a:outerShdw>
-          </a:effectLst>
-        </p:spPr>
-        <p:style>
-          <a:lnRef xmlns:a="http://schemas.openxmlformats.org/drawingml/2006/main" idx="0"/>
-          <a:fillRef xmlns:a="http://schemas.openxmlformats.org/drawingml/2006/main" idx="0"/>
-          <a:effectRef xmlns:a="http://schemas.openxmlformats.org/drawingml/2006/main" idx="0"/>
-          <a:fontRef xmlns:a="http://schemas.openxmlformats.org/drawingml/2006/main" idx="minor"/>
-        </p:style>
-        <p:txBody>
-          <a:bodyPr xmlns:a="http://schemas.openxmlformats.org/drawingml/2006/main" lIns="90000" tIns="45000" rIns="90000" bIns="45000" anchor="t">
-            <a:noAutofit/>
-          </a:bodyPr>
-          <a:lstStyle xmlns:a="http://schemas.openxmlformats.org/drawingml/2006/main"/>
-          <a:p xmlns:a="http://schemas.openxmlformats.org/drawingml/2006/main"/>
-        </p:txBody>
-      </p:sp>
-      <p:sp>
-        <p:nvSpPr>
-          <p:cNvPr id="427" name="Text 37">
-            <a:extLst xmlns:a="http://schemas.openxmlformats.org/drawingml/2006/main">
-              <a:ext uri="{FF2B5EF4-FFF2-40B4-BE49-F238E27FC236}">
-                <a16:creationId xmlns:a16="http://schemas.microsoft.com/office/drawing/2014/main" id="{93EA2052-FA06-434A-BEE8-288B5ED84302}"/>
-              </a:ext>
-            </a:extLst>
-          </p:cNvPr>
-          <p:cNvSpPr>
-            <a:spLocks xmlns:a="http://schemas.openxmlformats.org/drawingml/2006/main" noGrp="1"/>
-          </p:cNvSpPr>
-          <p:nvPr/>
-        </p:nvSpPr>
-        <p:spPr>
-          <a:xfrm xmlns:a="http://schemas.openxmlformats.org/drawingml/2006/main">
-            <a:off x="6812280" y="2148840"/>
-            <a:ext cx="4159800" cy="365040"/>
-          </a:xfrm>
-          <a:prstGeom xmlns:a="http://schemas.openxmlformats.org/drawingml/2006/main" prst="rect">
-            <a:avLst/>
-          </a:prstGeom>
-          <a:noFill xmlns:a="http://schemas.openxmlformats.org/drawingml/2006/main"/>
-          <a:ln xmlns:a="http://schemas.openxmlformats.org/drawingml/2006/main" w="0">
-            <a:noFill/>
-          </a:ln>
-        </p:spPr>
-        <p:style>
-          <a:lnRef xmlns:a="http://schemas.openxmlformats.org/drawingml/2006/main" idx="0"/>
-          <a:fillRef xmlns:a="http://schemas.openxmlformats.org/drawingml/2006/main" idx="0"/>
-          <a:effectRef xmlns:a="http://schemas.openxmlformats.org/drawingml/2006/main" idx="0"/>
-          <a:fontRef xmlns:a="http://schemas.openxmlformats.org/drawingml/2006/main" idx="minor"/>
-        </p:style>
-        <p:txBody>
-          <a:bodyPr xmlns:a="http://schemas.openxmlformats.org/drawingml/2006/main" lIns="0" tIns="0" rIns="0" bIns="0" anchor="ctr">
-            <a:noAutofit/>
-          </a:bodyPr>
-          <a:lstStyle xmlns:a="http://schemas.openxmlformats.org/drawingml/2006/main"/>
-          <a:p xmlns:a="http://schemas.openxmlformats.org/drawingml/2006/main">
-            <a:pPr>
-              <a:lnSpc>
-                <a:spcPct val="100000"/>
-              </a:lnSpc>
-              <a:buNone/>
-            </a:pPr>
-            <a:r>
-              <a:rPr sz="1400" b="1" u="none">
-                <a:solidFill>
-                  <a:srgbClr val="5AC8E6"/>
-                </a:solidFill>
-                <a:latin typeface="Calibri"/>
-                <a:ea typeface="Calibri"/>
-                <a:cs typeface="Calibri"/>
-              </a:rPr>
-              <a:t>Mapped mare-proxy continuous</a:t>
-            </a:r>
-          </a:p>
-        </p:txBody>
-      </p:sp>
-      <p:sp>
-        <p:nvSpPr>
-          <p:cNvPr id="428" name="Text 38">
-            <a:extLst xmlns:a="http://schemas.openxmlformats.org/drawingml/2006/main">
-              <a:ext uri="{FF2B5EF4-FFF2-40B4-BE49-F238E27FC236}">
-                <a16:creationId xmlns:a16="http://schemas.microsoft.com/office/drawing/2014/main" id="{B87A5EC0-22A0-4C55-8E0B-9C0C934F9268}"/>
-              </a:ext>
-            </a:extLst>
-          </p:cNvPr>
-          <p:cNvSpPr>
-            <a:spLocks xmlns:a="http://schemas.openxmlformats.org/drawingml/2006/main" noGrp="1"/>
-          </p:cNvSpPr>
-          <p:nvPr/>
-        </p:nvSpPr>
-        <p:spPr>
-          <a:xfrm xmlns:a="http://schemas.openxmlformats.org/drawingml/2006/main">
-            <a:off x="6812280" y="2651760"/>
-            <a:ext cx="4159800" cy="1005120"/>
-          </a:xfrm>
-          <a:prstGeom xmlns:a="http://schemas.openxmlformats.org/drawingml/2006/main" prst="rect">
-            <a:avLst/>
-          </a:prstGeom>
-          <a:noFill xmlns:a="http://schemas.openxmlformats.org/drawingml/2006/main"/>
-          <a:ln xmlns:a="http://schemas.openxmlformats.org/drawingml/2006/main" w="0">
-            <a:noFill/>
-          </a:ln>
-        </p:spPr>
-        <p:style>
-          <a:lnRef xmlns:a="http://schemas.openxmlformats.org/drawingml/2006/main" idx="0"/>
-          <a:fillRef xmlns:a="http://schemas.openxmlformats.org/drawingml/2006/main" idx="0"/>
-          <a:effectRef xmlns:a="http://schemas.openxmlformats.org/drawingml/2006/main" idx="0"/>
-          <a:fontRef xmlns:a="http://schemas.openxmlformats.org/drawingml/2006/main" idx="minor"/>
-        </p:style>
-        <p:txBody>
-          <a:bodyPr xmlns:a="http://schemas.openxmlformats.org/drawingml/2006/main" lIns="0" tIns="0" rIns="0" bIns="0" anchor="ctr">
-            <a:noAutofit/>
-          </a:bodyPr>
-          <a:lstStyle xmlns:a="http://schemas.openxmlformats.org/drawingml/2006/main"/>
-          <a:p xmlns:a="http://schemas.openxmlformats.org/drawingml/2006/main">
-            <a:pPr>
-              <a:lnSpc>
-                <a:spcPct val="115000"/>
-              </a:lnSpc>
-              <a:buNone/>
-            </a:pPr>
-            <a:r>
-              <a:rPr sz="1600" b="0" u="none">
-                <a:solidFill>
-                  <a:srgbClr val="EAF0FF"/>
-                </a:solidFill>
-                <a:latin typeface="Calibri"/>
-                <a:ea typeface="Calibri"/>
-                <a:cs typeface="Calibri"/>
-              </a:rPr>
-              <a:t>Controls R² .425691 → .438387; raw-Ti increment +.012696±.012575. Common-fold gain vs full raw-Ti: +.001445.</a:t>
-            </a:r>
-          </a:p>
-        </p:txBody>
-      </p:sp>
-      <p:sp>
-        <p:nvSpPr>
-          <p:cNvPr id="429" name="Text 39">
-            <a:extLst xmlns:a="http://schemas.openxmlformats.org/drawingml/2006/main">
-              <a:ext uri="{FF2B5EF4-FFF2-40B4-BE49-F238E27FC236}">
-                <a16:creationId xmlns:a16="http://schemas.microsoft.com/office/drawing/2014/main" id="{BA1875AA-102A-4908-832F-2E43311770F1}"/>
-              </a:ext>
-            </a:extLst>
-          </p:cNvPr>
-          <p:cNvSpPr>
-            <a:spLocks xmlns:a="http://schemas.openxmlformats.org/drawingml/2006/main" noGrp="1"/>
-          </p:cNvSpPr>
-          <p:nvPr/>
-        </p:nvSpPr>
-        <p:spPr>
-          <a:xfrm xmlns:a="http://schemas.openxmlformats.org/drawingml/2006/main">
-            <a:off x="6812280" y="4069080"/>
-            <a:ext cx="4159800" cy="319320"/>
-          </a:xfrm>
-          <a:prstGeom xmlns:a="http://schemas.openxmlformats.org/drawingml/2006/main" prst="rect">
-            <a:avLst/>
-          </a:prstGeom>
-          <a:noFill xmlns:a="http://schemas.openxmlformats.org/drawingml/2006/main"/>
-          <a:ln xmlns:a="http://schemas.openxmlformats.org/drawingml/2006/main" w="0">
-            <a:noFill/>
-          </a:ln>
-        </p:spPr>
-        <p:style>
-          <a:lnRef xmlns:a="http://schemas.openxmlformats.org/drawingml/2006/main" idx="0"/>
-          <a:fillRef xmlns:a="http://schemas.openxmlformats.org/drawingml/2006/main" idx="0"/>
-          <a:effectRef xmlns:a="http://schemas.openxmlformats.org/drawingml/2006/main" idx="0"/>
-          <a:fontRef xmlns:a="http://schemas.openxmlformats.org/drawingml/2006/main" idx="minor"/>
-        </p:style>
-        <p:txBody>
-          <a:bodyPr xmlns:a="http://schemas.openxmlformats.org/drawingml/2006/main" lIns="0" tIns="0" rIns="0" bIns="0" anchor="ctr">
-            <a:noAutofit/>
-          </a:bodyPr>
-          <a:lstStyle xmlns:a="http://schemas.openxmlformats.org/drawingml/2006/main"/>
-          <a:p xmlns:a="http://schemas.openxmlformats.org/drawingml/2006/main">
-            <a:pPr>
-              <a:lnSpc>
-                <a:spcPct val="100000"/>
-              </a:lnSpc>
-              <a:buNone/>
-            </a:pPr>
-            <a:r>
-              <a:rPr sz="1300" b="0" i="1" u="none">
-                <a:solidFill>
-                  <a:srgbClr val="9AA7C7"/>
-                </a:solidFill>
-                <a:latin typeface="Calibri"/>
-                <a:ea typeface="Calibri"/>
-                <a:cs typeface="Calibri"/>
-              </a:rPr>
-              <a:t>proxy range 3289 km · n_eff=1</a:t>
-            </a:r>
-          </a:p>
-        </p:txBody>
-      </p:sp>
-      <p:sp>
-        <p:nvSpPr>
-          <p:cNvPr id="430" name="Shape 40">
-            <a:extLst xmlns:a="http://schemas.openxmlformats.org/drawingml/2006/main">
-              <a:ext uri="{FF2B5EF4-FFF2-40B4-BE49-F238E27FC236}">
-                <a16:creationId xmlns:a16="http://schemas.microsoft.com/office/drawing/2014/main" id="{D56F3892-EA30-48E5-A85C-0BF6E13FE767}"/>
-              </a:ext>
-            </a:extLst>
-          </p:cNvPr>
-          <p:cNvSpPr>
-            <a:spLocks xmlns:a="http://schemas.openxmlformats.org/drawingml/2006/main" noGrp="1"/>
-          </p:cNvSpPr>
-          <p:nvPr/>
-        </p:nvSpPr>
-        <p:spPr>
-          <a:xfrm xmlns:a="http://schemas.openxmlformats.org/drawingml/2006/main">
-            <a:off x="640080" y="4892040"/>
-            <a:ext cx="10880640" cy="1233720"/>
-          </a:xfrm>
-          <a:prstGeom xmlns:a="http://schemas.openxmlformats.org/drawingml/2006/main" prst="roundRect">
-            <a:avLst>
-              <a:gd name="adj" fmla="val 7407"/>
-            </a:avLst>
-          </a:prstGeom>
-          <a:solidFill xmlns:a="http://schemas.openxmlformats.org/drawingml/2006/main">
-            <a:srgbClr val="1E2A4E"/>
-          </a:solidFill>
-          <a:ln xmlns:a="http://schemas.openxmlformats.org/drawingml/2006/main" w="12700">
-            <a:solidFill>
-              <a:srgbClr val="2E3B66"/>
-            </a:solidFill>
-          </a:ln>
-          <a:effectLst xmlns:a="http://schemas.openxmlformats.org/drawingml/2006/main">
-            <a:outerShdw blurRad="101520" dist="38160" dir="5400000" sx="100000" sy="100000" kx="0" ky="0" algn="bl" rotWithShape="0">
-              <a:srgbClr val="000000">
-                <a:alpha val="35000"/>
-              </a:srgbClr>
-            </a:outerShdw>
-          </a:effectLst>
-        </p:spPr>
-        <p:style>
-          <a:lnRef xmlns:a="http://schemas.openxmlformats.org/drawingml/2006/main" idx="0"/>
-          <a:fillRef xmlns:a="http://schemas.openxmlformats.org/drawingml/2006/main" idx="0"/>
-          <a:effectRef xmlns:a="http://schemas.openxmlformats.org/drawingml/2006/main" idx="0"/>
-          <a:fontRef xmlns:a="http://schemas.openxmlformats.org/drawingml/2006/main" idx="minor"/>
-        </p:style>
-        <p:txBody>
-          <a:bodyPr xmlns:a="http://schemas.openxmlformats.org/drawingml/2006/main" lIns="90000" tIns="45000" rIns="90000" bIns="45000" anchor="t">
-            <a:noAutofit/>
-          </a:bodyPr>
-          <a:lstStyle xmlns:a="http://schemas.openxmlformats.org/drawingml/2006/main"/>
-          <a:p xmlns:a="http://schemas.openxmlformats.org/drawingml/2006/main"/>
-        </p:txBody>
-      </p:sp>
-      <p:sp>
-        <p:nvSpPr>
-          <p:cNvPr id="431" name="Text 41">
-            <a:extLst xmlns:a="http://schemas.openxmlformats.org/drawingml/2006/main">
-              <a:ext uri="{FF2B5EF4-FFF2-40B4-BE49-F238E27FC236}">
-                <a16:creationId xmlns:a16="http://schemas.microsoft.com/office/drawing/2014/main" id="{F47D3051-1714-456F-8037-C834EC7DF6AF}"/>
-              </a:ext>
-            </a:extLst>
-          </p:cNvPr>
-          <p:cNvSpPr>
-            <a:spLocks xmlns:a="http://schemas.openxmlformats.org/drawingml/2006/main" noGrp="1"/>
-          </p:cNvSpPr>
-          <p:nvPr/>
-        </p:nvSpPr>
-        <p:spPr>
-          <a:xfrm xmlns:a="http://schemas.openxmlformats.org/drawingml/2006/main">
-            <a:off x="914400" y="5074920"/>
-            <a:ext cx="10332000" cy="913680"/>
-          </a:xfrm>
-          <a:prstGeom xmlns:a="http://schemas.openxmlformats.org/drawingml/2006/main" prst="rect">
-            <a:avLst/>
-          </a:prstGeom>
-          <a:noFill xmlns:a="http://schemas.openxmlformats.org/drawingml/2006/main"/>
-          <a:ln xmlns:a="http://schemas.openxmlformats.org/drawingml/2006/main" w="0">
-            <a:noFill/>
-          </a:ln>
-        </p:spPr>
-        <p:style>
-          <a:lnRef xmlns:a="http://schemas.openxmlformats.org/drawingml/2006/main" idx="0"/>
-          <a:fillRef xmlns:a="http://schemas.openxmlformats.org/drawingml/2006/main" idx="0"/>
-          <a:effectRef xmlns:a="http://schemas.openxmlformats.org/drawingml/2006/main" idx="0"/>
-          <a:fontRef xmlns:a="http://schemas.openxmlformats.org/drawingml/2006/main" idx="minor"/>
-        </p:style>
-        <p:txBody>
-          <a:bodyPr xmlns:a="http://schemas.openxmlformats.org/drawingml/2006/main" lIns="0" tIns="0" rIns="0" bIns="0" anchor="ctr">
-            <a:noAutofit/>
-          </a:bodyPr>
-          <a:lstStyle xmlns:a="http://schemas.openxmlformats.org/drawingml/2006/main"/>
-          <a:p xmlns:a="http://schemas.openxmlformats.org/drawingml/2006/main">
-            <a:pPr>
-              <a:lnSpc>
-                <a:spcPct val="115000"/>
-              </a:lnSpc>
-              <a:buNone/>
-            </a:pPr>
-            <a:r>
-              <a:rPr sz="1550" b="1" u="none">
-                <a:solidFill>
-                  <a:srgbClr val="F2A93B"/>
-                </a:solidFill>
-                <a:latin typeface="Calibri"/>
-                <a:ea typeface="Calibri"/>
-                <a:cs typeface="Calibri"/>
-              </a:rPr>
-              <a:t>Interpretation:  </a:t>
-            </a:r>
-            <a:r>
-              <a:rPr sz="1550" b="0" u="none">
-                <a:solidFill>
-                  <a:srgbClr val="EAF0FF"/>
-                </a:solidFill>
-                <a:latin typeface="Calibri"/>
-                <a:ea typeface="Calibri"/>
-                <a:cs typeface="Calibri"/>
-              </a:rPr>
-              <a:t>Both proxy checks remain descriptive: the mapped proxy footprint still supplies only one dependence-scale unit, not </a:t>
-            </a:r>
-            <a:r>
-              <a:rPr sz="1550" b="1" u="none">
-                <a:solidFill>
-                  <a:srgbClr val="5AC8E6"/>
-                </a:solidFill>
-                <a:latin typeface="Calibri"/>
-                <a:ea typeface="Calibri"/>
-                <a:cs typeface="Calibri"/>
-              </a:rPr>
-              <a:t>an independent global confirmation.</a:t>
-            </a:r>
-          </a:p>
-        </p:txBody>
-      </p:sp>
-    </p:spTree>
-    <p:extLst>
-      <p:ext uri="{BB962C8B-B14F-4D97-AF65-F5344CB8AC3E}">
-        <p14:creationId xmlns:p14="http://schemas.microsoft.com/office/powerpoint/2010/main" val="965565036"/>
       </p:ext>
     </p:extLst>
   </p:cSld>

--- a/Paper-and-Pitch/Pitch.pptx
+++ b/Paper-and-Pitch/Pitch.pptx
@@ -11001,7 +11001,7 @@
         <p:spPr>
           <a:xfrm>
             <a:off x="457200" y="457200"/>
-            <a:ext cx="5486400" cy="914400"/>
+            <a:ext cx="6200000" cy="400000"/>
           </a:xfrm>
           <a:prstGeom prst="rect">
             <a:avLst/>
@@ -11009,73 +11009,267 @@
           <a:noFill/>
         </p:spPr>
         <p:txBody>
-          <a:bodyPr wrap="none">
+          <a:bodyPr wrap="square">
             <a:spAutoFit/>
           </a:bodyPr>
           <a:lstStyle/>
           <a:p>
-            <a:pPr>
-              <a:defRPr b="1" sz="3600">
+            <a:pPr algn="l">
+              <a:spcBef>
+                <a:spcPts val="0"/>
+              </a:spcBef>
+              <a:spcAft>
+                <a:spcPts val="0"/>
+              </a:spcAft>
+            </a:pPr>
+            <a:r>
+              <a:rPr sz="1300" b="1">
                 <a:solidFill>
                   <a:srgbClr val="F2A93B"/>
                 </a:solidFill>
-                <a:latin typeface="Cambria"/>
-              </a:defRPr>
+                <a:latin typeface="Calibri"/>
+                <a:ea typeface="Calibri"/>
+                <a:cs typeface="Calibri"/>
+              </a:rPr>
+              <a:t>BEFORE THE RESULTS</a:t>
+            </a:r>
+          </a:p>
+        </p:txBody>
+      </p:sp>
+      <p:sp>
+        <p:nvSpPr>
+          <p:cNvPr id="46" name="TextBox 45"/>
+          <p:cNvSpPr txBox="1"/>
+          <p:nvPr/>
+        </p:nvSpPr>
+        <p:spPr>
+          <a:xfrm>
+            <a:off x="457200" y="900000"/>
+            <a:ext cx="6200000" cy="1100000"/>
+          </a:xfrm>
+          <a:prstGeom prst="rect">
+            <a:avLst/>
+          </a:prstGeom>
+          <a:noFill/>
+        </p:spPr>
+        <p:txBody>
+          <a:bodyPr wrap="square">
+            <a:spAutoFit/>
+          </a:bodyPr>
+          <a:lstStyle/>
+          <a:p>
+            <a:pPr algn="l">
+              <a:spcBef>
+                <a:spcPts val="0"/>
+              </a:spcBef>
+              <a:spcAft>
+                <a:spcPts val="0"/>
+              </a:spcAft>
             </a:pPr>
             <a:r>
-              <a:t>EDUCATIONAL &amp; AI-ASSISTED</a:t>
-            </a:r>
-          </a:p>
-        </p:txBody>
-      </p:sp>
-      <p:sp>
-        <p:nvSpPr>
-          <p:cNvPr id="46" name="TextBox 45"/>
-          <p:cNvSpPr txBox="1"/>
-          <p:nvPr/>
-        </p:nvSpPr>
-        <p:spPr>
-          <a:xfrm>
-            <a:off x="457200" y="1645920"/>
-            <a:ext cx="5486400" cy="4572000"/>
-          </a:xfrm>
-          <a:prstGeom prst="rect">
-            <a:avLst/>
-          </a:prstGeom>
-          <a:noFill/>
-        </p:spPr>
-        <p:txBody>
-          <a:bodyPr wrap="square">
-            <a:spAutoFit/>
-          </a:bodyPr>
-          <a:lstStyle/>
-          <a:p>
-            <a:pPr>
-              <a:spcAft>
-                <a:spcPts val="2400"/>
-              </a:spcAft>
-              <a:defRPr sz="2800">
+              <a:rPr sz="3600" b="1">
                 <a:solidFill>
                   <a:srgbClr val="EAF0FF"/>
                 </a:solidFill>
-                <a:latin typeface="Calibri"/>
-              </a:defRPr>
-            </a:pPr>
-            <a:r>
-              <a:t>This presentation and the accompanying repository are a personal project created for learning and hands-on experience.</a:t>
+                <a:latin typeface="Cambria"/>
+                <a:ea typeface="Cambria"/>
+                <a:cs typeface="Cambria"/>
+              </a:rPr>
+              <a:t>Independent work,</a:t>
             </a:r>
           </a:p>
           <a:p>
-            <a:pPr>
-              <a:defRPr sz="2400">
+            <a:pPr algn="l">
+              <a:spcBef>
+                <a:spcPts val="0"/>
+              </a:spcBef>
+              <a:spcAft>
+                <a:spcPts val="0"/>
+              </a:spcAft>
+            </a:pPr>
+            <a:r>
+              <a:rPr sz="3600" b="1">
+                <a:solidFill>
+                  <a:srgbClr val="EAF0FF"/>
+                </a:solidFill>
+                <a:latin typeface="Cambria"/>
+                <a:ea typeface="Cambria"/>
+                <a:cs typeface="Cambria"/>
+              </a:rPr>
+              <a:t>openly assisted.</a:t>
+            </a:r>
+          </a:p>
+        </p:txBody>
+      </p:sp>
+      <p:sp>
+        <p:nvSpPr>
+          <p:cNvPr id="47" name="Rectangle 46"/>
+          <p:cNvSpPr/>
+          <p:nvPr/>
+        </p:nvSpPr>
+        <p:spPr>
+          <a:xfrm>
+            <a:off x="457200" y="2150000"/>
+            <a:ext cx="900000" cy="18000"/>
+          </a:xfrm>
+          <a:prstGeom prst="rect">
+            <a:avLst/>
+          </a:prstGeom>
+          <a:solidFill>
+            <a:srgbClr val="F2A93B"/>
+          </a:solidFill>
+          <a:ln>
+            <a:noFill/>
+          </a:ln>
+        </p:spPr>
+        <p:style>
+          <a:lnRef idx="1">
+            <a:schemeClr val="accent1"/>
+          </a:lnRef>
+          <a:fillRef idx="3">
+            <a:schemeClr val="accent1"/>
+          </a:fillRef>
+          <a:effectRef idx="2">
+            <a:schemeClr val="accent1"/>
+          </a:effectRef>
+          <a:fontRef idx="minor">
+            <a:schemeClr val="lt1"/>
+          </a:fontRef>
+        </p:style>
+        <p:txBody>
+          <a:bodyPr rtlCol="0" anchor="ctr"/>
+          <a:lstStyle/>
+          <a:p>
+            <a:pPr algn="ctr"/>
+          </a:p>
+        </p:txBody>
+      </p:sp>
+      <p:sp>
+        <p:nvSpPr>
+          <p:cNvPr id="48" name="TextBox 47"/>
+          <p:cNvSpPr txBox="1"/>
+          <p:nvPr/>
+        </p:nvSpPr>
+        <p:spPr>
+          <a:xfrm>
+            <a:off x="457200" y="2350000"/>
+            <a:ext cx="6200000" cy="3200000"/>
+          </a:xfrm>
+          <a:prstGeom prst="rect">
+            <a:avLst/>
+          </a:prstGeom>
+          <a:noFill/>
+        </p:spPr>
+        <p:txBody>
+          <a:bodyPr wrap="square">
+            <a:spAutoFit/>
+          </a:bodyPr>
+          <a:lstStyle/>
+          <a:p>
+            <a:pPr algn="l">
+              <a:spcBef>
+                <a:spcPts val="0"/>
+              </a:spcBef>
+              <a:spcAft>
+                <a:spcPts val="1800"/>
+              </a:spcAft>
+            </a:pPr>
+            <a:r>
+              <a:rPr sz="1600" b="0">
+                <a:solidFill>
+                  <a:srgbClr val="C9D3EE"/>
+                </a:solidFill>
+                <a:latin typeface="Calibri"/>
+                <a:ea typeface="Calibri"/>
+                <a:cs typeface="Calibri"/>
+              </a:rPr>
+              <a:t>An independent, reproducible analysis of a present-day surface-map proxy — not a peer-reviewed planetary-science paper.</a:t>
+            </a:r>
+          </a:p>
+          <a:p>
+            <a:pPr algn="l">
+              <a:spcBef>
+                <a:spcPts val="0"/>
+              </a:spcBef>
+              <a:spcAft>
+                <a:spcPts val="1800"/>
+              </a:spcAft>
+            </a:pPr>
+            <a:r>
+              <a:rPr sz="1600" b="0">
                 <a:solidFill>
                   <a:srgbClr val="9AA7C7"/>
                 </a:solidFill>
                 <a:latin typeface="Calibri"/>
-              </a:defRPr>
+                <a:ea typeface="Calibri"/>
+                <a:cs typeface="Calibri"/>
+              </a:rPr>
+              <a:t>Language models helped with code, drafting, and adversarial review. Scientific framing, design choices, and every claim remain the author’s.</a:t>
+            </a:r>
+          </a:p>
+          <a:p>
+            <a:pPr algn="l">
+              <a:spcBef>
+                <a:spcPts val="0"/>
+              </a:spcBef>
+              <a:spcAft>
+                <a:spcPts val="0"/>
+              </a:spcAft>
             </a:pPr>
             <a:r>
-              <a:t>Artificial Intelligence (Large Language Models) was used extensively throughout its development to help write the code, understand the geophysical concepts, and rigorously catch statistical and logical errors.</a:t>
+              <a:rPr sz="1600" b="0">
+                <a:solidFill>
+                  <a:srgbClr val="9AA7C7"/>
+                </a:solidFill>
+                <a:latin typeface="Calibri"/>
+                <a:ea typeface="Calibri"/>
+                <a:cs typeface="Calibri"/>
+              </a:rPr>
+              <a:t>Built to be checked — hashes, tests, and a public decision history.</a:t>
+            </a:r>
+          </a:p>
+        </p:txBody>
+      </p:sp>
+      <p:sp>
+        <p:nvSpPr>
+          <p:cNvPr id="49" name="TextBox 48"/>
+          <p:cNvSpPr txBox="1"/>
+          <p:nvPr/>
+        </p:nvSpPr>
+        <p:spPr>
+          <a:xfrm>
+            <a:off x="457200" y="5800000"/>
+            <a:ext cx="6200000" cy="400000"/>
+          </a:xfrm>
+          <a:prstGeom prst="rect">
+            <a:avLst/>
+          </a:prstGeom>
+          <a:noFill/>
+        </p:spPr>
+        <p:txBody>
+          <a:bodyPr wrap="square">
+            <a:spAutoFit/>
+          </a:bodyPr>
+          <a:lstStyle/>
+          <a:p>
+            <a:pPr algn="l">
+              <a:spcBef>
+                <a:spcPts val="0"/>
+              </a:spcBef>
+              <a:spcAft>
+                <a:spcPts val="0"/>
+              </a:spcAft>
+            </a:pPr>
+            <a:r>
+              <a:rPr sz="1200" b="0">
+                <a:solidFill>
+                  <a:srgbClr val="9AA7C7"/>
+                </a:solidFill>
+                <a:latin typeface="Calibri"/>
+                <a:ea typeface="Calibri"/>
+                <a:cs typeface="Calibri"/>
+              </a:rPr>
+              <a:t>Jack Wu  ·  v2.0.0  ·  AI tools used; author accountable</a:t>
             </a:r>
           </a:p>
         </p:txBody>

--- a/Paper-and-Pitch/Pitch.pptx
+++ b/Paper-and-Pitch/Pitch.pptx
@@ -2926,7 +2926,7 @@
                 <a:ea typeface="Calibri"/>
                 <a:cs typeface="Calibri"/>
               </a:rPr>
-              <a:t>Jack Wu (lemoon01110)  ·  ORCID 0009-0004-1710-9018  ·  v2.0.0  ·  github.com/lemoon01110/Lunar-Titanium-Magnetism</a:t>
+              <a:t>Jack Wu (lemoon01110) · ORCID 0009-0004-1710-9018 · v2.0.0 · github.com/lemoon01110/Lunar-Titanium-Magnetism</a:t>
             </a:r>
             <a:r>
               <a:rPr sz="1400" b="0" u="none">
@@ -4516,7 +4516,7 @@
                 <a:ea typeface="Calibri"/>
                 <a:cs typeface="Calibri"/>
               </a:rPr>
-              <a:t>ΔPR-AUC +.055306; +TiO₂ .476561 versus controls .421255 (mare descriptive only).</a:t>
+              <a:t>ΔPR-AUC +.055306. +TiO₂ .476561 versus controls .421255 (mare descriptive only).</a:t>
             </a:r>
           </a:p>
         </p:txBody>
@@ -4852,7 +4852,7 @@
                 <a:ea typeface="Calibri"/>
                 <a:cs typeface="Calibri"/>
               </a:rPr>
-              <a:t>Primary continuous R² .3649 → .3503; raw-Ti increment +.014559±.012575. Common-fold gain vs full raw-Ti: +.001445.</a:t>
+              <a:t>Primary continuous R² .3649 → .3503. Raw-Ti increment +.014559±.012575. Common-fold gain vs full raw-Ti: +.001445.</a:t>
             </a:r>
           </a:p>
         </p:txBody>
@@ -5024,7 +5024,7 @@
                 <a:ea typeface="Calibri"/>
                 <a:cs typeface="Calibri"/>
               </a:rPr>
-              <a:t>Interpretation:  Report binary and continuous estimands separately. Registered binary mare criterion did not pass; continuous increments stay descriptive. Footprint still supplies ~one dependence-scale unit.</a:t>
+              <a:t>Interpretation: Report binary and continuous estimands separately. Registered binary mare criterion did not pass. Continuous increments stay descriptive. Footprint still supplies ~one dependence-scale unit.</a:t>
             </a:r>
             <a:r>
               <a:rPr sz="1550" b="0" u="none">
@@ -6883,7 +6883,7 @@
                 <a:ea typeface="Calibri"/>
                 <a:cs typeface="Calibri"/>
               </a:rPr>
-              <a:t>Full PR-AUC .394936 vs fold-matched null mean .231862, SD .103869 and 95th .490983 (p=.137931); H2 match p=.172414 (not recovered).</a:t>
+              <a:t>Full PR-AUC .394936 vs fold-matched null mean .231862, SD .103869 and 95th .490983 (p=.137931). H2 match p=.172414 (not recovered).</a:t>
             </a:r>
           </a:p>
         </p:txBody>
@@ -7098,7 +7098,7 @@
                 <a:ea typeface="Calibri"/>
                 <a:cs typeface="Calibri"/>
               </a:rPr>
-              <a:t>H2 recovery at β=0/.5/1/1.5/2/3–4: 3/30, 18/30, 27/30, 28/30, 29/30, 30/30. Point MDE β=1; Wilson-lower MDE β=2.</a:t>
+              <a:t>H2 recovery at β=0/.5/1/1.5/2/3-4: 3/30, 18/30, 27/30, 28/30, 29/30, 30/30. Point MDE β=1. Wilson-lower MDE β=2.</a:t>
             </a:r>
           </a:p>
         </p:txBody>
@@ -7270,7 +7270,7 @@
                 <a:ea typeface="Cambria"/>
                 <a:cs typeface="Cambria"/>
               </a:rPr>
-              <a:t>INCONCLUSIVE  ·  failure-to-detect, not disproof</a:t>
+              <a:t>INCONCLUSIVE · failure-to-detect, not disproof</a:t>
             </a:r>
           </a:p>
           <a:p xmlns:a="http://schemas.openxmlformats.org/drawingml/2006/main">
@@ -7348,7 +7348,7 @@
                 <a:ea typeface="Calibri"/>
                 <a:cs typeface="Calibri"/>
               </a:rPr>
-              <a:t>β=1 implies risk +.0557 and OR≈607; no justified target effect.</a:t>
+              <a:t>β=1 implies risk +.0557 and OR≈607. No justified target effect.</a:t>
             </a:r>
           </a:p>
         </p:txBody>
@@ -9111,7 +9111,7 @@
                 <a:ea typeface="Calibri"/>
                 <a:cs typeface="Calibri"/>
               </a:rPr>
-              <a:t>Treat this as a surface-proxy spatial study—not a temporal dynamo test.</a:t>
+              <a:t>Treat this as a surface-proxy spatial study, not a temporal dynamo test.</a:t>
             </a:r>
           </a:p>
         </p:txBody>
@@ -9374,8 +9374,8 @@
                 <a:ea typeface="Calibri"/>
                 <a:cs typeface="Calibri"/>
               </a:rPr>
-              <a:t>Thank you  ·  Jack Wu (lemoon01110)  ·  ORCID 0009-0004-1710-9018  ·  v2.0.0
-github.com/lemoon01110/Lunar-Titanium-Magnetism  ·  code MIT · paper CC BY 4.0</a:t>
+              <a:t>Thank you · Jack Wu (lemoon01110) · ORCID 0009-0004-1710-9018 · v2.0.0
+github.com/lemoon01110/Lunar-Titanium-Magnetism · code MIT · paper CC BY 4.0</a:t>
             </a:r>
             <a:r>
               <a:rPr sz="1500" b="0" u="none">
@@ -11183,7 +11183,7 @@
                 <a:ea typeface="Calibri"/>
                 <a:cs typeface="Calibri"/>
               </a:rPr>
-              <a:t>An independent, reproducible analysis of a present-day surface-map proxy — not a peer-reviewed planetary-science paper.</a:t>
+              <a:t>An independent, reproducible analysis of a present-day surface-map proxy, not peer reviewed yet.</a:t>
             </a:r>
           </a:p>
           <a:p>
@@ -11225,7 +11225,7 @@
                 <a:ea typeface="Calibri"/>
                 <a:cs typeface="Calibri"/>
               </a:rPr>
-              <a:t>Built to be checked — hashes, tests, and a public decision history.</a:t>
+              <a:t>Built to be checked: hashes, tests, and a public decision history.</a:t>
             </a:r>
           </a:p>
         </p:txBody>
@@ -11269,7 +11269,7 @@
                 <a:ea typeface="Calibri"/>
                 <a:cs typeface="Calibri"/>
               </a:rPr>
-              <a:t>Jack Wu  ·  v2.0.0  ·  AI tools used; author accountable</a:t>
+              <a:t>Jack Wu · v2.0.0 · AI tools used, author accountable</a:t>
             </a:r>
           </a:p>
         </p:txBody>
@@ -15319,7 +15319,7 @@
                 <a:ea typeface="Calibri"/>
                 <a:cs typeface="Calibri"/>
               </a:rPr>
-              <a:t>Favored mechanism: radiogenic melting of ilmenite-bearing cumulates at the core–mantle boundary after overturn, raising core heat flux (not simply continued sinking of Ti-rich material).</a:t>
+              <a:t>Favored mechanism: radiogenic melting of ilmenite-bearing cumulates at the core-mantle boundary after overturn, raising core heat flux (not simply continued sinking of Ti-rich material).</a:t>
             </a:r>
           </a:p>
         </p:txBody>
@@ -17436,7 +17436,7 @@
                 <a:ea typeface="Calibri"/>
                 <a:cs typeface="Calibri"/>
               </a:rPr>
-              <a:t>Author-declared analysis plan; timing cannot be independently verified (repo history begins after results). Binding scores use default-config XGBoost; nested tuning is diagnostic only.</a:t>
+              <a:t>Author-declared analysis plan. Timing cannot be independently verified (repo history begins after results). Binding scores use default-config XGBoost. Nested tuning is diagnostic only.</a:t>
             </a:r>
           </a:p>
         </p:txBody>
@@ -17710,7 +17710,7 @@
                 <a:ea typeface="Calibri"/>
                 <a:cs typeface="Calibri"/>
               </a:rPr>
-              <a:t>Positive and negative outcomes are explicit; negative claims require adequate detection power.</a:t>
+              <a:t>Positive and negative outcomes are explicit. Negative claims require adequate detection power.</a:t>
             </a:r>
           </a:p>
         </p:txBody>
@@ -17984,7 +17984,7 @@
                 <a:ea typeface="Calibri"/>
                 <a:cs typeface="Calibri"/>
               </a:rPr>
-              <a:t>The result concerns spatial co-location—not Nichols et al.'s temporal dynamo mechanism.</a:t>
+              <a:t>The result concerns spatial co-location, not Nichols et al.'s temporal dynamo mechanism.</a:t>
             </a:r>
           </a:p>
         </p:txBody>
@@ -19547,7 +19547,7 @@
                 <a:ea typeface="Calibri"/>
                 <a:cs typeface="Calibri"/>
               </a:rPr>
-              <a:t>Magnetic field  (what we predict)</a:t>
+              <a:t>Magnetic field (what we predict)</a:t>
             </a:r>
           </a:p>
         </p:txBody>
@@ -19606,7 +19606,7 @@
                 <a:ea typeface="Calibri"/>
                 <a:cs typeface="Calibri"/>
               </a:rPr>
-              <a:t>Tsunakawa et al. 2015 surface SVM via Wieczorek T2015_449 (surface-evaluated |B|; primary threshold 10 nT)</a:t>
+              <a:t>Tsunakawa et al. 2015 surface SVM via Wieczorek T2015_449 (surface-evaluated |B|, primary threshold 10 nT)</a:t>
             </a:r>
           </a:p>
         </p:txBody>
@@ -19762,7 +19762,7 @@
                 <a:ea typeface="Calibri"/>
                 <a:cs typeface="Calibri"/>
               </a:rPr>
-              <a:t>Surface titanium — TiO₂  (proxy)</a:t>
+              <a:t>Surface titanium: TiO₂ (proxy)</a:t>
             </a:r>
           </a:p>
         </p:txBody>
@@ -19821,7 +19821,7 @@
                 <a:ea typeface="Calibri"/>
                 <a:cs typeface="Calibri"/>
               </a:rPr>
-              <a:t>LROC WAC UV/Vis; values &lt;2 wt% are non-quantitative (product floor); primary uses ≥2 wt% only</a:t>
+              <a:t>LROC WAC UV/Vis. Values &lt;2 wt% are non-quantitative (product floor). Primary uses ≥2 wt% only</a:t>
             </a:r>
           </a:p>
         </p:txBody>
@@ -20036,7 +20036,7 @@
                 <a:ea typeface="Calibri"/>
                 <a:cs typeface="Calibri"/>
               </a:rPr>
-              <a:t>GRAIL GRGM1200A — subsurface density structure</a:t>
+              <a:t>GRAIL GRGM1200A: subsurface density structure</a:t>
             </a:r>
           </a:p>
         </p:txBody>
@@ -23731,7 +23731,7 @@
                 <a:ea typeface="Calibri"/>
                 <a:cs typeface="Calibri"/>
               </a:rPr>
-              <a:t>Why blocking still falls short:  30° (~910 km) and 60° (~1819 km) holdouts remain below the ~3752 km dependence range. Both nulls used the first 100 eligible 5/5-fold unique nonidentity shifts from 125 candidates; 12 four-fold candidates were rejected. Primary prevalence ≈ .0384 (10 nT, quantitative TiO₂).</a:t>
+              <a:t>Why blocking still falls short: 30° (~910 km) and 60° (~1819 km) holdouts remain below the ~3752 km dependence range. Both nulls used the first 100 eligible 5/5-fold unique nonidentity shifts from 125 candidates. 12 four-fold candidates were rejected. Primary prevalence ≈ .0384 (10 nT, quantitative TiO₂).</a:t>
             </a:r>
             <a:r>
               <a:rPr sz="1450" b="0" u="none">
@@ -25364,7 +25364,7 @@
                 <a:ea typeface="Calibri"/>
                 <a:cs typeface="Calibri"/>
               </a:rPr>
-              <a:t>Author-declared plan only — not an independently timestamped preregistration. v1.0.0 is superseded.</a:t>
+              <a:t>Author-declared plan only, not an independently timestamped preregistration. v1.0.0 is superseded.</a:t>
             </a:r>
           </a:p>
         </p:txBody>
@@ -25579,7 +25579,7 @@
                 <a:ea typeface="Calibri"/>
                 <a:cs typeface="Calibri"/>
               </a:rPr>
-              <a:t>Inference traps are documented and corrected in the open—including the matched H2 null.</a:t>
+              <a:t>Inference traps are documented and corrected in the open, including the matched H2 null.</a:t>
             </a:r>
           </a:p>
         </p:txBody>
@@ -27717,7 +27717,7 @@
                 <a:ea typeface="Calibri"/>
                 <a:cs typeface="Calibri"/>
               </a:rPr>
-              <a:t>controls .3649 → .3503 with full Ti family; descriptive only</a:t>
+              <a:t>controls .3649 → .3503 with full Ti family. Descriptive only</a:t>
             </a:r>
           </a:p>
         </p:txBody>
@@ -27889,7 +27889,7 @@
                 <a:ea typeface="Calibri"/>
                 <a:cs typeface="Calibri"/>
               </a:rPr>
-              <a:t>remove raw/buffered Ti + Ti×gravity interactions; Wilcoxon p unavailable</a:t>
+              <a:t>remove raw/buffered Ti + Ti×gravity interactions. Wilcoxon p unavailable</a:t>
             </a:r>
           </a:p>
         </p:txBody>
@@ -28174,7 +28174,7 @@
                 <a:ea typeface="Calibri"/>
                 <a:cs typeface="Calibri"/>
               </a:rPr>
-              <a:t>STATUS:  INCONCLUSIVE_LOW_POWER  ·  failure-to-detect, not disproof</a:t>
+              <a:t>STATUS: INCONCLUSIVE_LOW_POWER · failure-to-detect, not disproof</a:t>
             </a:r>
             <a:r>
               <a:rPr sz="1800" b="1" u="none">

--- a/Paper-and-Pitch/Pitch.pptx
+++ b/Paper-and-Pitch/Pitch.pptx
@@ -11225,7 +11225,7 @@
                 <a:ea typeface="Calibri"/>
                 <a:cs typeface="Calibri"/>
               </a:rPr>
-              <a:t>Built to be checked: hashes, tests, and a public decision history.</a:t>
+              <a:t/>
             </a:r>
           </a:p>
         </p:txBody>
